--- a/docs/EPICS_Training.pptx
+++ b/docs/EPICS_Training.pptx
@@ -10613,7 +10613,7 @@
         <p:spPr>
           <a:xfrm>
             <a:off x="548640" y="1188720"/>
-            <a:ext cx="11064240" cy="5120640"/>
+            <a:ext cx="11064240" cy="5468454"/>
           </a:xfrm>
           <a:prstGeom prst="roundRect">
             <a:avLst/>
@@ -10695,7 +10695,7 @@
         <p:spPr>
           <a:xfrm>
             <a:off x="822960" y="1371600"/>
-            <a:ext cx="10515600" cy="4754880"/>
+            <a:ext cx="10515600" cy="5121915"/>
           </a:xfrm>
           <a:prstGeom prst="rect">
             <a:avLst/>
@@ -10720,6 +10720,7 @@
               </a:defRPr>
             </a:pPr>
             <a:r>
+              <a:rPr sz="1050" dirty="0"/>
               <a:t>from p4p.client.thread import Context</a:t>
             </a:r>
           </a:p>
@@ -10736,6 +10737,7 @@
               </a:defRPr>
             </a:pPr>
             <a:r>
+              <a:rPr sz="1050" dirty="0"/>
               <a:t>import time</a:t>
             </a:r>
           </a:p>
@@ -10751,7 +10753,7 @@
                 <a:latin typeface="Consolas"/>
               </a:defRPr>
             </a:pPr>
-            <a:endParaRPr/>
+            <a:endParaRPr sz="1050" dirty="0"/>
           </a:p>
           <a:p>
             <a:pPr>
@@ -10766,7 +10768,20 @@
               </a:defRPr>
             </a:pPr>
             <a:r>
-              <a:t>ctx = Context('pva')</a:t>
+              <a:rPr sz="1050" dirty="0" err="1"/>
+              <a:t>ctx</a:t>
+            </a:r>
+            <a:r>
+              <a:rPr sz="1050" dirty="0"/>
+              <a:t> = Context('</a:t>
+            </a:r>
+            <a:r>
+              <a:rPr sz="1050" dirty="0" err="1"/>
+              <a:t>pva</a:t>
+            </a:r>
+            <a:r>
+              <a:rPr sz="1050" dirty="0"/>
+              <a:t>')</a:t>
             </a:r>
           </a:p>
           <a:p>
@@ -10782,6 +10797,7 @@
               </a:defRPr>
             </a:pPr>
             <a:r>
+              <a:rPr sz="1050" dirty="0"/>
               <a:t>CAM = 'LAB:SIM:CAM01'</a:t>
             </a:r>
           </a:p>
@@ -10798,6 +10814,7 @@
               </a:defRPr>
             </a:pPr>
             <a:r>
+              <a:rPr sz="1050" dirty="0"/>
               <a:t>GAIN = 0.01       # pixels -&gt; motor units</a:t>
             </a:r>
           </a:p>
@@ -10814,6 +10831,7 @@
               </a:defRPr>
             </a:pPr>
             <a:r>
+              <a:rPr sz="1050" dirty="0"/>
               <a:t>TOLERANCE = 5.0   # pixels</a:t>
             </a:r>
           </a:p>
@@ -10829,7 +10847,7 @@
                 <a:latin typeface="Consolas"/>
               </a:defRPr>
             </a:pPr>
-            <a:endParaRPr/>
+            <a:endParaRPr sz="1050" dirty="0"/>
           </a:p>
           <a:p>
             <a:pPr>
@@ -10844,6 +10862,7 @@
               </a:defRPr>
             </a:pPr>
             <a:r>
+              <a:rPr sz="1050" dirty="0"/>
               <a:t># Step 1: enable centroid calculation</a:t>
             </a:r>
           </a:p>
@@ -10860,7 +10879,12 @@
               </a:defRPr>
             </a:pPr>
             <a:r>
-              <a:t>ctx.put(f'{CAM}:Stats1:ComputeCentroid', 1)</a:t>
+              <a:rPr sz="1050" dirty="0" err="1"/>
+              <a:t>ctx.put</a:t>
+            </a:r>
+            <a:r>
+              <a:rPr sz="1050" dirty="0"/>
+              <a:t>(f'{CAM}:Stats1:ComputeCentroid', 1)</a:t>
             </a:r>
           </a:p>
           <a:p>
@@ -10875,7 +10899,7 @@
                 <a:latin typeface="Consolas"/>
               </a:defRPr>
             </a:pPr>
-            <a:endParaRPr/>
+            <a:endParaRPr sz="1050" dirty="0"/>
           </a:p>
           <a:p>
             <a:pPr>
@@ -10890,6 +10914,7 @@
               </a:defRPr>
             </a:pPr>
             <a:r>
+              <a:rPr sz="1050" dirty="0"/>
               <a:t>for iteration in range(20):  # max 20 iterations</a:t>
             </a:r>
           </a:p>
@@ -10906,6 +10931,7 @@
               </a:defRPr>
             </a:pPr>
             <a:r>
+              <a:rPr sz="1050" dirty="0"/>
               <a:t>    # Step 2a: read beam centroid</a:t>
             </a:r>
           </a:p>
@@ -10922,7 +10948,16 @@
               </a:defRPr>
             </a:pPr>
             <a:r>
-              <a:t>    cx = ctx.get(f'{CAM}:Stats1:CentroidX_RBV')</a:t>
+              <a:rPr sz="1050" dirty="0"/>
+              <a:t>    cx = </a:t>
+            </a:r>
+            <a:r>
+              <a:rPr sz="1050" dirty="0" err="1"/>
+              <a:t>ctx.get</a:t>
+            </a:r>
+            <a:r>
+              <a:rPr sz="1050" dirty="0"/>
+              <a:t>(f'{CAM}:Stats1:CentroidX_RBV')</a:t>
             </a:r>
           </a:p>
           <a:p>
@@ -10938,7 +10973,16 @@
               </a:defRPr>
             </a:pPr>
             <a:r>
-              <a:t>    cy = ctx.get(f'{CAM}:Stats1:CentroidY_RBV')</a:t>
+              <a:rPr sz="1050" dirty="0"/>
+              <a:t>    cy = </a:t>
+            </a:r>
+            <a:r>
+              <a:rPr sz="1050" dirty="0" err="1"/>
+              <a:t>ctx.get</a:t>
+            </a:r>
+            <a:r>
+              <a:rPr sz="1050" dirty="0"/>
+              <a:t>(f'{CAM}:Stats1:CentroidY_RBV')</a:t>
             </a:r>
           </a:p>
           <a:p>
@@ -10953,7 +10997,7 @@
                 <a:latin typeface="Consolas"/>
               </a:defRPr>
             </a:pPr>
-            <a:endParaRPr/>
+            <a:endParaRPr sz="1050" dirty="0"/>
           </a:p>
           <a:p>
             <a:pPr>
@@ -10968,6 +11012,7 @@
               </a:defRPr>
             </a:pPr>
             <a:r>
+              <a:rPr sz="1050" dirty="0"/>
               <a:t>    # Step 2b: read overlay center  (FILL THIS IN!)</a:t>
             </a:r>
           </a:p>
@@ -10984,7 +11029,16 @@
               </a:defRPr>
             </a:pPr>
             <a:r>
-              <a:t>    # tx = ...</a:t>
+              <a:rPr sz="1050" dirty="0"/>
+              <a:t>    # </a:t>
+            </a:r>
+            <a:r>
+              <a:rPr sz="1050" dirty="0" err="1"/>
+              <a:t>tx</a:t>
+            </a:r>
+            <a:r>
+              <a:rPr sz="1050" dirty="0"/>
+              <a:t> = ...</a:t>
             </a:r>
           </a:p>
           <a:p>
@@ -11000,6 +11054,7 @@
               </a:defRPr>
             </a:pPr>
             <a:r>
+              <a:rPr sz="1050" dirty="0"/>
               <a:t>    # ty = ...</a:t>
             </a:r>
           </a:p>
@@ -11015,7 +11070,7 @@
                 <a:latin typeface="Consolas"/>
               </a:defRPr>
             </a:pPr>
-            <a:endParaRPr/>
+            <a:endParaRPr sz="1050" dirty="0"/>
           </a:p>
           <a:p>
             <a:pPr>
@@ -11030,6 +11085,7 @@
               </a:defRPr>
             </a:pPr>
             <a:r>
+              <a:rPr sz="1050" dirty="0"/>
               <a:t>    # Step 2c-d: compute error and check convergence</a:t>
             </a:r>
           </a:p>
@@ -11046,6 +11102,7 @@
               </a:defRPr>
             </a:pPr>
             <a:r>
+              <a:rPr sz="1050" dirty="0"/>
               <a:t>    # ...</a:t>
             </a:r>
           </a:p>
@@ -11061,7 +11118,7 @@
                 <a:latin typeface="Consolas"/>
               </a:defRPr>
             </a:pPr>
-            <a:endParaRPr/>
+            <a:endParaRPr sz="1050" dirty="0"/>
           </a:p>
           <a:p>
             <a:pPr>
@@ -11076,6 +11133,7 @@
               </a:defRPr>
             </a:pPr>
             <a:r>
+              <a:rPr sz="1050" dirty="0"/>
               <a:t>    # Step 2e-h: move motors</a:t>
             </a:r>
           </a:p>
@@ -11092,6 +11150,7 @@
               </a:defRPr>
             </a:pPr>
             <a:r>
+              <a:rPr sz="1050" dirty="0"/>
               <a:t>    # ...</a:t>
             </a:r>
           </a:p>
@@ -11107,7 +11166,7 @@
                 <a:latin typeface="Consolas"/>
               </a:defRPr>
             </a:pPr>
-            <a:endParaRPr/>
+            <a:endParaRPr sz="1050" dirty="0"/>
           </a:p>
           <a:p>
             <a:pPr>
@@ -11122,7 +11181,16 @@
               </a:defRPr>
             </a:pPr>
             <a:r>
-              <a:t>    time.sleep(1)  # wait before next iteration</a:t>
+              <a:rPr sz="1050" dirty="0"/>
+              <a:t>    </a:t>
+            </a:r>
+            <a:r>
+              <a:rPr sz="1050" dirty="0" err="1"/>
+              <a:t>time.sleep</a:t>
+            </a:r>
+            <a:r>
+              <a:rPr sz="1050" dirty="0"/>
+              <a:t>(1)  # wait before next iteration</a:t>
             </a:r>
           </a:p>
         </p:txBody>
@@ -11287,7 +11355,7 @@
         <p:spPr>
           <a:xfrm>
             <a:off x="822960" y="1371600"/>
-            <a:ext cx="10515600" cy="4754880"/>
+            <a:ext cx="10515600" cy="4744889"/>
           </a:xfrm>
           <a:prstGeom prst="rect">
             <a:avLst/>
@@ -11312,6 +11380,7 @@
               </a:defRPr>
             </a:pPr>
             <a:r>
+              <a:rPr sz="1100" dirty="0"/>
               <a:t>from p4p.client.thread import Context</a:t>
             </a:r>
           </a:p>
@@ -11328,6 +11397,7 @@
               </a:defRPr>
             </a:pPr>
             <a:r>
+              <a:rPr sz="1100" dirty="0"/>
               <a:t>import time</a:t>
             </a:r>
           </a:p>
@@ -11343,7 +11413,7 @@
                 <a:latin typeface="Consolas"/>
               </a:defRPr>
             </a:pPr>
-            <a:endParaRPr/>
+            <a:endParaRPr sz="1100" dirty="0"/>
           </a:p>
           <a:p>
             <a:pPr>
@@ -11358,7 +11428,20 @@
               </a:defRPr>
             </a:pPr>
             <a:r>
-              <a:t>ctx = Context('pva')</a:t>
+              <a:rPr sz="1100" dirty="0" err="1"/>
+              <a:t>ctx</a:t>
+            </a:r>
+            <a:r>
+              <a:rPr sz="1100" dirty="0"/>
+              <a:t> = Context('</a:t>
+            </a:r>
+            <a:r>
+              <a:rPr sz="1100" dirty="0" err="1"/>
+              <a:t>pva</a:t>
+            </a:r>
+            <a:r>
+              <a:rPr sz="1100" dirty="0"/>
+              <a:t>')</a:t>
             </a:r>
           </a:p>
           <a:p>
@@ -11374,6 +11457,7 @@
               </a:defRPr>
             </a:pPr>
             <a:r>
+              <a:rPr sz="1100" dirty="0"/>
               <a:t>CAM  = 'LAB:SIM:CAM01'</a:t>
             </a:r>
           </a:p>
@@ -11390,6 +11474,7 @@
               </a:defRPr>
             </a:pPr>
             <a:r>
+              <a:rPr sz="1100" dirty="0"/>
               <a:t>MOTX = 'LAB:SIM:HMIR'</a:t>
             </a:r>
           </a:p>
@@ -11406,6 +11491,7 @@
               </a:defRPr>
             </a:pPr>
             <a:r>
+              <a:rPr sz="1100" dirty="0"/>
               <a:t>MOTY = 'LAB:SIM:VMIR'</a:t>
             </a:r>
           </a:p>
@@ -11422,6 +11508,7 @@
               </a:defRPr>
             </a:pPr>
             <a:r>
+              <a:rPr sz="1100" dirty="0"/>
               <a:t>GAIN = 0.01</a:t>
             </a:r>
           </a:p>
@@ -11438,6 +11525,7 @@
               </a:defRPr>
             </a:pPr>
             <a:r>
+              <a:rPr sz="1100" dirty="0"/>
               <a:t>TOLERANCE = 5.0</a:t>
             </a:r>
           </a:p>
@@ -11453,7 +11541,7 @@
                 <a:latin typeface="Consolas"/>
               </a:defRPr>
             </a:pPr>
-            <a:endParaRPr/>
+            <a:endParaRPr sz="1100" dirty="0"/>
           </a:p>
           <a:p>
             <a:pPr>
@@ -11468,6 +11556,7 @@
               </a:defRPr>
             </a:pPr>
             <a:r>
+              <a:rPr sz="1100" dirty="0"/>
               <a:t># Enable centroid</a:t>
             </a:r>
           </a:p>
@@ -11484,7 +11573,12 @@
               </a:defRPr>
             </a:pPr>
             <a:r>
-              <a:t>ctx.put(f'{CAM}:Stats1:ComputeCentroid', 1)</a:t>
+              <a:rPr sz="1100" dirty="0" err="1"/>
+              <a:t>ctx.put</a:t>
+            </a:r>
+            <a:r>
+              <a:rPr sz="1100" dirty="0"/>
+              <a:t>(f'{CAM}:Stats1:ComputeCentroid', 1)</a:t>
             </a:r>
           </a:p>
           <a:p>
@@ -11500,7 +11594,12 @@
               </a:defRPr>
             </a:pPr>
             <a:r>
-              <a:t>time.sleep(0.5)</a:t>
+              <a:rPr sz="1100" dirty="0" err="1"/>
+              <a:t>time.sleep</a:t>
+            </a:r>
+            <a:r>
+              <a:rPr sz="1100" dirty="0"/>
+              <a:t>(0.5)</a:t>
             </a:r>
           </a:p>
           <a:p>
@@ -11515,7 +11614,7 @@
                 <a:latin typeface="Consolas"/>
               </a:defRPr>
             </a:pPr>
-            <a:endParaRPr/>
+            <a:endParaRPr sz="1100" dirty="0"/>
           </a:p>
           <a:p>
             <a:pPr>
@@ -11530,7 +11629,16 @@
               </a:defRPr>
             </a:pPr>
             <a:r>
-              <a:t>for i in range(20):</a:t>
+              <a:rPr sz="1100" dirty="0"/>
+              <a:t>for </a:t>
+            </a:r>
+            <a:r>
+              <a:rPr sz="1100" dirty="0" err="1"/>
+              <a:t>i</a:t>
+            </a:r>
+            <a:r>
+              <a:rPr sz="1100" dirty="0"/>
+              <a:t> in range(20):</a:t>
             </a:r>
           </a:p>
           <a:p>
@@ -11546,6 +11654,7 @@
               </a:defRPr>
             </a:pPr>
             <a:r>
+              <a:rPr sz="1100" dirty="0"/>
               <a:t>    # Read beam centroid</a:t>
             </a:r>
           </a:p>
@@ -11562,7 +11671,16 @@
               </a:defRPr>
             </a:pPr>
             <a:r>
-              <a:t>    cx = ctx.get(f'{CAM}:Stats1:CentroidX_RBV')</a:t>
+              <a:rPr sz="1100" dirty="0"/>
+              <a:t>    cx = </a:t>
+            </a:r>
+            <a:r>
+              <a:rPr sz="1100" dirty="0" err="1"/>
+              <a:t>ctx.get</a:t>
+            </a:r>
+            <a:r>
+              <a:rPr sz="1100" dirty="0"/>
+              <a:t>(f'{CAM}:Stats1:CentroidX_RBV')</a:t>
             </a:r>
           </a:p>
           <a:p>
@@ -11578,7 +11696,16 @@
               </a:defRPr>
             </a:pPr>
             <a:r>
-              <a:t>    cy = ctx.get(f'{CAM}:Stats1:CentroidY_RBV')</a:t>
+              <a:rPr sz="1100" dirty="0"/>
+              <a:t>    cy = </a:t>
+            </a:r>
+            <a:r>
+              <a:rPr sz="1100" dirty="0" err="1"/>
+              <a:t>ctx.get</a:t>
+            </a:r>
+            <a:r>
+              <a:rPr sz="1100" dirty="0"/>
+              <a:t>(f'{CAM}:Stats1:CentroidY_RBV')</a:t>
             </a:r>
           </a:p>
           <a:p>
@@ -11594,6 +11721,7 @@
               </a:defRPr>
             </a:pPr>
             <a:r>
+              <a:rPr sz="1100" dirty="0"/>
               <a:t>    # Read overlay 1 center</a:t>
             </a:r>
           </a:p>
@@ -11610,7 +11738,16 @@
               </a:defRPr>
             </a:pPr>
             <a:r>
-              <a:t>    ox = ctx.get(f'{CAM}:Overlay1:1:PositionX_RBV')</a:t>
+              <a:rPr sz="1100" dirty="0"/>
+              <a:t>    ox = </a:t>
+            </a:r>
+            <a:r>
+              <a:rPr sz="1100" dirty="0" err="1"/>
+              <a:t>ctx.get</a:t>
+            </a:r>
+            <a:r>
+              <a:rPr sz="1100" dirty="0"/>
+              <a:t>(f'{CAM}:Overlay1:1:PositionX_RBV')</a:t>
             </a:r>
           </a:p>
           <a:p>
@@ -11626,7 +11763,16 @@
               </a:defRPr>
             </a:pPr>
             <a:r>
-              <a:t>    oy = ctx.get(f'{CAM}:Overlay1:1:PositionY_RBV')</a:t>
+              <a:rPr sz="1100" dirty="0"/>
+              <a:t>    oy = </a:t>
+            </a:r>
+            <a:r>
+              <a:rPr sz="1100" dirty="0" err="1"/>
+              <a:t>ctx.get</a:t>
+            </a:r>
+            <a:r>
+              <a:rPr sz="1100" dirty="0"/>
+              <a:t>(f'{CAM}:Overlay1:1:PositionY_RBV')</a:t>
             </a:r>
           </a:p>
           <a:p>
@@ -11642,7 +11788,24 @@
               </a:defRPr>
             </a:pPr>
             <a:r>
-              <a:t>    sx = ctx.get(f'{CAM}:Overlay1:1:SizeX_RBV')</a:t>
+              <a:rPr sz="1100" dirty="0"/>
+              <a:t>    </a:t>
+            </a:r>
+            <a:r>
+              <a:rPr sz="1100" dirty="0" err="1"/>
+              <a:t>sx</a:t>
+            </a:r>
+            <a:r>
+              <a:rPr sz="1100" dirty="0"/>
+              <a:t> = </a:t>
+            </a:r>
+            <a:r>
+              <a:rPr sz="1100" dirty="0" err="1"/>
+              <a:t>ctx.get</a:t>
+            </a:r>
+            <a:r>
+              <a:rPr sz="1100" dirty="0"/>
+              <a:t>(f'{CAM}:Overlay1:1:SizeX_RBV')</a:t>
             </a:r>
           </a:p>
           <a:p>
@@ -11658,7 +11821,24 @@
               </a:defRPr>
             </a:pPr>
             <a:r>
-              <a:t>    sy = ctx.get(f'{CAM}:Overlay1:1:SizeY_RBV')</a:t>
+              <a:rPr sz="1100" dirty="0"/>
+              <a:t>    </a:t>
+            </a:r>
+            <a:r>
+              <a:rPr sz="1100" dirty="0" err="1"/>
+              <a:t>sy</a:t>
+            </a:r>
+            <a:r>
+              <a:rPr sz="1100" dirty="0"/>
+              <a:t> = </a:t>
+            </a:r>
+            <a:r>
+              <a:rPr sz="1100" dirty="0" err="1"/>
+              <a:t>ctx.get</a:t>
+            </a:r>
+            <a:r>
+              <a:rPr sz="1100" dirty="0"/>
+              <a:t>(f'{CAM}:Overlay1:1:SizeY_RBV')</a:t>
             </a:r>
           </a:p>
           <a:p>
@@ -11674,7 +11854,32 @@
               </a:defRPr>
             </a:pPr>
             <a:r>
-              <a:t>    tx, ty = ox + sx/2, oy + sy/2</a:t>
+              <a:rPr sz="1100" dirty="0"/>
+              <a:t>    </a:t>
+            </a:r>
+            <a:r>
+              <a:rPr sz="1100" dirty="0" err="1"/>
+              <a:t>tx</a:t>
+            </a:r>
+            <a:r>
+              <a:rPr sz="1100" dirty="0"/>
+              <a:t>, ty = ox + </a:t>
+            </a:r>
+            <a:r>
+              <a:rPr sz="1100" dirty="0" err="1"/>
+              <a:t>sx</a:t>
+            </a:r>
+            <a:r>
+              <a:rPr sz="1100" dirty="0"/>
+              <a:t>/2, oy + </a:t>
+            </a:r>
+            <a:r>
+              <a:rPr sz="1100" dirty="0" err="1"/>
+              <a:t>sy</a:t>
+            </a:r>
+            <a:r>
+              <a:rPr sz="1100" dirty="0"/>
+              <a:t>/2</a:t>
             </a:r>
           </a:p>
         </p:txBody>
@@ -12528,7 +12733,7 @@
           <a:lstStyle/>
           <a:p>
             <a:pPr algn="ctr"/>
-            <a:endParaRPr/>
+            <a:endParaRPr sz="1100"/>
           </a:p>
         </p:txBody>
       </p:sp>
@@ -12577,7 +12782,7 @@
         <p:spPr>
           <a:xfrm>
             <a:off x="822960" y="1371600"/>
-            <a:ext cx="10515600" cy="4754880"/>
+            <a:ext cx="10515600" cy="5042406"/>
           </a:xfrm>
           <a:prstGeom prst="rect">
             <a:avLst/>
@@ -12602,8 +12807,22 @@
               </a:defRPr>
             </a:pPr>
             <a:r>
-              <a:t>import matplotlib.pyplot as plt</a:t>
-            </a:r>
+              <a:rPr sz="1400" dirty="0"/>
+              <a:t>import </a:t>
+            </a:r>
+            <a:r>
+              <a:rPr sz="1400" dirty="0" err="1"/>
+              <a:t>matplotlib.pyplot</a:t>
+            </a:r>
+            <a:r>
+              <a:rPr sz="1400" dirty="0"/>
+              <a:t> as </a:t>
+            </a:r>
+            <a:r>
+              <a:rPr sz="1400" dirty="0" err="1"/>
+              <a:t>plt</a:t>
+            </a:r>
+            <a:endParaRPr sz="1400" dirty="0"/>
           </a:p>
           <a:p>
             <a:pPr>
@@ -12617,7 +12836,7 @@
                 <a:latin typeface="Consolas"/>
               </a:defRPr>
             </a:pPr>
-            <a:endParaRPr/>
+            <a:endParaRPr sz="1400" dirty="0"/>
           </a:p>
           <a:p>
             <a:pPr>
@@ -12632,6 +12851,7 @@
               </a:defRPr>
             </a:pPr>
             <a:r>
+              <a:rPr sz="1400" dirty="0"/>
               <a:t># (after running the loop, collect errors in a list)</a:t>
             </a:r>
           </a:p>
@@ -12648,7 +12868,12 @@
               </a:defRPr>
             </a:pPr>
             <a:r>
-              <a:t>errors_x = []  # append ex each iteration</a:t>
+              <a:rPr sz="1400" dirty="0" err="1"/>
+              <a:t>errors_x</a:t>
+            </a:r>
+            <a:r>
+              <a:rPr sz="1400" dirty="0"/>
+              <a:t> = []  # append ex each iteration</a:t>
             </a:r>
           </a:p>
           <a:p>
@@ -12664,7 +12889,20 @@
               </a:defRPr>
             </a:pPr>
             <a:r>
-              <a:t>errors_y = []  # append ey each iteration</a:t>
+              <a:rPr sz="1400" dirty="0" err="1"/>
+              <a:t>errors_y</a:t>
+            </a:r>
+            <a:r>
+              <a:rPr sz="1400" dirty="0"/>
+              <a:t> = []  # append </a:t>
+            </a:r>
+            <a:r>
+              <a:rPr sz="1400" dirty="0" err="1"/>
+              <a:t>ey</a:t>
+            </a:r>
+            <a:r>
+              <a:rPr sz="1400" dirty="0"/>
+              <a:t> each iteration</a:t>
             </a:r>
           </a:p>
           <a:p>
@@ -12679,7 +12917,7 @@
                 <a:latin typeface="Consolas"/>
               </a:defRPr>
             </a:pPr>
-            <a:endParaRPr/>
+            <a:endParaRPr sz="1400" dirty="0"/>
           </a:p>
           <a:p>
             <a:pPr>
@@ -12694,6 +12932,7 @@
               </a:defRPr>
             </a:pPr>
             <a:r>
+              <a:rPr sz="1400" dirty="0"/>
               <a:t># ... run your loop, collecting errors ...</a:t>
             </a:r>
           </a:p>
@@ -12709,7 +12948,7 @@
                 <a:latin typeface="Consolas"/>
               </a:defRPr>
             </a:pPr>
-            <a:endParaRPr/>
+            <a:endParaRPr sz="1400" dirty="0"/>
           </a:p>
           <a:p>
             <a:pPr>
@@ -12724,7 +12963,20 @@
               </a:defRPr>
             </a:pPr>
             <a:r>
-              <a:t>plt.figure(figsize=(8, 4))</a:t>
+              <a:rPr sz="1400" dirty="0" err="1"/>
+              <a:t>plt.figure</a:t>
+            </a:r>
+            <a:r>
+              <a:rPr sz="1400" dirty="0"/>
+              <a:t>(</a:t>
+            </a:r>
+            <a:r>
+              <a:rPr sz="1400" dirty="0" err="1"/>
+              <a:t>figsize</a:t>
+            </a:r>
+            <a:r>
+              <a:rPr sz="1400" dirty="0"/>
+              <a:t>=(8, 4))</a:t>
             </a:r>
           </a:p>
           <a:p>
@@ -12740,7 +12992,28 @@
               </a:defRPr>
             </a:pPr>
             <a:r>
-              <a:t>plt.plot(errors_x, label='Error X (px)')</a:t>
+              <a:rPr sz="1400" dirty="0" err="1"/>
+              <a:t>plt.plot</a:t>
+            </a:r>
+            <a:r>
+              <a:rPr sz="1400" dirty="0"/>
+              <a:t>(</a:t>
+            </a:r>
+            <a:r>
+              <a:rPr sz="1400" dirty="0" err="1"/>
+              <a:t>errors_x</a:t>
+            </a:r>
+            <a:r>
+              <a:rPr sz="1400" dirty="0"/>
+              <a:t>, label='Error X (</a:t>
+            </a:r>
+            <a:r>
+              <a:rPr sz="1400" dirty="0" err="1"/>
+              <a:t>px</a:t>
+            </a:r>
+            <a:r>
+              <a:rPr sz="1400" dirty="0"/>
+              <a:t>)')</a:t>
             </a:r>
           </a:p>
           <a:p>
@@ -12756,7 +13029,28 @@
               </a:defRPr>
             </a:pPr>
             <a:r>
-              <a:t>plt.plot(errors_y, label='Error Y (px)')</a:t>
+              <a:rPr sz="1400" dirty="0" err="1"/>
+              <a:t>plt.plot</a:t>
+            </a:r>
+            <a:r>
+              <a:rPr sz="1400" dirty="0"/>
+              <a:t>(</a:t>
+            </a:r>
+            <a:r>
+              <a:rPr sz="1400" dirty="0" err="1"/>
+              <a:t>errors_y</a:t>
+            </a:r>
+            <a:r>
+              <a:rPr sz="1400" dirty="0"/>
+              <a:t>, label='Error Y (</a:t>
+            </a:r>
+            <a:r>
+              <a:rPr sz="1400" dirty="0" err="1"/>
+              <a:t>px</a:t>
+            </a:r>
+            <a:r>
+              <a:rPr sz="1400" dirty="0"/>
+              <a:t>)')</a:t>
             </a:r>
           </a:p>
           <a:p>
@@ -12772,7 +13066,20 @@
               </a:defRPr>
             </a:pPr>
             <a:r>
-              <a:t>plt.axhline(y=0, color='gray', linestyle='--')</a:t>
+              <a:rPr sz="1400" dirty="0" err="1"/>
+              <a:t>plt.axhline</a:t>
+            </a:r>
+            <a:r>
+              <a:rPr sz="1400" dirty="0"/>
+              <a:t>(y=0, color='gray', </a:t>
+            </a:r>
+            <a:r>
+              <a:rPr sz="1400" dirty="0" err="1"/>
+              <a:t>linestyle</a:t>
+            </a:r>
+            <a:r>
+              <a:rPr sz="1400" dirty="0"/>
+              <a:t>='--')</a:t>
             </a:r>
           </a:p>
           <a:p>
@@ -12788,7 +13095,20 @@
               </a:defRPr>
             </a:pPr>
             <a:r>
-              <a:t>plt.axhline(y=TOLERANCE, color='red', linestyle=':', alpha=0.5)</a:t>
+              <a:rPr sz="1400" dirty="0" err="1"/>
+              <a:t>plt.axhline</a:t>
+            </a:r>
+            <a:r>
+              <a:rPr sz="1400" dirty="0"/>
+              <a:t>(y=TOLERANCE, color='red', </a:t>
+            </a:r>
+            <a:r>
+              <a:rPr sz="1400" dirty="0" err="1"/>
+              <a:t>linestyle</a:t>
+            </a:r>
+            <a:r>
+              <a:rPr sz="1400" dirty="0"/>
+              <a:t>=':', alpha=0.5)</a:t>
             </a:r>
           </a:p>
           <a:p>
@@ -12804,7 +13124,20 @@
               </a:defRPr>
             </a:pPr>
             <a:r>
-              <a:t>plt.axhline(y=-TOLERANCE, color='red', linestyle=':', alpha=0.5)</a:t>
+              <a:rPr sz="1400" dirty="0" err="1"/>
+              <a:t>plt.axhline</a:t>
+            </a:r>
+            <a:r>
+              <a:rPr sz="1400" dirty="0"/>
+              <a:t>(y=-TOLERANCE, color='red', </a:t>
+            </a:r>
+            <a:r>
+              <a:rPr sz="1400" dirty="0" err="1"/>
+              <a:t>linestyle</a:t>
+            </a:r>
+            <a:r>
+              <a:rPr sz="1400" dirty="0"/>
+              <a:t>=':', alpha=0.5)</a:t>
             </a:r>
           </a:p>
           <a:p>
@@ -12820,7 +13153,12 @@
               </a:defRPr>
             </a:pPr>
             <a:r>
-              <a:t>plt.xlabel('Iteration')</a:t>
+              <a:rPr sz="1400" dirty="0" err="1"/>
+              <a:t>plt.xlabel</a:t>
+            </a:r>
+            <a:r>
+              <a:rPr sz="1400" dirty="0"/>
+              <a:t>('Iteration')</a:t>
             </a:r>
           </a:p>
           <a:p>
@@ -12836,7 +13174,12 @@
               </a:defRPr>
             </a:pPr>
             <a:r>
-              <a:t>plt.ylabel('Error (pixels)')</a:t>
+              <a:rPr sz="1400" dirty="0" err="1"/>
+              <a:t>plt.ylabel</a:t>
+            </a:r>
+            <a:r>
+              <a:rPr sz="1400" dirty="0"/>
+              <a:t>('Error (pixels)')</a:t>
             </a:r>
           </a:p>
           <a:p>
@@ -12852,7 +13195,12 @@
               </a:defRPr>
             </a:pPr>
             <a:r>
-              <a:t>plt.title('Beam Center Convergence')</a:t>
+              <a:rPr sz="1400" dirty="0" err="1"/>
+              <a:t>plt.title</a:t>
+            </a:r>
+            <a:r>
+              <a:rPr sz="1400" dirty="0"/>
+              <a:t>('Beam Center Convergence')</a:t>
             </a:r>
           </a:p>
           <a:p>
@@ -12868,7 +13216,12 @@
               </a:defRPr>
             </a:pPr>
             <a:r>
-              <a:t>plt.legend()</a:t>
+              <a:rPr sz="1400" dirty="0" err="1"/>
+              <a:t>plt.legend</a:t>
+            </a:r>
+            <a:r>
+              <a:rPr sz="1400" dirty="0"/>
+              <a:t>()</a:t>
             </a:r>
           </a:p>
           <a:p>
@@ -12884,7 +13237,12 @@
               </a:defRPr>
             </a:pPr>
             <a:r>
-              <a:t>plt.grid(True, alpha=0.3)</a:t>
+              <a:rPr sz="1400" dirty="0" err="1"/>
+              <a:t>plt.grid</a:t>
+            </a:r>
+            <a:r>
+              <a:rPr sz="1400" dirty="0"/>
+              <a:t>(True, alpha=0.3)</a:t>
             </a:r>
           </a:p>
           <a:p>
@@ -12900,7 +13258,12 @@
               </a:defRPr>
             </a:pPr>
             <a:r>
-              <a:t>plt.show()</a:t>
+              <a:rPr sz="1400" dirty="0" err="1"/>
+              <a:t>plt.show</a:t>
+            </a:r>
+            <a:r>
+              <a:rPr sz="1400" dirty="0"/>
+              <a:t>()</a:t>
             </a:r>
           </a:p>
         </p:txBody>
@@ -14629,7 +14992,7 @@
         <p:spPr>
           <a:xfrm>
             <a:off x="731520" y="1371600"/>
-            <a:ext cx="10515600" cy="5029200"/>
+            <a:ext cx="10515600" cy="3518912"/>
           </a:xfrm>
           <a:prstGeom prst="rect">
             <a:avLst/>
@@ -14654,8 +15017,16 @@
               </a:defRPr>
             </a:pPr>
             <a:r>
-              <a:t>▸  EPICS documentation: https://docs.epics-controls.org</a:t>
-            </a:r>
+              <a:rPr dirty="0"/>
+              <a:t>▸  EPICS documentation: </a:t>
+            </a:r>
+            <a:r>
+              <a:rPr dirty="0">
+                <a:hlinkClick r:id="rId2"/>
+              </a:rPr>
+              <a:t>https://docs.epics-controls.org</a:t>
+            </a:r>
+            <a:endParaRPr lang="en-US" dirty="0"/>
           </a:p>
           <a:p>
             <a:pPr>
@@ -14670,6 +15041,71 @@
               </a:defRPr>
             </a:pPr>
             <a:r>
+              <a:rPr lang="en-GB" dirty="0"/>
+              <a:t>▸  Rich INFN-EPICS repository: </a:t>
+            </a:r>
+            <a:r>
+              <a:rPr lang="en-GB" dirty="0">
+                <a:hlinkClick r:id="rId3"/>
+              </a:rPr>
+              <a:t>https://github.com/infn-epics</a:t>
+            </a:r>
+            <a:endParaRPr lang="en-GB" dirty="0"/>
+          </a:p>
+          <a:p>
+            <a:pPr>
+              <a:spcBef>
+                <a:spcPts val="800"/>
+              </a:spcBef>
+              <a:defRPr sz="2200">
+                <a:solidFill>
+                  <a:srgbClr val="FFFFFF"/>
+                </a:solidFill>
+                <a:latin typeface="Calibri"/>
+              </a:defRPr>
+            </a:pPr>
+            <a:r>
+              <a:rPr lang="en-GB" dirty="0"/>
+              <a:t>▸  Our tools: epik8s-tools, epik8s-compose: </a:t>
+            </a:r>
+            <a:r>
+              <a:rPr lang="en-GB" i="1" dirty="0"/>
+              <a:t>pip install epik8s-tools</a:t>
+            </a:r>
+            <a:endParaRPr lang="en-GB" dirty="0"/>
+          </a:p>
+          <a:p>
+            <a:pPr>
+              <a:spcBef>
+                <a:spcPts val="800"/>
+              </a:spcBef>
+              <a:defRPr sz="2200">
+                <a:solidFill>
+                  <a:srgbClr val="FFFFFF"/>
+                </a:solidFill>
+                <a:latin typeface="Calibri"/>
+              </a:defRPr>
+            </a:pPr>
+            <a:r>
+              <a:rPr lang="en-GB" dirty="0"/>
+              <a:t>▸  Kubernetes (k8s): production deployment of EPICS containers</a:t>
+            </a:r>
+            <a:endParaRPr dirty="0"/>
+          </a:p>
+          <a:p>
+            <a:pPr>
+              <a:spcBef>
+                <a:spcPts val="800"/>
+              </a:spcBef>
+              <a:defRPr sz="2200">
+                <a:solidFill>
+                  <a:srgbClr val="FFFFFF"/>
+                </a:solidFill>
+                <a:latin typeface="Calibri"/>
+              </a:defRPr>
+            </a:pPr>
+            <a:r>
+              <a:rPr dirty="0"/>
               <a:t>▸  Bluesky – scan framework for ‌data acquisition &amp; experiment automation</a:t>
             </a:r>
           </a:p>
@@ -14686,7 +15122,16 @@
               </a:defRPr>
             </a:pPr>
             <a:r>
-              <a:t>▸  ophyd-hal – EPICS device abstraction layer for Bluesky</a:t>
+              <a:rPr dirty="0"/>
+              <a:t>▸  </a:t>
+            </a:r>
+            <a:r>
+              <a:rPr dirty="0" err="1"/>
+              <a:t>ophyd-hal</a:t>
+            </a:r>
+            <a:r>
+              <a:rPr dirty="0"/>
+              <a:t> – EPICS device abstraction layer for Bluesky</a:t>
             </a:r>
           </a:p>
           <a:p>
@@ -14701,9 +15146,7 @@
                 <a:latin typeface="Calibri"/>
               </a:defRPr>
             </a:pPr>
-            <a:r>
-              <a:t>▸  Kubernetes (k8s): production deployment of EPICS containers</a:t>
-            </a:r>
+            <a:endParaRPr dirty="0"/>
           </a:p>
           <a:p>
             <a:pPr>
@@ -14718,38 +15161,7 @@
               </a:defRPr>
             </a:pPr>
             <a:r>
-              <a:t>▸  Our tools: epik8s-tools, epik8s-compose, ioc-chart</a:t>
-            </a:r>
-          </a:p>
-          <a:p>
-            <a:pPr>
-              <a:spcBef>
-                <a:spcPts val="800"/>
-              </a:spcBef>
-              <a:defRPr sz="2200">
-                <a:solidFill>
-                  <a:srgbClr val="FFFFFF"/>
-                </a:solidFill>
-                <a:latin typeface="Calibri"/>
-              </a:defRPr>
-            </a:pPr>
-            <a:r>
-              <a:t>▸  </a:t>
-            </a:r>
-          </a:p>
-          <a:p>
-            <a:pPr>
-              <a:spcBef>
-                <a:spcPts val="800"/>
-              </a:spcBef>
-              <a:defRPr sz="2200">
-                <a:solidFill>
-                  <a:srgbClr val="FFFFFF"/>
-                </a:solidFill>
-                <a:latin typeface="Calibri"/>
-              </a:defRPr>
-            </a:pPr>
-            <a:r>
+              <a:rPr dirty="0"/>
               <a:t>▸  Questions?  Ask now or reach out later!</a:t>
             </a:r>
           </a:p>

--- a/docs/EPICS_Training.pptx
+++ b/docs/EPICS_Training.pptx
@@ -17,33 +17,33 @@
     <p:sldId id="262" r:id="rId8"/>
     <p:sldId id="263" r:id="rId9"/>
     <p:sldId id="264" r:id="rId10"/>
-    <p:sldId id="265" r:id="rId11"/>
-    <p:sldId id="266" r:id="rId12"/>
-    <p:sldId id="267" r:id="rId13"/>
-    <p:sldId id="268" r:id="rId14"/>
-    <p:sldId id="269" r:id="rId15"/>
-    <p:sldId id="270" r:id="rId16"/>
-    <p:sldId id="271" r:id="rId17"/>
-    <p:sldId id="272" r:id="rId18"/>
-    <p:sldId id="273" r:id="rId19"/>
-    <p:sldId id="274" r:id="rId20"/>
-    <p:sldId id="275" r:id="rId21"/>
-    <p:sldId id="276" r:id="rId22"/>
-    <p:sldId id="277" r:id="rId23"/>
-    <p:sldId id="278" r:id="rId24"/>
-    <p:sldId id="279" r:id="rId25"/>
-    <p:sldId id="280" r:id="rId26"/>
-    <p:sldId id="281" r:id="rId27"/>
-    <p:sldId id="282" r:id="rId28"/>
-    <p:sldId id="283" r:id="rId29"/>
-    <p:sldId id="284" r:id="rId30"/>
-    <p:sldId id="285" r:id="rId31"/>
-    <p:sldId id="286" r:id="rId32"/>
-    <p:sldId id="287" r:id="rId33"/>
-    <p:sldId id="288" r:id="rId34"/>
-    <p:sldId id="289" r:id="rId35"/>
-    <p:sldId id="290" r:id="rId36"/>
-    <p:sldId id="291" r:id="rId37"/>
+    <p:sldId id="266" r:id="rId11"/>
+    <p:sldId id="267" r:id="rId12"/>
+    <p:sldId id="268" r:id="rId13"/>
+    <p:sldId id="269" r:id="rId14"/>
+    <p:sldId id="270" r:id="rId15"/>
+    <p:sldId id="271" r:id="rId16"/>
+    <p:sldId id="272" r:id="rId17"/>
+    <p:sldId id="273" r:id="rId18"/>
+    <p:sldId id="274" r:id="rId19"/>
+    <p:sldId id="275" r:id="rId20"/>
+    <p:sldId id="276" r:id="rId21"/>
+    <p:sldId id="277" r:id="rId22"/>
+    <p:sldId id="278" r:id="rId23"/>
+    <p:sldId id="279" r:id="rId24"/>
+    <p:sldId id="280" r:id="rId25"/>
+    <p:sldId id="281" r:id="rId26"/>
+    <p:sldId id="282" r:id="rId27"/>
+    <p:sldId id="283" r:id="rId28"/>
+    <p:sldId id="284" r:id="rId29"/>
+    <p:sldId id="285" r:id="rId30"/>
+    <p:sldId id="286" r:id="rId31"/>
+    <p:sldId id="287" r:id="rId32"/>
+    <p:sldId id="288" r:id="rId33"/>
+    <p:sldId id="289" r:id="rId34"/>
+    <p:sldId id="290" r:id="rId35"/>
+    <p:sldId id="291" r:id="rId36"/>
+    <p:sldId id="299" r:id="rId37"/>
     <p:sldId id="292" r:id="rId38"/>
     <p:sldId id="293" r:id="rId39"/>
     <p:sldId id="294" r:id="rId40"/>
@@ -168,6 +168,15 @@
 </p:presentation>
 </file>
 
+<file path=ppt/revisionInfo.xml><?xml version="1.0" encoding="utf-8"?>
+<p1510:revInfo xmlns:a="http://schemas.openxmlformats.org/drawingml/2006/main" xmlns:r="http://schemas.openxmlformats.org/officeDocument/2006/relationships" xmlns:p1510="http://schemas.microsoft.com/office/powerpoint/2015/10/main">
+  <p1510:revLst>
+    <p1510:client id="{0561E422-2594-979C-1934-58DFD5630816}" v="19" dt="2026-04-07T09:16:58.620"/>
+    <p1510:client id="{17BDBEF7-1E8A-3D42-97C8-32E151014189}" v="4" dt="2026-04-07T09:00:47.764"/>
+  </p1510:revLst>
+</p1510:revInfo>
+</file>
+
 <file path=ppt/notesMasters/notesMaster1.xml><?xml version="1.0" encoding="utf-8"?>
 <p:notesMaster xmlns:a="http://schemas.openxmlformats.org/drawingml/2006/main" xmlns:r="http://schemas.openxmlformats.org/officeDocument/2006/relationships" xmlns:p="http://schemas.openxmlformats.org/presentationml/2006/main">
   <p:cSld>
@@ -250,7 +259,7 @@
           <a:p>
             <a:fld id="{C2B60FF9-4D98-2643-ACFA-AA1BB2D00455}" type="datetimeFigureOut">
               <a:rPr lang="en-IT" smtClean="0"/>
-              <a:t>02/04/2026</a:t>
+              <a:t>07/04/2026</a:t>
             </a:fld>
             <a:endParaRPr lang="en-IT"/>
           </a:p>
@@ -583,7 +592,7 @@
           <a:p>
             <a:fld id="{71CCCF42-603B-8044-9E77-75ECFC4EBE23}" type="slidenum">
               <a:rPr lang="en-IT" smtClean="0"/>
-              <a:t>26</a:t>
+              <a:t>25</a:t>
             </a:fld>
             <a:endParaRPr lang="en-IT"/>
           </a:p>
@@ -851,7 +860,7 @@
           <a:p>
             <a:fld id="{5BCAD085-E8A6-8845-BD4E-CB4CCA059FC4}" type="datetimeFigureOut">
               <a:rPr lang="en-US" smtClean="0"/>
-              <a:t>4/2/26</a:t>
+              <a:t>4/7/26</a:t>
             </a:fld>
             <a:endParaRPr lang="en-US"/>
           </a:p>
@@ -1019,7 +1028,7 @@
           <a:p>
             <a:fld id="{5BCAD085-E8A6-8845-BD4E-CB4CCA059FC4}" type="datetimeFigureOut">
               <a:rPr lang="en-US" smtClean="0"/>
-              <a:t>4/2/26</a:t>
+              <a:t>4/7/26</a:t>
             </a:fld>
             <a:endParaRPr lang="en-US"/>
           </a:p>
@@ -1197,7 +1206,7 @@
           <a:p>
             <a:fld id="{5BCAD085-E8A6-8845-BD4E-CB4CCA059FC4}" type="datetimeFigureOut">
               <a:rPr lang="en-US" smtClean="0"/>
-              <a:t>4/2/26</a:t>
+              <a:t>4/7/26</a:t>
             </a:fld>
             <a:endParaRPr lang="en-US"/>
           </a:p>
@@ -1365,7 +1374,7 @@
           <a:p>
             <a:fld id="{5BCAD085-E8A6-8845-BD4E-CB4CCA059FC4}" type="datetimeFigureOut">
               <a:rPr lang="en-US" smtClean="0"/>
-              <a:t>4/2/26</a:t>
+              <a:t>4/7/26</a:t>
             </a:fld>
             <a:endParaRPr lang="en-US"/>
           </a:p>
@@ -1610,7 +1619,7 @@
           <a:p>
             <a:fld id="{5BCAD085-E8A6-8845-BD4E-CB4CCA059FC4}" type="datetimeFigureOut">
               <a:rPr lang="en-US" smtClean="0"/>
-              <a:t>4/2/26</a:t>
+              <a:t>4/7/26</a:t>
             </a:fld>
             <a:endParaRPr lang="en-US"/>
           </a:p>
@@ -1895,7 +1904,7 @@
           <a:p>
             <a:fld id="{5BCAD085-E8A6-8845-BD4E-CB4CCA059FC4}" type="datetimeFigureOut">
               <a:rPr lang="en-US" smtClean="0"/>
-              <a:t>4/2/26</a:t>
+              <a:t>4/7/26</a:t>
             </a:fld>
             <a:endParaRPr lang="en-US"/>
           </a:p>
@@ -2314,7 +2323,7 @@
           <a:p>
             <a:fld id="{5BCAD085-E8A6-8845-BD4E-CB4CCA059FC4}" type="datetimeFigureOut">
               <a:rPr lang="en-US" smtClean="0"/>
-              <a:t>4/2/26</a:t>
+              <a:t>4/7/26</a:t>
             </a:fld>
             <a:endParaRPr lang="en-US"/>
           </a:p>
@@ -2431,7 +2440,7 @@
           <a:p>
             <a:fld id="{5BCAD085-E8A6-8845-BD4E-CB4CCA059FC4}" type="datetimeFigureOut">
               <a:rPr lang="en-US" smtClean="0"/>
-              <a:t>4/2/26</a:t>
+              <a:t>4/7/26</a:t>
             </a:fld>
             <a:endParaRPr lang="en-US"/>
           </a:p>
@@ -2526,7 +2535,7 @@
           <a:p>
             <a:fld id="{5BCAD085-E8A6-8845-BD4E-CB4CCA059FC4}" type="datetimeFigureOut">
               <a:rPr lang="en-US" smtClean="0"/>
-              <a:t>4/2/26</a:t>
+              <a:t>4/7/26</a:t>
             </a:fld>
             <a:endParaRPr lang="en-US"/>
           </a:p>
@@ -2801,7 +2810,7 @@
           <a:p>
             <a:fld id="{5BCAD085-E8A6-8845-BD4E-CB4CCA059FC4}" type="datetimeFigureOut">
               <a:rPr lang="en-US" smtClean="0"/>
-              <a:t>4/2/26</a:t>
+              <a:t>4/7/26</a:t>
             </a:fld>
             <a:endParaRPr lang="en-US"/>
           </a:p>
@@ -3053,7 +3062,7 @@
           <a:p>
             <a:fld id="{5BCAD085-E8A6-8845-BD4E-CB4CCA059FC4}" type="datetimeFigureOut">
               <a:rPr lang="en-US" smtClean="0"/>
-              <a:t>4/2/26</a:t>
+              <a:t>4/7/26</a:t>
             </a:fld>
             <a:endParaRPr lang="en-US"/>
           </a:p>
@@ -3264,7 +3273,7 @@
           <a:p>
             <a:fld id="{5BCAD085-E8A6-8845-BD4E-CB4CCA059FC4}" type="datetimeFigureOut">
               <a:rPr lang="en-US" smtClean="0"/>
-              <a:t>4/2/26</a:t>
+              <a:t>4/7/26</a:t>
             </a:fld>
             <a:endParaRPr lang="en-US"/>
           </a:p>
@@ -3772,7 +3781,7 @@
               </a:defRPr>
             </a:pPr>
             <a:r>
-              <a:t>Our Training Beamline – Architecture</a:t>
+              <a:t>Key PV Names – Cheat Sheet</a:t>
             </a:r>
           </a:p>
         </p:txBody>
@@ -3829,8 +3838,8 @@
         </p:nvSpPr>
         <p:spPr>
           <a:xfrm>
-            <a:off x="731520" y="1371600"/>
-            <a:ext cx="10515600" cy="4124206"/>
+            <a:off x="548640" y="1371600"/>
+            <a:ext cx="5303520" cy="5029200"/>
           </a:xfrm>
           <a:prstGeom prst="rect">
             <a:avLst/>
@@ -3847,7 +3856,7 @@
               <a:spcBef>
                 <a:spcPts val="800"/>
               </a:spcBef>
-              <a:defRPr sz="2200">
+              <a:defRPr sz="2000">
                 <a:solidFill>
                   <a:srgbClr val="FFFFFF"/>
                 </a:solidFill>
@@ -3855,130 +3864,31 @@
               </a:defRPr>
             </a:pPr>
             <a:r>
-              <a:rPr dirty="0"/>
-              <a:t>▸  Simulated setup (docker compose on your PC):</a:t>
-            </a:r>
-          </a:p>
-          <a:p>
-            <a:pPr>
-              <a:spcBef>
-                <a:spcPts val="800"/>
-              </a:spcBef>
-              <a:defRPr sz="1900">
-                <a:solidFill>
-                  <a:srgbClr val="CCCCCC"/>
-                </a:solidFill>
-                <a:latin typeface="Calibri"/>
-              </a:defRPr>
-            </a:pPr>
-            <a:r>
-              <a:rPr dirty="0"/>
-              <a:t>     ‣  </a:t>
-            </a:r>
-            <a:r>
-              <a:rPr dirty="0" err="1"/>
-              <a:t>motorsim</a:t>
-            </a:r>
-            <a:r>
-              <a:rPr dirty="0"/>
-              <a:t>  – 2 simulated motors: HMIR (horizontal), VMIR (vertical)</a:t>
-            </a:r>
-          </a:p>
-          <a:p>
-            <a:pPr>
-              <a:spcBef>
-                <a:spcPts val="800"/>
-              </a:spcBef>
-              <a:defRPr sz="1900">
-                <a:solidFill>
-                  <a:srgbClr val="CCCCCC"/>
-                </a:solidFill>
-                <a:latin typeface="Calibri"/>
-              </a:defRPr>
-            </a:pPr>
-            <a:r>
-              <a:rPr dirty="0"/>
-              <a:t>     ‣  </a:t>
-            </a:r>
-            <a:r>
-              <a:rPr dirty="0" err="1"/>
-              <a:t>camerasim</a:t>
-            </a:r>
-            <a:r>
-              <a:rPr dirty="0"/>
-              <a:t> – simulated camera with peaks, overlays, stats</a:t>
-            </a:r>
-          </a:p>
-          <a:p>
-            <a:pPr>
-              <a:spcBef>
-                <a:spcPts val="800"/>
-              </a:spcBef>
-              <a:defRPr sz="1900">
-                <a:solidFill>
-                  <a:srgbClr val="CCCCCC"/>
-                </a:solidFill>
-                <a:latin typeface="Calibri"/>
-              </a:defRPr>
-            </a:pPr>
-            <a:r>
-              <a:rPr dirty="0"/>
-              <a:t>     ‣  </a:t>
-            </a:r>
-            <a:r>
-              <a:rPr dirty="0" err="1"/>
-              <a:t>simtwin</a:t>
-            </a:r>
-            <a:r>
-              <a:rPr dirty="0"/>
-              <a:t> – digital twin: motor movements → beam position on camera</a:t>
-            </a:r>
-          </a:p>
-          <a:p>
-            <a:pPr>
-              <a:spcBef>
-                <a:spcPts val="800"/>
-              </a:spcBef>
-              <a:defRPr sz="1900">
-                <a:solidFill>
-                  <a:srgbClr val="CCCCCC"/>
-                </a:solidFill>
-                <a:latin typeface="Calibri"/>
-              </a:defRPr>
-            </a:pPr>
-            <a:r>
-              <a:rPr dirty="0"/>
-              <a:t>     ‣  notebook – </a:t>
-            </a:r>
-            <a:r>
-              <a:rPr dirty="0" err="1"/>
-              <a:t>Jupyter</a:t>
-            </a:r>
-            <a:r>
-              <a:rPr dirty="0"/>
-              <a:t> with p4p pre-installed</a:t>
-            </a:r>
-          </a:p>
-          <a:p>
-            <a:pPr>
-              <a:spcBef>
-                <a:spcPts val="800"/>
-              </a:spcBef>
-              <a:defRPr sz="2200">
+              <a:t>▸  Motors</a:t>
+            </a:r>
+          </a:p>
+          <a:p>
+            <a:pPr>
+              <a:spcBef>
+                <a:spcPts val="800"/>
+              </a:spcBef>
+              <a:defRPr sz="2000">
                 <a:solidFill>
                   <a:srgbClr val="FFFFFF"/>
                 </a:solidFill>
                 <a:latin typeface="Calibri"/>
               </a:defRPr>
             </a:pPr>
-            <a:endParaRPr dirty="0"/>
-          </a:p>
-          <a:p>
-            <a:pPr>
-              <a:spcBef>
-                <a:spcPts val="800"/>
-              </a:spcBef>
-              <a:defRPr sz="2200">
+            <a:r>
+              <a:t>▸    LAB:SIM:HMIR.VAL  (set)</a:t>
+            </a:r>
+          </a:p>
+          <a:p>
+            <a:pPr>
+              <a:spcBef>
+                <a:spcPts val="800"/>
+              </a:spcBef>
+              <a:defRPr sz="2000">
                 <a:solidFill>
                   <a:srgbClr val="FFFFFF"/>
                 </a:solidFill>
@@ -3986,50 +3896,15 @@
               </a:defRPr>
             </a:pPr>
             <a:r>
-              <a:rPr dirty="0"/>
-              <a:t>▸  Real setup (shared):</a:t>
-            </a:r>
-          </a:p>
-          <a:p>
-            <a:pPr>
-              <a:spcBef>
-                <a:spcPts val="800"/>
-              </a:spcBef>
-              <a:defRPr sz="1900">
-                <a:solidFill>
-                  <a:srgbClr val="CCCCCC"/>
-                </a:solidFill>
-                <a:latin typeface="Calibri"/>
-              </a:defRPr>
-            </a:pPr>
-            <a:r>
-              <a:rPr dirty="0"/>
-              <a:t>     ‣  Thorlabs motorized mirror mount – same motor PVs</a:t>
-            </a:r>
-          </a:p>
-          <a:p>
-            <a:pPr>
-              <a:spcBef>
-                <a:spcPts val="800"/>
-              </a:spcBef>
-              <a:defRPr sz="1900">
-                <a:solidFill>
-                  <a:srgbClr val="CCCCCC"/>
-                </a:solidFill>
-                <a:latin typeface="Calibri"/>
-              </a:defRPr>
-            </a:pPr>
-            <a:r>
-              <a:rPr dirty="0"/>
-              <a:t>     ‣  Laser + real camera – same camera PVs</a:t>
-            </a:r>
-          </a:p>
-          <a:p>
-            <a:pPr>
-              <a:spcBef>
-                <a:spcPts val="800"/>
-              </a:spcBef>
-              <a:defRPr sz="2200">
+              <a:t>▸    LAB:SIM:HMIR.RBV  (readback)</a:t>
+            </a:r>
+          </a:p>
+          <a:p>
+            <a:pPr>
+              <a:spcBef>
+                <a:spcPts val="800"/>
+              </a:spcBef>
+              <a:defRPr sz="2000">
                 <a:solidFill>
                   <a:srgbClr val="FFFFFF"/>
                 </a:solidFill>
@@ -4037,8 +3912,254 @@
               </a:defRPr>
             </a:pPr>
             <a:r>
-              <a:rPr dirty="0"/>
-              <a:t>▸  Goal: develop on simulation, then switch to real with minimal changes!</a:t>
+              <a:t>▸    LAB:SIM:HMIR.DMOV  (done)</a:t>
+            </a:r>
+          </a:p>
+          <a:p>
+            <a:pPr>
+              <a:spcBef>
+                <a:spcPts val="800"/>
+              </a:spcBef>
+              <a:defRPr sz="2000">
+                <a:solidFill>
+                  <a:srgbClr val="FFFFFF"/>
+                </a:solidFill>
+                <a:latin typeface="Calibri"/>
+              </a:defRPr>
+            </a:pPr>
+            <a:r>
+              <a:t>▸    LAB:SIM:VMIR.*  (same)</a:t>
+            </a:r>
+          </a:p>
+          <a:p>
+            <a:pPr>
+              <a:spcBef>
+                <a:spcPts val="800"/>
+              </a:spcBef>
+              <a:defRPr sz="2000">
+                <a:solidFill>
+                  <a:srgbClr val="FFFFFF"/>
+                </a:solidFill>
+                <a:latin typeface="Calibri"/>
+              </a:defRPr>
+            </a:pPr>
+            <a:r>
+              <a:t>▸  </a:t>
+            </a:r>
+          </a:p>
+          <a:p>
+            <a:pPr>
+              <a:spcBef>
+                <a:spcPts val="800"/>
+              </a:spcBef>
+              <a:defRPr sz="2000">
+                <a:solidFill>
+                  <a:srgbClr val="FFFFFF"/>
+                </a:solidFill>
+                <a:latin typeface="Calibri"/>
+              </a:defRPr>
+            </a:pPr>
+            <a:r>
+              <a:t>▸  Camera</a:t>
+            </a:r>
+          </a:p>
+          <a:p>
+            <a:pPr>
+              <a:spcBef>
+                <a:spcPts val="800"/>
+              </a:spcBef>
+              <a:defRPr sz="2000">
+                <a:solidFill>
+                  <a:srgbClr val="FFFFFF"/>
+                </a:solidFill>
+                <a:latin typeface="Calibri"/>
+              </a:defRPr>
+            </a:pPr>
+            <a:r>
+              <a:t>▸    LAB:SIM:CAM01:Acquire</a:t>
+            </a:r>
+          </a:p>
+          <a:p>
+            <a:pPr>
+              <a:spcBef>
+                <a:spcPts val="800"/>
+              </a:spcBef>
+              <a:defRPr sz="2000">
+                <a:solidFill>
+                  <a:srgbClr val="FFFFFF"/>
+                </a:solidFill>
+                <a:latin typeface="Calibri"/>
+              </a:defRPr>
+            </a:pPr>
+            <a:r>
+              <a:t>▸    LAB:SIM:CAM01:image1:ArrayData</a:t>
+            </a:r>
+          </a:p>
+        </p:txBody>
+      </p:sp>
+      <p:sp>
+        <p:nvSpPr>
+          <p:cNvPr id="5" name="TextBox 4"/>
+          <p:cNvSpPr txBox="1"/>
+          <p:nvPr/>
+        </p:nvSpPr>
+        <p:spPr>
+          <a:xfrm>
+            <a:off x="6217920" y="1371600"/>
+            <a:ext cx="5303520" cy="5029200"/>
+          </a:xfrm>
+          <a:prstGeom prst="rect">
+            <a:avLst/>
+          </a:prstGeom>
+          <a:noFill/>
+        </p:spPr>
+        <p:txBody>
+          <a:bodyPr wrap="square">
+            <a:spAutoFit/>
+          </a:bodyPr>
+          <a:lstStyle/>
+          <a:p>
+            <a:pPr>
+              <a:spcBef>
+                <a:spcPts val="800"/>
+              </a:spcBef>
+              <a:defRPr sz="2000">
+                <a:solidFill>
+                  <a:srgbClr val="FFFFFF"/>
+                </a:solidFill>
+                <a:latin typeface="Calibri"/>
+              </a:defRPr>
+            </a:pPr>
+            <a:r>
+              <a:t>▸  Statistics</a:t>
+            </a:r>
+          </a:p>
+          <a:p>
+            <a:pPr>
+              <a:spcBef>
+                <a:spcPts val="800"/>
+              </a:spcBef>
+              <a:defRPr sz="2000">
+                <a:solidFill>
+                  <a:srgbClr val="FFFFFF"/>
+                </a:solidFill>
+                <a:latin typeface="Calibri"/>
+              </a:defRPr>
+            </a:pPr>
+            <a:r>
+              <a:t>▸    ...:Stats1:CentroidX_RBV</a:t>
+            </a:r>
+          </a:p>
+          <a:p>
+            <a:pPr>
+              <a:spcBef>
+                <a:spcPts val="800"/>
+              </a:spcBef>
+              <a:defRPr sz="2000">
+                <a:solidFill>
+                  <a:srgbClr val="FFFFFF"/>
+                </a:solidFill>
+                <a:latin typeface="Calibri"/>
+              </a:defRPr>
+            </a:pPr>
+            <a:r>
+              <a:t>▸    ...:Stats1:CentroidY_RBV</a:t>
+            </a:r>
+          </a:p>
+          <a:p>
+            <a:pPr>
+              <a:spcBef>
+                <a:spcPts val="800"/>
+              </a:spcBef>
+              <a:defRPr sz="2000">
+                <a:solidFill>
+                  <a:srgbClr val="FFFFFF"/>
+                </a:solidFill>
+                <a:latin typeface="Calibri"/>
+              </a:defRPr>
+            </a:pPr>
+            <a:r>
+              <a:t>▸    ...:Stats1:ComputeCentroid</a:t>
+            </a:r>
+          </a:p>
+          <a:p>
+            <a:pPr>
+              <a:spcBef>
+                <a:spcPts val="800"/>
+              </a:spcBef>
+              <a:defRPr sz="2000">
+                <a:solidFill>
+                  <a:srgbClr val="FFFFFF"/>
+                </a:solidFill>
+                <a:latin typeface="Calibri"/>
+              </a:defRPr>
+            </a:pPr>
+            <a:r>
+              <a:t>▸  </a:t>
+            </a:r>
+          </a:p>
+          <a:p>
+            <a:pPr>
+              <a:spcBef>
+                <a:spcPts val="800"/>
+              </a:spcBef>
+              <a:defRPr sz="2000">
+                <a:solidFill>
+                  <a:srgbClr val="FFFFFF"/>
+                </a:solidFill>
+                <a:latin typeface="Calibri"/>
+              </a:defRPr>
+            </a:pPr>
+            <a:r>
+              <a:t>▸  Overlay 1</a:t>
+            </a:r>
+          </a:p>
+          <a:p>
+            <a:pPr>
+              <a:spcBef>
+                <a:spcPts val="800"/>
+              </a:spcBef>
+              <a:defRPr sz="2000">
+                <a:solidFill>
+                  <a:srgbClr val="FFFFFF"/>
+                </a:solidFill>
+                <a:latin typeface="Calibri"/>
+              </a:defRPr>
+            </a:pPr>
+            <a:r>
+              <a:t>▸    ...:Overlay1:1:PositionX</a:t>
+            </a:r>
+          </a:p>
+          <a:p>
+            <a:pPr>
+              <a:spcBef>
+                <a:spcPts val="800"/>
+              </a:spcBef>
+              <a:defRPr sz="2000">
+                <a:solidFill>
+                  <a:srgbClr val="FFFFFF"/>
+                </a:solidFill>
+                <a:latin typeface="Calibri"/>
+              </a:defRPr>
+            </a:pPr>
+            <a:r>
+              <a:t>▸    ...:Overlay1:1:SizeX</a:t>
+            </a:r>
+          </a:p>
+          <a:p>
+            <a:pPr>
+              <a:spcBef>
+                <a:spcPts val="800"/>
+              </a:spcBef>
+              <a:defRPr sz="2000">
+                <a:solidFill>
+                  <a:srgbClr val="FFFFFF"/>
+                </a:solidFill>
+                <a:latin typeface="Calibri"/>
+              </a:defRPr>
+            </a:pPr>
+            <a:r>
+              <a:t>▸    ...:Overlay1:1:Use</a:t>
             </a:r>
           </a:p>
         </p:txBody>
@@ -4078,56 +4199,20 @@
       </p:grpSpPr>
       <p:sp>
         <p:nvSpPr>
-          <p:cNvPr id="2" name="TextBox 1"/>
-          <p:cNvSpPr txBox="1"/>
-          <p:nvPr/>
-        </p:nvSpPr>
-        <p:spPr>
-          <a:xfrm>
-            <a:off x="548640" y="274320"/>
-            <a:ext cx="10972800" cy="822960"/>
-          </a:xfrm>
-          <a:prstGeom prst="rect">
-            <a:avLst/>
-          </a:prstGeom>
-          <a:noFill/>
-        </p:spPr>
-        <p:txBody>
-          <a:bodyPr wrap="square">
-            <a:spAutoFit/>
-          </a:bodyPr>
-          <a:lstStyle/>
-          <a:p>
-            <a:pPr algn="l">
-              <a:defRPr sz="3400" b="1">
-                <a:solidFill>
-                  <a:srgbClr val="00B4D8"/>
-                </a:solidFill>
-                <a:latin typeface="Calibri"/>
-              </a:defRPr>
-            </a:pPr>
-            <a:r>
-              <a:t>Key PV Names – Cheat Sheet</a:t>
-            </a:r>
-          </a:p>
-        </p:txBody>
-      </p:sp>
-      <p:sp>
-        <p:nvSpPr>
-          <p:cNvPr id="3" name="Rectangle 2"/>
+          <p:cNvPr id="2" name="Rectangle 1"/>
           <p:cNvSpPr/>
           <p:nvPr/>
         </p:nvSpPr>
         <p:spPr>
           <a:xfrm>
-            <a:off x="548640" y="1051560"/>
-            <a:ext cx="4572000" cy="36576"/>
+            <a:off x="0" y="2926080"/>
+            <a:ext cx="12191695" cy="54864"/>
           </a:xfrm>
           <a:prstGeom prst="rect">
             <a:avLst/>
           </a:prstGeom>
           <a:solidFill>
-            <a:srgbClr val="48CAE4"/>
+            <a:srgbClr val="00B4D8"/>
           </a:solidFill>
           <a:ln>
             <a:noFill/>
@@ -4158,14 +4243,14 @@
       </p:sp>
       <p:sp>
         <p:nvSpPr>
-          <p:cNvPr id="4" name="TextBox 3"/>
+          <p:cNvPr id="3" name="TextBox 2"/>
           <p:cNvSpPr txBox="1"/>
           <p:nvPr/>
         </p:nvSpPr>
         <p:spPr>
           <a:xfrm>
-            <a:off x="548640" y="1371600"/>
-            <a:ext cx="5303520" cy="5029200"/>
+            <a:off x="731520" y="1828800"/>
+            <a:ext cx="10515600" cy="1097280"/>
           </a:xfrm>
           <a:prstGeom prst="rect">
             <a:avLst/>
@@ -4178,161 +4263,30 @@
           </a:bodyPr>
           <a:lstStyle/>
           <a:p>
-            <a:pPr>
-              <a:spcBef>
-                <a:spcPts val="800"/>
-              </a:spcBef>
-              <a:defRPr sz="2000">
-                <a:solidFill>
-                  <a:srgbClr val="FFFFFF"/>
-                </a:solidFill>
-                <a:latin typeface="Calibri"/>
-              </a:defRPr>
-            </a:pPr>
-            <a:r>
-              <a:t>▸  Motors</a:t>
-            </a:r>
-          </a:p>
-          <a:p>
-            <a:pPr>
-              <a:spcBef>
-                <a:spcPts val="800"/>
-              </a:spcBef>
-              <a:defRPr sz="2000">
-                <a:solidFill>
-                  <a:srgbClr val="FFFFFF"/>
-                </a:solidFill>
-                <a:latin typeface="Calibri"/>
-              </a:defRPr>
-            </a:pPr>
-            <a:r>
-              <a:t>▸    LAB:SIM:HMIR.VAL  (set)</a:t>
-            </a:r>
-          </a:p>
-          <a:p>
-            <a:pPr>
-              <a:spcBef>
-                <a:spcPts val="800"/>
-              </a:spcBef>
-              <a:defRPr sz="2000">
-                <a:solidFill>
-                  <a:srgbClr val="FFFFFF"/>
-                </a:solidFill>
-                <a:latin typeface="Calibri"/>
-              </a:defRPr>
-            </a:pPr>
-            <a:r>
-              <a:t>▸    LAB:SIM:HMIR.RBV  (readback)</a:t>
-            </a:r>
-          </a:p>
-          <a:p>
-            <a:pPr>
-              <a:spcBef>
-                <a:spcPts val="800"/>
-              </a:spcBef>
-              <a:defRPr sz="2000">
-                <a:solidFill>
-                  <a:srgbClr val="FFFFFF"/>
-                </a:solidFill>
-                <a:latin typeface="Calibri"/>
-              </a:defRPr>
-            </a:pPr>
-            <a:r>
-              <a:t>▸    LAB:SIM:HMIR.DMOV  (done)</a:t>
-            </a:r>
-          </a:p>
-          <a:p>
-            <a:pPr>
-              <a:spcBef>
-                <a:spcPts val="800"/>
-              </a:spcBef>
-              <a:defRPr sz="2000">
-                <a:solidFill>
-                  <a:srgbClr val="FFFFFF"/>
-                </a:solidFill>
-                <a:latin typeface="Calibri"/>
-              </a:defRPr>
-            </a:pPr>
-            <a:r>
-              <a:t>▸    LAB:SIM:VMIR.*  (same)</a:t>
-            </a:r>
-          </a:p>
-          <a:p>
-            <a:pPr>
-              <a:spcBef>
-                <a:spcPts val="800"/>
-              </a:spcBef>
-              <a:defRPr sz="2000">
-                <a:solidFill>
-                  <a:srgbClr val="FFFFFF"/>
-                </a:solidFill>
-                <a:latin typeface="Calibri"/>
-              </a:defRPr>
-            </a:pPr>
-            <a:r>
-              <a:t>▸  </a:t>
-            </a:r>
-          </a:p>
-          <a:p>
-            <a:pPr>
-              <a:spcBef>
-                <a:spcPts val="800"/>
-              </a:spcBef>
-              <a:defRPr sz="2000">
-                <a:solidFill>
-                  <a:srgbClr val="FFFFFF"/>
-                </a:solidFill>
-                <a:latin typeface="Calibri"/>
-              </a:defRPr>
-            </a:pPr>
-            <a:r>
-              <a:t>▸  Camera</a:t>
-            </a:r>
-          </a:p>
-          <a:p>
-            <a:pPr>
-              <a:spcBef>
-                <a:spcPts val="800"/>
-              </a:spcBef>
-              <a:defRPr sz="2000">
-                <a:solidFill>
-                  <a:srgbClr val="FFFFFF"/>
-                </a:solidFill>
-                <a:latin typeface="Calibri"/>
-              </a:defRPr>
-            </a:pPr>
-            <a:r>
-              <a:t>▸    LAB:SIM:CAM01:Acquire</a:t>
-            </a:r>
-          </a:p>
-          <a:p>
-            <a:pPr>
-              <a:spcBef>
-                <a:spcPts val="800"/>
-              </a:spcBef>
-              <a:defRPr sz="2000">
-                <a:solidFill>
-                  <a:srgbClr val="FFFFFF"/>
-                </a:solidFill>
-                <a:latin typeface="Calibri"/>
-              </a:defRPr>
-            </a:pPr>
-            <a:r>
-              <a:t>▸    LAB:SIM:CAM01:image1:ArrayData</a:t>
-            </a:r>
-          </a:p>
-        </p:txBody>
-      </p:sp>
-      <p:sp>
-        <p:nvSpPr>
-          <p:cNvPr id="5" name="TextBox 4"/>
+            <a:pPr algn="ctr">
+              <a:defRPr sz="4000" b="1">
+                <a:solidFill>
+                  <a:srgbClr val="00B4D8"/>
+                </a:solidFill>
+                <a:latin typeface="Calibri"/>
+              </a:defRPr>
+            </a:pPr>
+            <a:r>
+              <a:t>Part 2 – Hands-on</a:t>
+            </a:r>
+          </a:p>
+        </p:txBody>
+      </p:sp>
+      <p:sp>
+        <p:nvSpPr>
+          <p:cNvPr id="4" name="TextBox 3"/>
           <p:cNvSpPr txBox="1"/>
           <p:nvPr/>
         </p:nvSpPr>
         <p:spPr>
           <a:xfrm>
-            <a:off x="6217920" y="1371600"/>
-            <a:ext cx="5303520" cy="5029200"/>
+            <a:off x="1371600" y="3291840"/>
+            <a:ext cx="9144000" cy="914400"/>
           </a:xfrm>
           <a:prstGeom prst="rect">
             <a:avLst/>
@@ -4345,147 +4299,16 @@
           </a:bodyPr>
           <a:lstStyle/>
           <a:p>
-            <a:pPr>
-              <a:spcBef>
-                <a:spcPts val="800"/>
-              </a:spcBef>
-              <a:defRPr sz="2000">
-                <a:solidFill>
-                  <a:srgbClr val="FFFFFF"/>
-                </a:solidFill>
-                <a:latin typeface="Calibri"/>
-              </a:defRPr>
-            </a:pPr>
-            <a:r>
-              <a:t>▸  Statistics</a:t>
-            </a:r>
-          </a:p>
-          <a:p>
-            <a:pPr>
-              <a:spcBef>
-                <a:spcPts val="800"/>
-              </a:spcBef>
-              <a:defRPr sz="2000">
-                <a:solidFill>
-                  <a:srgbClr val="FFFFFF"/>
-                </a:solidFill>
-                <a:latin typeface="Calibri"/>
-              </a:defRPr>
-            </a:pPr>
-            <a:r>
-              <a:t>▸    ...:Stats1:CentroidX_RBV</a:t>
-            </a:r>
-          </a:p>
-          <a:p>
-            <a:pPr>
-              <a:spcBef>
-                <a:spcPts val="800"/>
-              </a:spcBef>
-              <a:defRPr sz="2000">
-                <a:solidFill>
-                  <a:srgbClr val="FFFFFF"/>
-                </a:solidFill>
-                <a:latin typeface="Calibri"/>
-              </a:defRPr>
-            </a:pPr>
-            <a:r>
-              <a:t>▸    ...:Stats1:CentroidY_RBV</a:t>
-            </a:r>
-          </a:p>
-          <a:p>
-            <a:pPr>
-              <a:spcBef>
-                <a:spcPts val="800"/>
-              </a:spcBef>
-              <a:defRPr sz="2000">
-                <a:solidFill>
-                  <a:srgbClr val="FFFFFF"/>
-                </a:solidFill>
-                <a:latin typeface="Calibri"/>
-              </a:defRPr>
-            </a:pPr>
-            <a:r>
-              <a:t>▸    ...:Stats1:ComputeCentroid</a:t>
-            </a:r>
-          </a:p>
-          <a:p>
-            <a:pPr>
-              <a:spcBef>
-                <a:spcPts val="800"/>
-              </a:spcBef>
-              <a:defRPr sz="2000">
-                <a:solidFill>
-                  <a:srgbClr val="FFFFFF"/>
-                </a:solidFill>
-                <a:latin typeface="Calibri"/>
-              </a:defRPr>
-            </a:pPr>
-            <a:r>
-              <a:t>▸  </a:t>
-            </a:r>
-          </a:p>
-          <a:p>
-            <a:pPr>
-              <a:spcBef>
-                <a:spcPts val="800"/>
-              </a:spcBef>
-              <a:defRPr sz="2000">
-                <a:solidFill>
-                  <a:srgbClr val="FFFFFF"/>
-                </a:solidFill>
-                <a:latin typeface="Calibri"/>
-              </a:defRPr>
-            </a:pPr>
-            <a:r>
-              <a:t>▸  Overlay 1</a:t>
-            </a:r>
-          </a:p>
-          <a:p>
-            <a:pPr>
-              <a:spcBef>
-                <a:spcPts val="800"/>
-              </a:spcBef>
-              <a:defRPr sz="2000">
-                <a:solidFill>
-                  <a:srgbClr val="FFFFFF"/>
-                </a:solidFill>
-                <a:latin typeface="Calibri"/>
-              </a:defRPr>
-            </a:pPr>
-            <a:r>
-              <a:t>▸    ...:Overlay1:1:PositionX</a:t>
-            </a:r>
-          </a:p>
-          <a:p>
-            <a:pPr>
-              <a:spcBef>
-                <a:spcPts val="800"/>
-              </a:spcBef>
-              <a:defRPr sz="2000">
-                <a:solidFill>
-                  <a:srgbClr val="FFFFFF"/>
-                </a:solidFill>
-                <a:latin typeface="Calibri"/>
-              </a:defRPr>
-            </a:pPr>
-            <a:r>
-              <a:t>▸    ...:Overlay1:1:SizeX</a:t>
-            </a:r>
-          </a:p>
-          <a:p>
-            <a:pPr>
-              <a:spcBef>
-                <a:spcPts val="800"/>
-              </a:spcBef>
-              <a:defRPr sz="2000">
-                <a:solidFill>
-                  <a:srgbClr val="FFFFFF"/>
-                </a:solidFill>
-                <a:latin typeface="Calibri"/>
-              </a:defRPr>
-            </a:pPr>
-            <a:r>
-              <a:t>▸    ...:Overlay1:1:Use</a:t>
+            <a:pPr algn="ctr">
+              <a:defRPr sz="2200" b="0">
+                <a:solidFill>
+                  <a:srgbClr val="CCCCCC"/>
+                </a:solidFill>
+                <a:latin typeface="Calibri"/>
+              </a:defRPr>
+            </a:pPr>
+            <a:r>
+              <a:t>Start the simulated beamline &amp; explore with Phoebus  (≈ 45 min)</a:t>
             </a:r>
           </a:p>
         </p:txBody>
@@ -4525,20 +4348,56 @@
       </p:grpSpPr>
       <p:sp>
         <p:nvSpPr>
-          <p:cNvPr id="2" name="Rectangle 1"/>
+          <p:cNvPr id="2" name="TextBox 1"/>
+          <p:cNvSpPr txBox="1"/>
+          <p:nvPr/>
+        </p:nvSpPr>
+        <p:spPr>
+          <a:xfrm>
+            <a:off x="548640" y="274320"/>
+            <a:ext cx="10972800" cy="822960"/>
+          </a:xfrm>
+          <a:prstGeom prst="rect">
+            <a:avLst/>
+          </a:prstGeom>
+          <a:noFill/>
+        </p:spPr>
+        <p:txBody>
+          <a:bodyPr wrap="square">
+            <a:spAutoFit/>
+          </a:bodyPr>
+          <a:lstStyle/>
+          <a:p>
+            <a:pPr algn="l">
+              <a:defRPr sz="3400" b="1">
+                <a:solidFill>
+                  <a:srgbClr val="00B4D8"/>
+                </a:solidFill>
+                <a:latin typeface="Calibri"/>
+              </a:defRPr>
+            </a:pPr>
+            <a:r>
+              <a:t>Step 1 – Start the beamline</a:t>
+            </a:r>
+          </a:p>
+        </p:txBody>
+      </p:sp>
+      <p:sp>
+        <p:nvSpPr>
+          <p:cNvPr id="3" name="Rectangle 2"/>
           <p:cNvSpPr/>
           <p:nvPr/>
         </p:nvSpPr>
         <p:spPr>
           <a:xfrm>
-            <a:off x="0" y="2926080"/>
-            <a:ext cx="12191695" cy="54864"/>
+            <a:off x="548640" y="1051560"/>
+            <a:ext cx="4572000" cy="36576"/>
           </a:xfrm>
           <a:prstGeom prst="rect">
             <a:avLst/>
           </a:prstGeom>
           <a:solidFill>
-            <a:srgbClr val="00B4D8"/>
+            <a:srgbClr val="48CAE4"/>
           </a:solidFill>
           <a:ln>
             <a:noFill/>
@@ -4569,14 +4428,14 @@
       </p:sp>
       <p:sp>
         <p:nvSpPr>
-          <p:cNvPr id="3" name="TextBox 2"/>
+          <p:cNvPr id="4" name="TextBox 3"/>
           <p:cNvSpPr txBox="1"/>
           <p:nvPr/>
         </p:nvSpPr>
         <p:spPr>
           <a:xfrm>
-            <a:off x="731520" y="1828800"/>
-            <a:ext cx="10515600" cy="1097280"/>
+            <a:off x="731520" y="1371600"/>
+            <a:ext cx="10515600" cy="2985433"/>
           </a:xfrm>
           <a:prstGeom prst="rect">
             <a:avLst/>
@@ -4589,44 +4448,45 @@
           </a:bodyPr>
           <a:lstStyle/>
           <a:p>
-            <a:pPr algn="ctr">
-              <a:defRPr sz="4000" b="1">
-                <a:solidFill>
-                  <a:srgbClr val="00B4D8"/>
-                </a:solidFill>
-                <a:latin typeface="Calibri"/>
-              </a:defRPr>
-            </a:pPr>
-            <a:r>
-              <a:t>Part 2 – Hands-on</a:t>
-            </a:r>
-          </a:p>
-        </p:txBody>
-      </p:sp>
-      <p:sp>
-        <p:nvSpPr>
-          <p:cNvPr id="4" name="TextBox 3"/>
-          <p:cNvSpPr txBox="1"/>
-          <p:nvPr/>
-        </p:nvSpPr>
-        <p:spPr>
-          <a:xfrm>
-            <a:off x="1371600" y="3291840"/>
-            <a:ext cx="9144000" cy="914400"/>
-          </a:xfrm>
-          <a:prstGeom prst="rect">
-            <a:avLst/>
-          </a:prstGeom>
-          <a:noFill/>
-        </p:spPr>
-        <p:txBody>
-          <a:bodyPr wrap="square">
-            <a:spAutoFit/>
-          </a:bodyPr>
-          <a:lstStyle/>
-          <a:p>
-            <a:pPr algn="ctr">
-              <a:defRPr sz="2200" b="0">
+            <a:pPr>
+              <a:spcBef>
+                <a:spcPts val="800"/>
+              </a:spcBef>
+              <a:defRPr sz="2200">
+                <a:solidFill>
+                  <a:srgbClr val="FFFFFF"/>
+                </a:solidFill>
+                <a:latin typeface="Calibri"/>
+              </a:defRPr>
+            </a:pPr>
+            <a:r>
+              <a:rPr dirty="0"/>
+              <a:t>▸  Open a terminal and go to the training directory</a:t>
+            </a:r>
+          </a:p>
+          <a:p>
+            <a:pPr>
+              <a:spcBef>
+                <a:spcPts val="800"/>
+              </a:spcBef>
+              <a:defRPr sz="2200">
+                <a:solidFill>
+                  <a:srgbClr val="FFFFFF"/>
+                </a:solidFill>
+                <a:latin typeface="Calibri"/>
+              </a:defRPr>
+            </a:pPr>
+            <a:r>
+              <a:rPr dirty="0"/>
+              <a:t>▸  Start all containers:</a:t>
+            </a:r>
+          </a:p>
+          <a:p>
+            <a:pPr>
+              <a:spcBef>
+                <a:spcPts val="800"/>
+              </a:spcBef>
+              <a:defRPr sz="1900">
                 <a:solidFill>
                   <a:srgbClr val="CCCCCC"/>
                 </a:solidFill>
@@ -4634,7 +4494,108 @@
               </a:defRPr>
             </a:pPr>
             <a:r>
-              <a:t>Start the simulated beamline &amp; explore with Phoebus  (≈ 45 min)</a:t>
+              <a:rPr dirty="0"/>
+              <a:t>     ‣  cd </a:t>
+            </a:r>
+            <a:r>
+              <a:rPr lang="en-US" dirty="0" err="1"/>
+              <a:t>simlab</a:t>
+            </a:r>
+            <a:r>
+              <a:rPr dirty="0"/>
+              <a:t>-compose</a:t>
+            </a:r>
+          </a:p>
+          <a:p>
+            <a:pPr>
+              <a:spcBef>
+                <a:spcPts val="800"/>
+              </a:spcBef>
+              <a:defRPr sz="1900">
+                <a:solidFill>
+                  <a:srgbClr val="CCCCCC"/>
+                </a:solidFill>
+                <a:latin typeface="Calibri"/>
+              </a:defRPr>
+            </a:pPr>
+            <a:r>
+              <a:rPr dirty="0"/>
+              <a:t>     ‣  docker compose up</a:t>
+            </a:r>
+          </a:p>
+          <a:p>
+            <a:pPr>
+              <a:spcBef>
+                <a:spcPts val="800"/>
+              </a:spcBef>
+              <a:defRPr sz="2200">
+                <a:solidFill>
+                  <a:srgbClr val="FFFFFF"/>
+                </a:solidFill>
+                <a:latin typeface="Calibri"/>
+              </a:defRPr>
+            </a:pPr>
+            <a:r>
+              <a:rPr dirty="0"/>
+              <a:t>▸  Wait for all services to be ready (~30 seconds)</a:t>
+            </a:r>
+          </a:p>
+          <a:p>
+            <a:pPr>
+              <a:spcBef>
+                <a:spcPts val="800"/>
+              </a:spcBef>
+              <a:defRPr sz="2200">
+                <a:solidFill>
+                  <a:srgbClr val="FFFFFF"/>
+                </a:solidFill>
+                <a:latin typeface="Calibri"/>
+              </a:defRPr>
+            </a:pPr>
+            <a:r>
+              <a:rPr dirty="0"/>
+              <a:t>▸  You should see log lines from </a:t>
+            </a:r>
+            <a:r>
+              <a:rPr dirty="0" err="1"/>
+              <a:t>camerasim</a:t>
+            </a:r>
+            <a:r>
+              <a:rPr dirty="0"/>
+              <a:t>, </a:t>
+            </a:r>
+            <a:r>
+              <a:rPr dirty="0" err="1"/>
+              <a:t>motorsim</a:t>
+            </a:r>
+            <a:r>
+              <a:rPr dirty="0"/>
+              <a:t>, </a:t>
+            </a:r>
+            <a:r>
+              <a:rPr dirty="0" err="1"/>
+              <a:t>simtwin</a:t>
+            </a:r>
+            <a:r>
+              <a:rPr dirty="0"/>
+              <a:t>, notebook …</a:t>
+            </a:r>
+          </a:p>
+          <a:p>
+            <a:pPr>
+              <a:spcBef>
+                <a:spcPts val="800"/>
+              </a:spcBef>
+              <a:defRPr sz="2200">
+                <a:solidFill>
+                  <a:srgbClr val="FFFFFF"/>
+                </a:solidFill>
+                <a:latin typeface="Calibri"/>
+              </a:defRPr>
+            </a:pPr>
+            <a:r>
+              <a:rPr dirty="0"/>
+              <a:t>▸  Leave this terminal running!</a:t>
             </a:r>
           </a:p>
         </p:txBody>
@@ -4703,7 +4664,7 @@
               </a:defRPr>
             </a:pPr>
             <a:r>
-              <a:t>Step 1 – Start the beamline</a:t>
+              <a:t>Step 2 – Launch Phoebus</a:t>
             </a:r>
           </a:p>
         </p:txBody>
@@ -4786,7 +4747,39 @@
               </a:defRPr>
             </a:pPr>
             <a:r>
-              <a:t>▸  Open a terminal and go to the training directory</a:t>
+              <a:t>▸  Open a NEW terminal:</a:t>
+            </a:r>
+          </a:p>
+          <a:p>
+            <a:pPr>
+              <a:spcBef>
+                <a:spcPts val="800"/>
+              </a:spcBef>
+              <a:defRPr sz="1900">
+                <a:solidFill>
+                  <a:srgbClr val="CCCCCC"/>
+                </a:solidFill>
+                <a:latin typeface="Calibri"/>
+              </a:defRPr>
+            </a:pPr>
+            <a:r>
+              <a:t>     ‣  cd opi</a:t>
+            </a:r>
+          </a:p>
+          <a:p>
+            <a:pPr>
+              <a:spcBef>
+                <a:spcPts val="800"/>
+              </a:spcBef>
+              <a:defRPr sz="1900">
+                <a:solidFill>
+                  <a:srgbClr val="CCCCCC"/>
+                </a:solidFill>
+                <a:latin typeface="Calibri"/>
+              </a:defRPr>
+            </a:pPr>
+            <a:r>
+              <a:t>     ‣  phoebus -settings settings.ini -resource Launcher.bob</a:t>
             </a:r>
           </a:p>
           <a:p>
@@ -4802,39 +4795,7 @@
               </a:defRPr>
             </a:pPr>
             <a:r>
-              <a:t>▸  Start all containers:</a:t>
-            </a:r>
-          </a:p>
-          <a:p>
-            <a:pPr>
-              <a:spcBef>
-                <a:spcPts val="800"/>
-              </a:spcBef>
-              <a:defRPr sz="1900">
-                <a:solidFill>
-                  <a:srgbClr val="CCCCCC"/>
-                </a:solidFill>
-                <a:latin typeface="Calibri"/>
-              </a:defRPr>
-            </a:pPr>
-            <a:r>
-              <a:t>     ‣  cd test-compose</a:t>
-            </a:r>
-          </a:p>
-          <a:p>
-            <a:pPr>
-              <a:spcBef>
-                <a:spcPts val="800"/>
-              </a:spcBef>
-              <a:defRPr sz="1900">
-                <a:solidFill>
-                  <a:srgbClr val="CCCCCC"/>
-                </a:solidFill>
-                <a:latin typeface="Calibri"/>
-              </a:defRPr>
-            </a:pPr>
-            <a:r>
-              <a:t>     ‣  docker compose up</a:t>
+              <a:t>▸  The Launcher screen opens – click on each panel to explore</a:t>
             </a:r>
           </a:p>
           <a:p>
@@ -4850,39 +4811,7 @@
               </a:defRPr>
             </a:pPr>
             <a:r>
-              <a:t>▸  Wait for all services to be ready (~30 seconds)</a:t>
-            </a:r>
-          </a:p>
-          <a:p>
-            <a:pPr>
-              <a:spcBef>
-                <a:spcPts val="800"/>
-              </a:spcBef>
-              <a:defRPr sz="2200">
-                <a:solidFill>
-                  <a:srgbClr val="FFFFFF"/>
-                </a:solidFill>
-                <a:latin typeface="Calibri"/>
-              </a:defRPr>
-            </a:pPr>
-            <a:r>
-              <a:t>▸  You should see log lines from camerasim, motorsim, simtwin, notebook …</a:t>
-            </a:r>
-          </a:p>
-          <a:p>
-            <a:pPr>
-              <a:spcBef>
-                <a:spcPts val="800"/>
-              </a:spcBef>
-              <a:defRPr sz="2200">
-                <a:solidFill>
-                  <a:srgbClr val="FFFFFF"/>
-                </a:solidFill>
-                <a:latin typeface="Calibri"/>
-              </a:defRPr>
-            </a:pPr>
-            <a:r>
-              <a:t>▸  Leave this terminal running!</a:t>
+              <a:t>▸  Try the Motor panel first ⟶</a:t>
             </a:r>
           </a:p>
         </p:txBody>
@@ -4951,7 +4880,7 @@
               </a:defRPr>
             </a:pPr>
             <a:r>
-              <a:t>Step 2 – Launch Phoebus</a:t>
+              <a:t>Exercise 2a – Move the motors</a:t>
             </a:r>
           </a:p>
         </p:txBody>
@@ -5034,39 +4963,7 @@
               </a:defRPr>
             </a:pPr>
             <a:r>
-              <a:t>▸  Open a NEW terminal:</a:t>
-            </a:r>
-          </a:p>
-          <a:p>
-            <a:pPr>
-              <a:spcBef>
-                <a:spcPts val="800"/>
-              </a:spcBef>
-              <a:defRPr sz="1900">
-                <a:solidFill>
-                  <a:srgbClr val="CCCCCC"/>
-                </a:solidFill>
-                <a:latin typeface="Calibri"/>
-              </a:defRPr>
-            </a:pPr>
-            <a:r>
-              <a:t>     ‣  cd opi</a:t>
-            </a:r>
-          </a:p>
-          <a:p>
-            <a:pPr>
-              <a:spcBef>
-                <a:spcPts val="800"/>
-              </a:spcBef>
-              <a:defRPr sz="1900">
-                <a:solidFill>
-                  <a:srgbClr val="CCCCCC"/>
-                </a:solidFill>
-                <a:latin typeface="Calibri"/>
-              </a:defRPr>
-            </a:pPr>
-            <a:r>
-              <a:t>     ‣  phoebus -settings settings.ini -resource Launcher.bob</a:t>
+              <a:t>▸  Open the Motor panel from the Launcher</a:t>
             </a:r>
           </a:p>
           <a:p>
@@ -5082,7 +4979,7 @@
               </a:defRPr>
             </a:pPr>
             <a:r>
-              <a:t>▸  The Launcher screen opens – click on each panel to explore</a:t>
+              <a:t>▸  Move HMIR (horizontal mirror) to position 5.0</a:t>
             </a:r>
           </a:p>
           <a:p>
@@ -5098,7 +4995,55 @@
               </a:defRPr>
             </a:pPr>
             <a:r>
-              <a:t>▸  Try the Motor panel first ⟶</a:t>
+              <a:t>▸  Move VMIR (vertical mirror) to position -3.0</a:t>
+            </a:r>
+          </a:p>
+          <a:p>
+            <a:pPr>
+              <a:spcBef>
+                <a:spcPts val="800"/>
+              </a:spcBef>
+              <a:defRPr sz="2200">
+                <a:solidFill>
+                  <a:srgbClr val="FFFFFF"/>
+                </a:solidFill>
+                <a:latin typeface="Calibri"/>
+              </a:defRPr>
+            </a:pPr>
+            <a:r>
+              <a:t>▸  Observe: the RBV (readback) follows the setpoint</a:t>
+            </a:r>
+          </a:p>
+          <a:p>
+            <a:pPr>
+              <a:spcBef>
+                <a:spcPts val="800"/>
+              </a:spcBef>
+              <a:defRPr sz="2200">
+                <a:solidFill>
+                  <a:srgbClr val="FFFFFF"/>
+                </a:solidFill>
+                <a:latin typeface="Calibri"/>
+              </a:defRPr>
+            </a:pPr>
+            <a:r>
+              <a:t>▸  Watch the camera image – the beam spot moves!</a:t>
+            </a:r>
+          </a:p>
+          <a:p>
+            <a:pPr>
+              <a:spcBef>
+                <a:spcPts val="800"/>
+              </a:spcBef>
+              <a:defRPr sz="2200">
+                <a:solidFill>
+                  <a:srgbClr val="FFFFFF"/>
+                </a:solidFill>
+                <a:latin typeface="Calibri"/>
+              </a:defRPr>
+            </a:pPr>
+            <a:r>
+              <a:t>▸  Tip: the simtwin translates motor positions → peak position on camera</a:t>
             </a:r>
           </a:p>
         </p:txBody>
@@ -5167,7 +5112,7 @@
               </a:defRPr>
             </a:pPr>
             <a:r>
-              <a:t>Exercise 2a – Move the motors</a:t>
+              <a:t>Exercise 2b – Explore the camera</a:t>
             </a:r>
           </a:p>
         </p:txBody>
@@ -5250,7 +5195,7 @@
               </a:defRPr>
             </a:pPr>
             <a:r>
-              <a:t>▸  Open the Motor panel from the Launcher</a:t>
+              <a:t>▸  Open the Camera panel from the Launcher</a:t>
             </a:r>
           </a:p>
           <a:p>
@@ -5266,7 +5211,7 @@
               </a:defRPr>
             </a:pPr>
             <a:r>
-              <a:t>▸  Move HMIR (horizontal mirror) to position 5.0</a:t>
+              <a:t>▸  Enable acquisition: set Acquire = Start</a:t>
             </a:r>
           </a:p>
           <a:p>
@@ -5282,7 +5227,7 @@
               </a:defRPr>
             </a:pPr>
             <a:r>
-              <a:t>▸  Move VMIR (vertical mirror) to position -3.0</a:t>
+              <a:t>▸  You should see a live image with a bright peak (the 'beam')</a:t>
             </a:r>
           </a:p>
           <a:p>
@@ -5298,7 +5243,7 @@
               </a:defRPr>
             </a:pPr>
             <a:r>
-              <a:t>▸  Observe: the RBV (readback) follows the setpoint</a:t>
+              <a:t>▸  Try the overlay mode: draw a rectangle on the image</a:t>
             </a:r>
           </a:p>
           <a:p>
@@ -5314,7 +5259,7 @@
               </a:defRPr>
             </a:pPr>
             <a:r>
-              <a:t>▸  Watch the camera image – the beam spot moves!</a:t>
+              <a:t>▸  Click Apply – an overlay rectangle appears on the live image</a:t>
             </a:r>
           </a:p>
           <a:p>
@@ -5330,7 +5275,7 @@
               </a:defRPr>
             </a:pPr>
             <a:r>
-              <a:t>▸  Tip: the simtwin translates motor positions → peak position on camera</a:t>
+              <a:t>▸  The overlay marks the 'target zone' for beam centering</a:t>
             </a:r>
           </a:p>
         </p:txBody>
@@ -5399,7 +5344,7 @@
               </a:defRPr>
             </a:pPr>
             <a:r>
-              <a:t>Exercise 2b – Explore the camera</a:t>
+              <a:t>Exercise 2c – PV Probe</a:t>
             </a:r>
           </a:p>
         </p:txBody>
@@ -5482,7 +5427,7 @@
               </a:defRPr>
             </a:pPr>
             <a:r>
-              <a:t>▸  Open the Camera panel from the Launcher</a:t>
+              <a:t>▸  In Phoebus: menu → Applications → PV Probe (or Ctrl+P)</a:t>
             </a:r>
           </a:p>
           <a:p>
@@ -5498,7 +5443,7 @@
               </a:defRPr>
             </a:pPr>
             <a:r>
-              <a:t>▸  Enable acquisition: set Acquire = Start</a:t>
+              <a:t>▸  Type a PV name:  LAB:SIM:HMIR.RBV</a:t>
             </a:r>
           </a:p>
           <a:p>
@@ -5514,7 +5459,7 @@
               </a:defRPr>
             </a:pPr>
             <a:r>
-              <a:t>▸  You should see a live image with a bright peak (the 'beam')</a:t>
+              <a:t>▸  Observe the live value, timestamp, alarm status</a:t>
             </a:r>
           </a:p>
           <a:p>
@@ -5530,7 +5475,7 @@
               </a:defRPr>
             </a:pPr>
             <a:r>
-              <a:t>▸  Try the overlay mode: draw a rectangle on the image</a:t>
+              <a:t>▸  Try writing:  LAB:SIM:HMIR.VAL  → enter a new position</a:t>
             </a:r>
           </a:p>
           <a:p>
@@ -5546,7 +5491,39 @@
               </a:defRPr>
             </a:pPr>
             <a:r>
-              <a:t>▸  Click Apply – an overlay rectangle appears on the live image</a:t>
+              <a:t>▸  Try other PVs:</a:t>
+            </a:r>
+          </a:p>
+          <a:p>
+            <a:pPr>
+              <a:spcBef>
+                <a:spcPts val="800"/>
+              </a:spcBef>
+              <a:defRPr sz="1900">
+                <a:solidFill>
+                  <a:srgbClr val="CCCCCC"/>
+                </a:solidFill>
+                <a:latin typeface="Calibri"/>
+              </a:defRPr>
+            </a:pPr>
+            <a:r>
+              <a:t>     ‣  LAB:SIM:CAM01:Stats1:CentroidX_RBV</a:t>
+            </a:r>
+          </a:p>
+          <a:p>
+            <a:pPr>
+              <a:spcBef>
+                <a:spcPts val="800"/>
+              </a:spcBef>
+              <a:defRPr sz="1900">
+                <a:solidFill>
+                  <a:srgbClr val="CCCCCC"/>
+                </a:solidFill>
+                <a:latin typeface="Calibri"/>
+              </a:defRPr>
+            </a:pPr>
+            <a:r>
+              <a:t>     ‣  LAB:SIM:CAM01:Acquire</a:t>
             </a:r>
           </a:p>
           <a:p>
@@ -5562,7 +5539,7 @@
               </a:defRPr>
             </a:pPr>
             <a:r>
-              <a:t>▸  The overlay marks the 'target zone' for beam centering</a:t>
+              <a:t>▸  This is how EPICS clients communicate – by PV name</a:t>
             </a:r>
           </a:p>
         </p:txBody>
@@ -5602,56 +5579,20 @@
       </p:grpSpPr>
       <p:sp>
         <p:nvSpPr>
-          <p:cNvPr id="2" name="TextBox 1"/>
-          <p:cNvSpPr txBox="1"/>
-          <p:nvPr/>
-        </p:nvSpPr>
-        <p:spPr>
-          <a:xfrm>
-            <a:off x="548640" y="274320"/>
-            <a:ext cx="10972800" cy="822960"/>
-          </a:xfrm>
-          <a:prstGeom prst="rect">
-            <a:avLst/>
-          </a:prstGeom>
-          <a:noFill/>
-        </p:spPr>
-        <p:txBody>
-          <a:bodyPr wrap="square">
-            <a:spAutoFit/>
-          </a:bodyPr>
-          <a:lstStyle/>
-          <a:p>
-            <a:pPr algn="l">
-              <a:defRPr sz="3400" b="1">
-                <a:solidFill>
-                  <a:srgbClr val="00B4D8"/>
-                </a:solidFill>
-                <a:latin typeface="Calibri"/>
-              </a:defRPr>
-            </a:pPr>
-            <a:r>
-              <a:t>Exercise 2c – PV Probe</a:t>
-            </a:r>
-          </a:p>
-        </p:txBody>
-      </p:sp>
-      <p:sp>
-        <p:nvSpPr>
-          <p:cNvPr id="3" name="Rectangle 2"/>
+          <p:cNvPr id="2" name="Rectangle 1"/>
           <p:cNvSpPr/>
           <p:nvPr/>
         </p:nvSpPr>
         <p:spPr>
           <a:xfrm>
-            <a:off x="548640" y="1051560"/>
-            <a:ext cx="4572000" cy="36576"/>
+            <a:off x="0" y="2926080"/>
+            <a:ext cx="12191695" cy="54864"/>
           </a:xfrm>
           <a:prstGeom prst="rect">
             <a:avLst/>
           </a:prstGeom>
           <a:solidFill>
-            <a:srgbClr val="48CAE4"/>
+            <a:srgbClr val="00B4D8"/>
           </a:solidFill>
           <a:ln>
             <a:noFill/>
@@ -5682,14 +5623,14 @@
       </p:sp>
       <p:sp>
         <p:nvSpPr>
-          <p:cNvPr id="4" name="TextBox 3"/>
+          <p:cNvPr id="3" name="TextBox 2"/>
           <p:cNvSpPr txBox="1"/>
           <p:nvPr/>
         </p:nvSpPr>
         <p:spPr>
           <a:xfrm>
-            <a:off x="731520" y="1371600"/>
-            <a:ext cx="10515600" cy="5029200"/>
+            <a:off x="731520" y="1828800"/>
+            <a:ext cx="10515600" cy="1097280"/>
           </a:xfrm>
           <a:prstGeom prst="rect">
             <a:avLst/>
@@ -5702,91 +5643,44 @@
           </a:bodyPr>
           <a:lstStyle/>
           <a:p>
-            <a:pPr>
-              <a:spcBef>
-                <a:spcPts val="800"/>
-              </a:spcBef>
-              <a:defRPr sz="2200">
-                <a:solidFill>
-                  <a:srgbClr val="FFFFFF"/>
-                </a:solidFill>
-                <a:latin typeface="Calibri"/>
-              </a:defRPr>
-            </a:pPr>
-            <a:r>
-              <a:t>▸  In Phoebus: menu → Applications → PV Probe (or Ctrl+P)</a:t>
-            </a:r>
-          </a:p>
-          <a:p>
-            <a:pPr>
-              <a:spcBef>
-                <a:spcPts val="800"/>
-              </a:spcBef>
-              <a:defRPr sz="2200">
-                <a:solidFill>
-                  <a:srgbClr val="FFFFFF"/>
-                </a:solidFill>
-                <a:latin typeface="Calibri"/>
-              </a:defRPr>
-            </a:pPr>
-            <a:r>
-              <a:t>▸  Type a PV name:  LAB:SIM:HMIR.RBV</a:t>
-            </a:r>
-          </a:p>
-          <a:p>
-            <a:pPr>
-              <a:spcBef>
-                <a:spcPts val="800"/>
-              </a:spcBef>
-              <a:defRPr sz="2200">
-                <a:solidFill>
-                  <a:srgbClr val="FFFFFF"/>
-                </a:solidFill>
-                <a:latin typeface="Calibri"/>
-              </a:defRPr>
-            </a:pPr>
-            <a:r>
-              <a:t>▸  Observe the live value, timestamp, alarm status</a:t>
-            </a:r>
-          </a:p>
-          <a:p>
-            <a:pPr>
-              <a:spcBef>
-                <a:spcPts val="800"/>
-              </a:spcBef>
-              <a:defRPr sz="2200">
-                <a:solidFill>
-                  <a:srgbClr val="FFFFFF"/>
-                </a:solidFill>
-                <a:latin typeface="Calibri"/>
-              </a:defRPr>
-            </a:pPr>
-            <a:r>
-              <a:t>▸  Try writing:  LAB:SIM:HMIR.VAL  → enter a new position</a:t>
-            </a:r>
-          </a:p>
-          <a:p>
-            <a:pPr>
-              <a:spcBef>
-                <a:spcPts val="800"/>
-              </a:spcBef>
-              <a:defRPr sz="2200">
-                <a:solidFill>
-                  <a:srgbClr val="FFFFFF"/>
-                </a:solidFill>
-                <a:latin typeface="Calibri"/>
-              </a:defRPr>
-            </a:pPr>
-            <a:r>
-              <a:t>▸  Try other PVs:</a:t>
-            </a:r>
-          </a:p>
-          <a:p>
-            <a:pPr>
-              <a:spcBef>
-                <a:spcPts val="800"/>
-              </a:spcBef>
-              <a:defRPr sz="1900">
+            <a:pPr algn="ctr">
+              <a:defRPr sz="4000" b="1">
+                <a:solidFill>
+                  <a:srgbClr val="00B4D8"/>
+                </a:solidFill>
+                <a:latin typeface="Calibri"/>
+              </a:defRPr>
+            </a:pPr>
+            <a:r>
+              <a:t>☕  Break</a:t>
+            </a:r>
+          </a:p>
+        </p:txBody>
+      </p:sp>
+      <p:sp>
+        <p:nvSpPr>
+          <p:cNvPr id="4" name="TextBox 3"/>
+          <p:cNvSpPr txBox="1"/>
+          <p:nvPr/>
+        </p:nvSpPr>
+        <p:spPr>
+          <a:xfrm>
+            <a:off x="1371600" y="3291840"/>
+            <a:ext cx="9144000" cy="914400"/>
+          </a:xfrm>
+          <a:prstGeom prst="rect">
+            <a:avLst/>
+          </a:prstGeom>
+          <a:noFill/>
+        </p:spPr>
+        <p:txBody>
+          <a:bodyPr wrap="square">
+            <a:spAutoFit/>
+          </a:bodyPr>
+          <a:lstStyle/>
+          <a:p>
+            <a:pPr algn="ctr">
+              <a:defRPr sz="2200" b="0">
                 <a:solidFill>
                   <a:srgbClr val="CCCCCC"/>
                 </a:solidFill>
@@ -5794,39 +5688,7 @@
               </a:defRPr>
             </a:pPr>
             <a:r>
-              <a:t>     ‣  LAB:SIM:CAM01:Stats1:CentroidX_RBV</a:t>
-            </a:r>
-          </a:p>
-          <a:p>
-            <a:pPr>
-              <a:spcBef>
-                <a:spcPts val="800"/>
-              </a:spcBef>
-              <a:defRPr sz="1900">
-                <a:solidFill>
-                  <a:srgbClr val="CCCCCC"/>
-                </a:solidFill>
-                <a:latin typeface="Calibri"/>
-              </a:defRPr>
-            </a:pPr>
-            <a:r>
-              <a:t>     ‣  LAB:SIM:CAM01:Acquire</a:t>
-            </a:r>
-          </a:p>
-          <a:p>
-            <a:pPr>
-              <a:spcBef>
-                <a:spcPts val="800"/>
-              </a:spcBef>
-              <a:defRPr sz="2200">
-                <a:solidFill>
-                  <a:srgbClr val="FFFFFF"/>
-                </a:solidFill>
-                <a:latin typeface="Calibri"/>
-              </a:defRPr>
-            </a:pPr>
-            <a:r>
-              <a:t>▸  This is how EPICS clients communicate – by PV name</a:t>
+              <a:t>15 minutes – stretch, ask questions!</a:t>
             </a:r>
           </a:p>
         </p:txBody>
@@ -5939,7 +5801,7 @@
               </a:defRPr>
             </a:pPr>
             <a:r>
-              <a:t>☕  Break</a:t>
+              <a:t>Part 3 – Python &amp; p4p</a:t>
             </a:r>
           </a:p>
         </p:txBody>
@@ -5975,7 +5837,7 @@
               </a:defRPr>
             </a:pPr>
             <a:r>
-              <a:t>15 minutes – stretch, ask questions!</a:t>
+              <a:t>Controlling EPICS from Jupyter notebooks  (≈ 45 min)</a:t>
             </a:r>
           </a:p>
         </p:txBody>
@@ -6015,20 +5877,56 @@
       </p:grpSpPr>
       <p:sp>
         <p:nvSpPr>
-          <p:cNvPr id="2" name="Rectangle 1"/>
+          <p:cNvPr id="2" name="TextBox 1"/>
+          <p:cNvSpPr txBox="1"/>
+          <p:nvPr/>
+        </p:nvSpPr>
+        <p:spPr>
+          <a:xfrm>
+            <a:off x="548640" y="274320"/>
+            <a:ext cx="10972800" cy="822960"/>
+          </a:xfrm>
+          <a:prstGeom prst="rect">
+            <a:avLst/>
+          </a:prstGeom>
+          <a:noFill/>
+        </p:spPr>
+        <p:txBody>
+          <a:bodyPr wrap="square">
+            <a:spAutoFit/>
+          </a:bodyPr>
+          <a:lstStyle/>
+          <a:p>
+            <a:pPr algn="l">
+              <a:defRPr sz="3400" b="1">
+                <a:solidFill>
+                  <a:srgbClr val="00B4D8"/>
+                </a:solidFill>
+                <a:latin typeface="Calibri"/>
+              </a:defRPr>
+            </a:pPr>
+            <a:r>
+              <a:t>Why Python for Controls?</a:t>
+            </a:r>
+          </a:p>
+        </p:txBody>
+      </p:sp>
+      <p:sp>
+        <p:nvSpPr>
+          <p:cNvPr id="3" name="Rectangle 2"/>
           <p:cNvSpPr/>
           <p:nvPr/>
         </p:nvSpPr>
         <p:spPr>
           <a:xfrm>
-            <a:off x="0" y="2926080"/>
-            <a:ext cx="12191695" cy="54864"/>
+            <a:off x="548640" y="1051560"/>
+            <a:ext cx="4572000" cy="36576"/>
           </a:xfrm>
           <a:prstGeom prst="rect">
             <a:avLst/>
           </a:prstGeom>
           <a:solidFill>
-            <a:srgbClr val="00B4D8"/>
+            <a:srgbClr val="48CAE4"/>
           </a:solidFill>
           <a:ln>
             <a:noFill/>
@@ -6059,14 +5957,14 @@
       </p:sp>
       <p:sp>
         <p:nvSpPr>
-          <p:cNvPr id="3" name="TextBox 2"/>
+          <p:cNvPr id="4" name="TextBox 3"/>
           <p:cNvSpPr txBox="1"/>
           <p:nvPr/>
         </p:nvSpPr>
         <p:spPr>
           <a:xfrm>
-            <a:off x="731520" y="1828800"/>
-            <a:ext cx="10515600" cy="1097280"/>
+            <a:off x="731520" y="1371600"/>
+            <a:ext cx="10515600" cy="5029200"/>
           </a:xfrm>
           <a:prstGeom prst="rect">
             <a:avLst/>
@@ -6079,44 +5977,59 @@
           </a:bodyPr>
           <a:lstStyle/>
           <a:p>
-            <a:pPr algn="ctr">
-              <a:defRPr sz="4000" b="1">
-                <a:solidFill>
-                  <a:srgbClr val="00B4D8"/>
-                </a:solidFill>
-                <a:latin typeface="Calibri"/>
-              </a:defRPr>
-            </a:pPr>
-            <a:r>
-              <a:t>Part 3 – Python &amp; p4p</a:t>
-            </a:r>
-          </a:p>
-        </p:txBody>
-      </p:sp>
-      <p:sp>
-        <p:nvSpPr>
-          <p:cNvPr id="4" name="TextBox 3"/>
-          <p:cNvSpPr txBox="1"/>
-          <p:nvPr/>
-        </p:nvSpPr>
-        <p:spPr>
-          <a:xfrm>
-            <a:off x="1371600" y="3291840"/>
-            <a:ext cx="9144000" cy="914400"/>
-          </a:xfrm>
-          <a:prstGeom prst="rect">
-            <a:avLst/>
-          </a:prstGeom>
-          <a:noFill/>
-        </p:spPr>
-        <p:txBody>
-          <a:bodyPr wrap="square">
-            <a:spAutoFit/>
-          </a:bodyPr>
-          <a:lstStyle/>
-          <a:p>
-            <a:pPr algn="ctr">
-              <a:defRPr sz="2200" b="0">
+            <a:pPr>
+              <a:spcBef>
+                <a:spcPts val="800"/>
+              </a:spcBef>
+              <a:defRPr sz="2200">
+                <a:solidFill>
+                  <a:srgbClr val="FFFFFF"/>
+                </a:solidFill>
+                <a:latin typeface="Calibri"/>
+              </a:defRPr>
+            </a:pPr>
+            <a:r>
+              <a:t>▸  Physicists already know (some) Python – low barrier</a:t>
+            </a:r>
+          </a:p>
+          <a:p>
+            <a:pPr>
+              <a:spcBef>
+                <a:spcPts val="800"/>
+              </a:spcBef>
+              <a:defRPr sz="2200">
+                <a:solidFill>
+                  <a:srgbClr val="FFFFFF"/>
+                </a:solidFill>
+                <a:latin typeface="Calibri"/>
+              </a:defRPr>
+            </a:pPr>
+            <a:r>
+              <a:t>▸  Rich ecosystem: NumPy, Matplotlib, SciPy, Bluesky …</a:t>
+            </a:r>
+          </a:p>
+          <a:p>
+            <a:pPr>
+              <a:spcBef>
+                <a:spcPts val="800"/>
+              </a:spcBef>
+              <a:defRPr sz="2200">
+                <a:solidFill>
+                  <a:srgbClr val="FFFFFF"/>
+                </a:solidFill>
+                <a:latin typeface="Calibri"/>
+              </a:defRPr>
+            </a:pPr>
+            <a:r>
+              <a:t>▸  Two Python client libraries for EPICS:</a:t>
+            </a:r>
+          </a:p>
+          <a:p>
+            <a:pPr>
+              <a:spcBef>
+                <a:spcPts val="800"/>
+              </a:spcBef>
+              <a:defRPr sz="1900">
                 <a:solidFill>
                   <a:srgbClr val="CCCCCC"/>
                 </a:solidFill>
@@ -6124,7 +6037,55 @@
               </a:defRPr>
             </a:pPr>
             <a:r>
-              <a:t>Controlling EPICS from Jupyter notebooks  (≈ 45 min)</a:t>
+              <a:t>     ‣  pyepics  → Channel Access (classic)</a:t>
+            </a:r>
+          </a:p>
+          <a:p>
+            <a:pPr>
+              <a:spcBef>
+                <a:spcPts val="800"/>
+              </a:spcBef>
+              <a:defRPr sz="1900">
+                <a:solidFill>
+                  <a:srgbClr val="CCCCCC"/>
+                </a:solidFill>
+                <a:latin typeface="Calibri"/>
+              </a:defRPr>
+            </a:pPr>
+            <a:r>
+              <a:t>     ‣  p4p  → PV Access (modern, structured data, images)</a:t>
+            </a:r>
+          </a:p>
+          <a:p>
+            <a:pPr>
+              <a:spcBef>
+                <a:spcPts val="800"/>
+              </a:spcBef>
+              <a:defRPr sz="2200">
+                <a:solidFill>
+                  <a:srgbClr val="FFFFFF"/>
+                </a:solidFill>
+                <a:latin typeface="Calibri"/>
+              </a:defRPr>
+            </a:pPr>
+            <a:r>
+              <a:t>▸  We'll use p4p – it supports both protocols and is the future</a:t>
+            </a:r>
+          </a:p>
+          <a:p>
+            <a:pPr>
+              <a:spcBef>
+                <a:spcPts val="800"/>
+              </a:spcBef>
+              <a:defRPr sz="2200">
+                <a:solidFill>
+                  <a:srgbClr val="FFFFFF"/>
+                </a:solidFill>
+                <a:latin typeface="Calibri"/>
+              </a:defRPr>
+            </a:pPr>
+            <a:r>
+              <a:t>▸  All running inside Jupyter – included in our docker compose!</a:t>
             </a:r>
           </a:p>
         </p:txBody>
@@ -6918,7 +6879,7 @@
               </a:defRPr>
             </a:pPr>
             <a:r>
-              <a:t>Why Python for Controls?</a:t>
+              <a:t>Step 3 – Open Jupyter</a:t>
             </a:r>
           </a:p>
         </p:txBody>
@@ -7001,7 +6962,25 @@
               </a:defRPr>
             </a:pPr>
             <a:r>
-              <a:t>▸  Physicists already know (some) Python – low barrier</a:t>
+              <a:rPr dirty="0"/>
+              <a:t>▸  Open your web browser and navigate to:</a:t>
+            </a:r>
+          </a:p>
+          <a:p>
+            <a:pPr>
+              <a:spcBef>
+                <a:spcPts val="800"/>
+              </a:spcBef>
+              <a:defRPr sz="1900">
+                <a:solidFill>
+                  <a:srgbClr val="CCCCCC"/>
+                </a:solidFill>
+                <a:latin typeface="Calibri"/>
+              </a:defRPr>
+            </a:pPr>
+            <a:r>
+              <a:rPr dirty="0"/>
+              <a:t>     ‣  http://localhost:8090</a:t>
             </a:r>
           </a:p>
           <a:p>
@@ -7017,7 +6996,8 @@
               </a:defRPr>
             </a:pPr>
             <a:r>
-              <a:t>▸  Rich ecosystem: NumPy, Matplotlib, SciPy, Bluesky …</a:t>
+              <a:rPr dirty="0"/>
+              <a:t>▸  No password required – we configured token-free access</a:t>
             </a:r>
           </a:p>
           <a:p>
@@ -7033,39 +7013,8 @@
               </a:defRPr>
             </a:pPr>
             <a:r>
-              <a:t>▸  Two Python client libraries for EPICS:</a:t>
-            </a:r>
-          </a:p>
-          <a:p>
-            <a:pPr>
-              <a:spcBef>
-                <a:spcPts val="800"/>
-              </a:spcBef>
-              <a:defRPr sz="1900">
-                <a:solidFill>
-                  <a:srgbClr val="CCCCCC"/>
-                </a:solidFill>
-                <a:latin typeface="Calibri"/>
-              </a:defRPr>
-            </a:pPr>
-            <a:r>
-              <a:t>     ‣  pyepics  → Channel Access (classic)</a:t>
-            </a:r>
-          </a:p>
-          <a:p>
-            <a:pPr>
-              <a:spcBef>
-                <a:spcPts val="800"/>
-              </a:spcBef>
-              <a:defRPr sz="1900">
-                <a:solidFill>
-                  <a:srgbClr val="CCCCCC"/>
-                </a:solidFill>
-                <a:latin typeface="Calibri"/>
-              </a:defRPr>
-            </a:pPr>
-            <a:r>
-              <a:t>     ‣  p4p  → PV Access (modern, structured data, images)</a:t>
+              <a:rPr dirty="0"/>
+              <a:t>▸  Create a new Python 3 notebook</a:t>
             </a:r>
           </a:p>
           <a:p>
@@ -7081,7 +7030,16 @@
               </a:defRPr>
             </a:pPr>
             <a:r>
-              <a:t>▸  We'll use p4p – it supports both protocols and is the future</a:t>
+              <a:rPr dirty="0"/>
+              <a:t>▸  The notebook has p4p pre-installed (via </a:t>
+            </a:r>
+            <a:r>
+              <a:rPr dirty="0" err="1"/>
+              <a:t>beamline.yaml</a:t>
+            </a:r>
+            <a:r>
+              <a:rPr dirty="0"/>
+              <a:t> pip list)</a:t>
             </a:r>
           </a:p>
           <a:p>
@@ -7097,7 +7055,8 @@
               </a:defRPr>
             </a:pPr>
             <a:r>
-              <a:t>▸  All running inside Jupyter – included in our docker compose!</a:t>
+              <a:rPr dirty="0"/>
+              <a:t>▸  Your work is saved in the 'work' folder (persistent on host)</a:t>
             </a:r>
           </a:p>
         </p:txBody>
@@ -7144,7 +7103,7 @@
         <p:spPr>
           <a:xfrm>
             <a:off x="548640" y="274320"/>
-            <a:ext cx="10972800" cy="822960"/>
+            <a:ext cx="10972800" cy="584775"/>
           </a:xfrm>
           <a:prstGeom prst="rect">
             <a:avLst/>
@@ -7158,7 +7117,7 @@
           <a:lstStyle/>
           <a:p>
             <a:pPr algn="l">
-              <a:defRPr sz="3400" b="1">
+              <a:defRPr sz="3200" b="1">
                 <a:solidFill>
                   <a:srgbClr val="00B4D8"/>
                 </a:solidFill>
@@ -7166,30 +7125,41 @@
               </a:defRPr>
             </a:pPr>
             <a:r>
-              <a:t>Step 3 – Open Jupyter</a:t>
-            </a:r>
-          </a:p>
-        </p:txBody>
-      </p:sp>
-      <p:sp>
-        <p:nvSpPr>
-          <p:cNvPr id="3" name="Rectangle 2"/>
+              <a:rPr dirty="0"/>
+              <a:t>p4p basics – </a:t>
+            </a:r>
+            <a:r>
+              <a:rPr lang="en-US" dirty="0"/>
+              <a:t>Access</a:t>
+            </a:r>
+            <a:r>
+              <a:rPr dirty="0"/>
+              <a:t> a PV</a:t>
+            </a:r>
+          </a:p>
+        </p:txBody>
+      </p:sp>
+      <p:sp>
+        <p:nvSpPr>
+          <p:cNvPr id="3" name="Rounded Rectangle 2"/>
           <p:cNvSpPr/>
           <p:nvPr/>
         </p:nvSpPr>
         <p:spPr>
           <a:xfrm>
-            <a:off x="548640" y="1051560"/>
-            <a:ext cx="4572000" cy="36576"/>
-          </a:xfrm>
-          <a:prstGeom prst="rect">
+            <a:off x="548640" y="1188720"/>
+            <a:ext cx="11064240" cy="5120640"/>
+          </a:xfrm>
+          <a:prstGeom prst="roundRect">
             <a:avLst/>
           </a:prstGeom>
           <a:solidFill>
-            <a:srgbClr val="48CAE4"/>
+            <a:srgbClr val="0D1117"/>
           </a:solidFill>
-          <a:ln>
-            <a:noFill/>
+          <a:ln w="12700">
+            <a:solidFill>
+              <a:srgbClr val="334455"/>
+            </a:solidFill>
           </a:ln>
         </p:spPr>
         <p:style>
@@ -7223,8 +7193,8 @@
         </p:nvSpPr>
         <p:spPr>
           <a:xfrm>
-            <a:off x="731520" y="1371600"/>
-            <a:ext cx="10515600" cy="5029200"/>
+            <a:off x="9601200" y="914400"/>
+            <a:ext cx="1828800" cy="320040"/>
           </a:xfrm>
           <a:prstGeom prst="rect">
             <a:avLst/>
@@ -7237,99 +7207,311 @@
           </a:bodyPr>
           <a:lstStyle/>
           <a:p>
-            <a:pPr>
-              <a:spcBef>
-                <a:spcPts val="800"/>
-              </a:spcBef>
-              <a:defRPr sz="2200">
-                <a:solidFill>
-                  <a:srgbClr val="FFFFFF"/>
-                </a:solidFill>
-                <a:latin typeface="Calibri"/>
-              </a:defRPr>
-            </a:pPr>
-            <a:r>
-              <a:t>▸  Open your web browser and navigate to:</a:t>
-            </a:r>
-          </a:p>
-          <a:p>
-            <a:pPr>
-              <a:spcBef>
-                <a:spcPts val="800"/>
-              </a:spcBef>
-              <a:defRPr sz="1900">
-                <a:solidFill>
-                  <a:srgbClr val="CCCCCC"/>
-                </a:solidFill>
-                <a:latin typeface="Calibri"/>
-              </a:defRPr>
-            </a:pPr>
-            <a:r>
-              <a:t>     ‣  http://localhost:8090</a:t>
-            </a:r>
-          </a:p>
-          <a:p>
-            <a:pPr>
-              <a:spcBef>
-                <a:spcPts val="800"/>
-              </a:spcBef>
-              <a:defRPr sz="2200">
-                <a:solidFill>
-                  <a:srgbClr val="FFFFFF"/>
-                </a:solidFill>
-                <a:latin typeface="Calibri"/>
-              </a:defRPr>
-            </a:pPr>
-            <a:r>
-              <a:t>▸  No password required – we configured token-free access</a:t>
-            </a:r>
-          </a:p>
-          <a:p>
-            <a:pPr>
-              <a:spcBef>
-                <a:spcPts val="800"/>
-              </a:spcBef>
-              <a:defRPr sz="2200">
-                <a:solidFill>
-                  <a:srgbClr val="FFFFFF"/>
-                </a:solidFill>
-                <a:latin typeface="Calibri"/>
-              </a:defRPr>
-            </a:pPr>
-            <a:r>
-              <a:t>▸  Create a new Python 3 notebook</a:t>
-            </a:r>
-          </a:p>
-          <a:p>
-            <a:pPr>
-              <a:spcBef>
-                <a:spcPts val="800"/>
-              </a:spcBef>
-              <a:defRPr sz="2200">
-                <a:solidFill>
-                  <a:srgbClr val="FFFFFF"/>
-                </a:solidFill>
-                <a:latin typeface="Calibri"/>
-              </a:defRPr>
-            </a:pPr>
-            <a:r>
-              <a:t>▸  The notebook has p4p pre-installed (via beamline.yaml pip list)</a:t>
-            </a:r>
-          </a:p>
-          <a:p>
-            <a:pPr>
-              <a:spcBef>
-                <a:spcPts val="800"/>
-              </a:spcBef>
-              <a:defRPr sz="2200">
-                <a:solidFill>
-                  <a:srgbClr val="FFFFFF"/>
-                </a:solidFill>
-                <a:latin typeface="Calibri"/>
-              </a:defRPr>
-            </a:pPr>
-            <a:r>
-              <a:t>▸  Your work is saved in the 'work' folder (persistent on host)</a:t>
+            <a:pPr algn="r">
+              <a:defRPr sz="1300" b="0">
+                <a:solidFill>
+                  <a:srgbClr val="48CAE4"/>
+                </a:solidFill>
+                <a:latin typeface="Calibri"/>
+              </a:defRPr>
+            </a:pPr>
+            <a:r>
+              <a:t>python</a:t>
+            </a:r>
+          </a:p>
+        </p:txBody>
+      </p:sp>
+      <p:sp>
+        <p:nvSpPr>
+          <p:cNvPr id="5" name="TextBox 4"/>
+          <p:cNvSpPr txBox="1"/>
+          <p:nvPr/>
+        </p:nvSpPr>
+        <p:spPr>
+          <a:xfrm>
+            <a:off x="822960" y="1371600"/>
+            <a:ext cx="10515600" cy="3600986"/>
+          </a:xfrm>
+          <a:prstGeom prst="rect">
+            <a:avLst/>
+          </a:prstGeom>
+          <a:noFill/>
+        </p:spPr>
+        <p:txBody>
+          <a:bodyPr wrap="square">
+            <a:spAutoFit/>
+          </a:bodyPr>
+          <a:lstStyle/>
+          <a:p>
+            <a:pPr>
+              <a:spcBef>
+                <a:spcPts val="200"/>
+              </a:spcBef>
+              <a:defRPr sz="1600">
+                <a:solidFill>
+                  <a:srgbClr val="ABB2BF"/>
+                </a:solidFill>
+                <a:latin typeface="Consolas"/>
+              </a:defRPr>
+            </a:pPr>
+            <a:r>
+              <a:rPr dirty="0"/>
+              <a:t>from p4p.client.thread import Context</a:t>
+            </a:r>
+          </a:p>
+          <a:p>
+            <a:pPr>
+              <a:spcBef>
+                <a:spcPts val="200"/>
+              </a:spcBef>
+              <a:defRPr sz="1600">
+                <a:solidFill>
+                  <a:srgbClr val="ABB2BF"/>
+                </a:solidFill>
+                <a:latin typeface="Consolas"/>
+              </a:defRPr>
+            </a:pPr>
+            <a:endParaRPr dirty="0"/>
+          </a:p>
+          <a:p>
+            <a:pPr>
+              <a:spcBef>
+                <a:spcPts val="200"/>
+              </a:spcBef>
+              <a:defRPr sz="1600">
+                <a:solidFill>
+                  <a:srgbClr val="ABB2BF"/>
+                </a:solidFill>
+                <a:latin typeface="Consolas"/>
+              </a:defRPr>
+            </a:pPr>
+            <a:r>
+              <a:rPr dirty="0"/>
+              <a:t># Create a PV Access context (connects to the EPICS network)</a:t>
+            </a:r>
+          </a:p>
+          <a:p>
+            <a:pPr>
+              <a:spcBef>
+                <a:spcPts val="200"/>
+              </a:spcBef>
+              <a:defRPr sz="1600">
+                <a:solidFill>
+                  <a:srgbClr val="ABB2BF"/>
+                </a:solidFill>
+                <a:latin typeface="Consolas"/>
+              </a:defRPr>
+            </a:pPr>
+            <a:r>
+              <a:rPr dirty="0" err="1"/>
+              <a:t>ctx</a:t>
+            </a:r>
+            <a:r>
+              <a:rPr dirty="0"/>
+              <a:t> = Context('</a:t>
+            </a:r>
+            <a:r>
+              <a:rPr dirty="0" err="1"/>
+              <a:t>pva</a:t>
+            </a:r>
+            <a:r>
+              <a:rPr dirty="0"/>
+              <a:t>')</a:t>
+            </a:r>
+          </a:p>
+          <a:p>
+            <a:pPr>
+              <a:spcBef>
+                <a:spcPts val="200"/>
+              </a:spcBef>
+              <a:defRPr sz="1600">
+                <a:solidFill>
+                  <a:srgbClr val="ABB2BF"/>
+                </a:solidFill>
+                <a:latin typeface="Consolas"/>
+              </a:defRPr>
+            </a:pPr>
+            <a:r>
+              <a:rPr lang="en-GB" dirty="0" err="1"/>
+              <a:t>ctx.put</a:t>
+            </a:r>
+            <a:r>
+              <a:rPr lang="en-GB" dirty="0"/>
+              <a:t>('LAB:SIM:CAM01:Stats1:ComputeCentroid',1)</a:t>
+            </a:r>
+            <a:endParaRPr dirty="0"/>
+          </a:p>
+          <a:p>
+            <a:pPr>
+              <a:spcBef>
+                <a:spcPts val="200"/>
+              </a:spcBef>
+              <a:defRPr sz="1600">
+                <a:solidFill>
+                  <a:srgbClr val="ABB2BF"/>
+                </a:solidFill>
+                <a:latin typeface="Consolas"/>
+              </a:defRPr>
+            </a:pPr>
+            <a:r>
+              <a:rPr dirty="0"/>
+              <a:t># Read a motor position</a:t>
+            </a:r>
+          </a:p>
+          <a:p>
+            <a:pPr>
+              <a:spcBef>
+                <a:spcPts val="200"/>
+              </a:spcBef>
+              <a:defRPr sz="1600">
+                <a:solidFill>
+                  <a:srgbClr val="ABB2BF"/>
+                </a:solidFill>
+                <a:latin typeface="Consolas"/>
+              </a:defRPr>
+            </a:pPr>
+            <a:r>
+              <a:rPr dirty="0"/>
+              <a:t>pos = </a:t>
+            </a:r>
+            <a:r>
+              <a:rPr dirty="0" err="1"/>
+              <a:t>ctx.get</a:t>
+            </a:r>
+            <a:r>
+              <a:rPr dirty="0"/>
+              <a:t>('LAB:SIM:HMIR')</a:t>
+            </a:r>
+          </a:p>
+          <a:p>
+            <a:pPr>
+              <a:spcBef>
+                <a:spcPts val="200"/>
+              </a:spcBef>
+              <a:defRPr sz="1600">
+                <a:solidFill>
+                  <a:srgbClr val="ABB2BF"/>
+                </a:solidFill>
+                <a:latin typeface="Consolas"/>
+              </a:defRPr>
+            </a:pPr>
+            <a:r>
+              <a:rPr dirty="0"/>
+              <a:t>print(</a:t>
+            </a:r>
+            <a:r>
+              <a:rPr dirty="0" err="1"/>
+              <a:t>f"HMIR</a:t>
+            </a:r>
+            <a:r>
+              <a:rPr dirty="0"/>
+              <a:t> position: {pos}")</a:t>
+            </a:r>
+          </a:p>
+          <a:p>
+            <a:pPr>
+              <a:spcBef>
+                <a:spcPts val="200"/>
+              </a:spcBef>
+              <a:defRPr sz="1600">
+                <a:solidFill>
+                  <a:srgbClr val="ABB2BF"/>
+                </a:solidFill>
+                <a:latin typeface="Consolas"/>
+              </a:defRPr>
+            </a:pPr>
+            <a:endParaRPr dirty="0"/>
+          </a:p>
+          <a:p>
+            <a:pPr>
+              <a:spcBef>
+                <a:spcPts val="200"/>
+              </a:spcBef>
+              <a:defRPr sz="1600">
+                <a:solidFill>
+                  <a:srgbClr val="ABB2BF"/>
+                </a:solidFill>
+                <a:latin typeface="Consolas"/>
+              </a:defRPr>
+            </a:pPr>
+            <a:r>
+              <a:rPr dirty="0"/>
+              <a:t># Read camera centroid</a:t>
+            </a:r>
+          </a:p>
+          <a:p>
+            <a:pPr>
+              <a:spcBef>
+                <a:spcPts val="200"/>
+              </a:spcBef>
+              <a:defRPr sz="1600">
+                <a:solidFill>
+                  <a:srgbClr val="ABB2BF"/>
+                </a:solidFill>
+                <a:latin typeface="Consolas"/>
+              </a:defRPr>
+            </a:pPr>
+            <a:r>
+              <a:rPr dirty="0"/>
+              <a:t>cx = </a:t>
+            </a:r>
+            <a:r>
+              <a:rPr dirty="0" err="1"/>
+              <a:t>ctx.get</a:t>
+            </a:r>
+            <a:r>
+              <a:rPr dirty="0"/>
+              <a:t>('LAB:SIM:CAM01:Stats1:CentroidX_RBV')</a:t>
+            </a:r>
+          </a:p>
+          <a:p>
+            <a:pPr>
+              <a:spcBef>
+                <a:spcPts val="200"/>
+              </a:spcBef>
+              <a:defRPr sz="1600">
+                <a:solidFill>
+                  <a:srgbClr val="ABB2BF"/>
+                </a:solidFill>
+                <a:latin typeface="Consolas"/>
+              </a:defRPr>
+            </a:pPr>
+            <a:r>
+              <a:rPr dirty="0"/>
+              <a:t>cy = </a:t>
+            </a:r>
+            <a:r>
+              <a:rPr dirty="0" err="1"/>
+              <a:t>ctx.get</a:t>
+            </a:r>
+            <a:r>
+              <a:rPr dirty="0"/>
+              <a:t>('LAB:SIM:CAM01:Stats1:CentroidY_RBV')</a:t>
+            </a:r>
+          </a:p>
+          <a:p>
+            <a:pPr>
+              <a:spcBef>
+                <a:spcPts val="200"/>
+              </a:spcBef>
+              <a:defRPr sz="1600">
+                <a:solidFill>
+                  <a:srgbClr val="ABB2BF"/>
+                </a:solidFill>
+                <a:latin typeface="Consolas"/>
+              </a:defRPr>
+            </a:pPr>
+            <a:r>
+              <a:rPr dirty="0"/>
+              <a:t>print(</a:t>
+            </a:r>
+            <a:r>
+              <a:rPr dirty="0" err="1"/>
+              <a:t>f"Beam</a:t>
+            </a:r>
+            <a:r>
+              <a:rPr dirty="0"/>
+              <a:t> centroid: ({cx}, {cy})")</a:t>
             </a:r>
           </a:p>
         </p:txBody>
@@ -7398,7 +7580,7 @@
               </a:defRPr>
             </a:pPr>
             <a:r>
-              <a:t>p4p basics – Read a PV</a:t>
+              <a:t>p4p basics – Write a PV</a:t>
             </a:r>
           </a:p>
         </p:txBody>
@@ -7411,7 +7593,7 @@
         </p:nvSpPr>
         <p:spPr>
           <a:xfrm>
-            <a:off x="548640" y="1188720"/>
+            <a:off x="548640" y="1197791"/>
             <a:ext cx="11064240" cy="5120640"/>
           </a:xfrm>
           <a:prstGeom prst="roundRect">
@@ -7494,7 +7676,7 @@
         <p:spPr>
           <a:xfrm>
             <a:off x="822960" y="1371600"/>
-            <a:ext cx="10515600" cy="4754880"/>
+            <a:ext cx="10515600" cy="3600986"/>
           </a:xfrm>
           <a:prstGeom prst="rect">
             <a:avLst/>
@@ -7502,7 +7684,7 @@
           <a:noFill/>
         </p:spPr>
         <p:txBody>
-          <a:bodyPr wrap="square">
+          <a:bodyPr wrap="square" lIns="91440" tIns="45720" rIns="91440" bIns="45720" anchor="t">
             <a:spAutoFit/>
           </a:bodyPr>
           <a:lstStyle/>
@@ -7534,6 +7716,64 @@
                 <a:latin typeface="Consolas"/>
               </a:defRPr>
             </a:pPr>
+            <a:r>
+              <a:rPr lang="en-US"/>
+              <a:t>import time</a:t>
+            </a:r>
+          </a:p>
+          <a:p>
+            <a:pPr>
+              <a:spcBef>
+                <a:spcPts val="200"/>
+              </a:spcBef>
+              <a:defRPr sz="1600">
+                <a:solidFill>
+                  <a:srgbClr val="ABB2BF"/>
+                </a:solidFill>
+                <a:latin typeface="Consolas"/>
+              </a:defRPr>
+            </a:pPr>
+            <a:endParaRPr lang="en-US"/>
+          </a:p>
+          <a:p>
+            <a:pPr>
+              <a:spcBef>
+                <a:spcPts val="200"/>
+              </a:spcBef>
+              <a:defRPr sz="1600">
+                <a:solidFill>
+                  <a:srgbClr val="ABB2BF"/>
+                </a:solidFill>
+                <a:latin typeface="Consolas"/>
+              </a:defRPr>
+            </a:pPr>
+            <a:r>
+              <a:rPr err="1"/>
+              <a:t>ctx</a:t>
+            </a:r>
+            <a:r>
+              <a:t> = Context('</a:t>
+            </a:r>
+            <a:r>
+              <a:rPr err="1"/>
+              <a:t>pva</a:t>
+            </a:r>
+            <a:r>
+              <a:t>')</a:t>
+            </a:r>
+          </a:p>
+          <a:p>
+            <a:pPr>
+              <a:spcBef>
+                <a:spcPts val="200"/>
+              </a:spcBef>
+              <a:defRPr sz="1600">
+                <a:solidFill>
+                  <a:srgbClr val="ABB2BF"/>
+                </a:solidFill>
+                <a:latin typeface="Consolas"/>
+              </a:defRPr>
+            </a:pPr>
             <a:endParaRPr/>
           </a:p>
           <a:p>
@@ -7549,7 +7789,7 @@
               </a:defRPr>
             </a:pPr>
             <a:r>
-              <a:t># Create a PV Access context (connects to the EPICS network)</a:t>
+              <a:t># Move horizontal mirror to position 10.0</a:t>
             </a:r>
           </a:p>
           <a:p>
@@ -7565,7 +7805,11 @@
               </a:defRPr>
             </a:pPr>
             <a:r>
-              <a:t>ctx = Context('pva')</a:t>
+              <a:rPr err="1"/>
+              <a:t>ctx.put</a:t>
+            </a:r>
+            <a:r>
+              <a:t>('LAB:SIM:HMIR', 10.0)</a:t>
             </a:r>
           </a:p>
           <a:p>
@@ -7580,6 +7824,22 @@
                 <a:latin typeface="Consolas"/>
               </a:defRPr>
             </a:pPr>
+            <a:r>
+              <a:t>print("Motor moving...")</a:t>
+            </a:r>
+          </a:p>
+          <a:p>
+            <a:pPr>
+              <a:spcBef>
+                <a:spcPts val="200"/>
+              </a:spcBef>
+              <a:defRPr sz="1600">
+                <a:solidFill>
+                  <a:srgbClr val="ABB2BF"/>
+                </a:solidFill>
+                <a:latin typeface="Consolas"/>
+              </a:defRPr>
+            </a:pPr>
             <a:endParaRPr/>
           </a:p>
           <a:p>
@@ -7595,7 +7855,7 @@
               </a:defRPr>
             </a:pPr>
             <a:r>
-              <a:t># Read a motor position</a:t>
+              <a:t># Wait and read back</a:t>
             </a:r>
           </a:p>
           <a:p>
@@ -7611,7 +7871,11 @@
               </a:defRPr>
             </a:pPr>
             <a:r>
-              <a:t>pos = ctx.get('LAB:SIM:HMIR')</a:t>
+              <a:rPr err="1"/>
+              <a:t>time.sleep</a:t>
+            </a:r>
+            <a:r>
+              <a:t>(2)</a:t>
             </a:r>
           </a:p>
           <a:p>
@@ -7627,7 +7891,14 @@
               </a:defRPr>
             </a:pPr>
             <a:r>
-              <a:t>print(f"HMIR position: {pos}")</a:t>
+              <a:t>pos = </a:t>
+            </a:r>
+            <a:r>
+              <a:rPr err="1"/>
+              <a:t>ctx.get</a:t>
+            </a:r>
+            <a:r>
+              <a:t>('LAB:SIM:HMIR')</a:t>
             </a:r>
           </a:p>
           <a:p>
@@ -7642,70 +7913,15 @@
                 <a:latin typeface="Consolas"/>
               </a:defRPr>
             </a:pPr>
-            <a:endParaRPr/>
-          </a:p>
-          <a:p>
-            <a:pPr>
-              <a:spcBef>
-                <a:spcPts val="200"/>
-              </a:spcBef>
-              <a:defRPr sz="1600">
-                <a:solidFill>
-                  <a:srgbClr val="ABB2BF"/>
-                </a:solidFill>
-                <a:latin typeface="Consolas"/>
-              </a:defRPr>
-            </a:pPr>
-            <a:r>
-              <a:t># Read camera centroid</a:t>
-            </a:r>
-          </a:p>
-          <a:p>
-            <a:pPr>
-              <a:spcBef>
-                <a:spcPts val="200"/>
-              </a:spcBef>
-              <a:defRPr sz="1600">
-                <a:solidFill>
-                  <a:srgbClr val="ABB2BF"/>
-                </a:solidFill>
-                <a:latin typeface="Consolas"/>
-              </a:defRPr>
-            </a:pPr>
-            <a:r>
-              <a:t>cx = ctx.get('LAB:SIM:CAM01:Stats1:CentroidX_RBV')</a:t>
-            </a:r>
-          </a:p>
-          <a:p>
-            <a:pPr>
-              <a:spcBef>
-                <a:spcPts val="200"/>
-              </a:spcBef>
-              <a:defRPr sz="1600">
-                <a:solidFill>
-                  <a:srgbClr val="ABB2BF"/>
-                </a:solidFill>
-                <a:latin typeface="Consolas"/>
-              </a:defRPr>
-            </a:pPr>
-            <a:r>
-              <a:t>cy = ctx.get('LAB:SIM:CAM01:Stats1:CentroidY_RBV')</a:t>
-            </a:r>
-          </a:p>
-          <a:p>
-            <a:pPr>
-              <a:spcBef>
-                <a:spcPts val="200"/>
-              </a:spcBef>
-              <a:defRPr sz="1600">
-                <a:solidFill>
-                  <a:srgbClr val="ABB2BF"/>
-                </a:solidFill>
-                <a:latin typeface="Consolas"/>
-              </a:defRPr>
-            </a:pPr>
-            <a:r>
-              <a:t>print(f"Beam centroid: ({cx}, {cy})")</a:t>
+            <a:r>
+              <a:t>print(</a:t>
+            </a:r>
+            <a:r>
+              <a:rPr err="1"/>
+              <a:t>f"HMIR</a:t>
+            </a:r>
+            <a:r>
+              <a:t> arrived at: {pos}")</a:t>
             </a:r>
           </a:p>
         </p:txBody>
@@ -7774,7 +7990,7 @@
               </a:defRPr>
             </a:pPr>
             <a:r>
-              <a:t>p4p basics – Write a PV</a:t>
+              <a:t>p4p basics – Monitor (live updates)</a:t>
             </a:r>
           </a:p>
         </p:txBody>
@@ -7870,7 +8086,7 @@
         <p:spPr>
           <a:xfrm>
             <a:off x="822960" y="1371600"/>
-            <a:ext cx="10515600" cy="4754880"/>
+            <a:ext cx="10515600" cy="3872855"/>
           </a:xfrm>
           <a:prstGeom prst="rect">
             <a:avLst/>
@@ -7878,7 +8094,7 @@
           <a:noFill/>
         </p:spPr>
         <p:txBody>
-          <a:bodyPr wrap="square">
+          <a:bodyPr wrap="square" lIns="91440" tIns="45720" rIns="91440" bIns="45720" anchor="t">
             <a:spAutoFit/>
           </a:bodyPr>
           <a:lstStyle/>
@@ -7911,7 +8127,7 @@
               </a:defRPr>
             </a:pPr>
             <a:r>
-              <a:t>ctx = Context('pva')</a:t>
+              <a:t>import time</a:t>
             </a:r>
           </a:p>
           <a:p>
@@ -7941,7 +8157,18 @@
               </a:defRPr>
             </a:pPr>
             <a:r>
-              <a:t># Move horizontal mirror to position 10.0</a:t>
+              <a:rPr err="1"/>
+              <a:t>ctx</a:t>
+            </a:r>
+            <a:r>
+              <a:t> = Context('</a:t>
+            </a:r>
+            <a:r>
+              <a:rPr err="1"/>
+              <a:t>pva</a:t>
+            </a:r>
+            <a:r>
+              <a:t>')</a:t>
             </a:r>
           </a:p>
           <a:p>
@@ -7956,9 +8183,7 @@
                 <a:latin typeface="Consolas"/>
               </a:defRPr>
             </a:pPr>
-            <a:r>
-              <a:t>ctx.put('LAB:SIM:HMIR', 10.0)</a:t>
-            </a:r>
+            <a:endParaRPr/>
           </a:p>
           <a:p>
             <a:pPr>
@@ -7973,7 +8198,14 @@
               </a:defRPr>
             </a:pPr>
             <a:r>
-              <a:t>print("Motor moving...")</a:t>
+              <a:t>def </a:t>
+            </a:r>
+            <a:r>
+              <a:rPr err="1"/>
+              <a:t>on_value_change</a:t>
+            </a:r>
+            <a:r>
+              <a:t>(value):</a:t>
             </a:r>
           </a:p>
           <a:p>
@@ -7988,6 +8220,36 @@
                 <a:latin typeface="Consolas"/>
               </a:defRPr>
             </a:pPr>
+            <a:r>
+              <a:t>    </a:t>
+            </a:r>
+            <a:r>
+              <a:rPr lang="en-US"/>
+              <a:t> </a:t>
+            </a:r>
+            <a:r>
+              <a:t>print(</a:t>
+            </a:r>
+            <a:r>
+              <a:rPr err="1"/>
+              <a:t>f"HMIR</a:t>
+            </a:r>
+            <a:r>
+              <a:t> moved to: {value}")</a:t>
+            </a:r>
+          </a:p>
+          <a:p>
+            <a:pPr>
+              <a:spcBef>
+                <a:spcPts val="200"/>
+              </a:spcBef>
+              <a:defRPr sz="1600">
+                <a:solidFill>
+                  <a:srgbClr val="ABB2BF"/>
+                </a:solidFill>
+                <a:latin typeface="Consolas"/>
+              </a:defRPr>
+            </a:pPr>
             <a:endParaRPr/>
           </a:p>
           <a:p>
@@ -8003,7 +8265,7 @@
               </a:defRPr>
             </a:pPr>
             <a:r>
-              <a:t># Wait and read back</a:t>
+              <a:t># Subscribe to live updates</a:t>
             </a:r>
           </a:p>
           <a:p>
@@ -8019,7 +8281,21 @@
               </a:defRPr>
             </a:pPr>
             <a:r>
-              <a:t>import time</a:t>
+              <a:t>sub = </a:t>
+            </a:r>
+            <a:r>
+              <a:rPr err="1"/>
+              <a:t>ctx.monitor</a:t>
+            </a:r>
+            <a:r>
+              <a:t>('LAB:SIM:HMIR', </a:t>
+            </a:r>
+            <a:r>
+              <a:rPr err="1"/>
+              <a:t>on_value_change</a:t>
+            </a:r>
+            <a:r>
+              <a:t>)</a:t>
             </a:r>
           </a:p>
           <a:p>
@@ -8034,9 +8310,7 @@
                 <a:latin typeface="Consolas"/>
               </a:defRPr>
             </a:pPr>
-            <a:r>
-              <a:t>time.sleep(2)</a:t>
-            </a:r>
+            <a:endParaRPr/>
           </a:p>
           <a:p>
             <a:pPr>
@@ -8051,7 +8325,7 @@
               </a:defRPr>
             </a:pPr>
             <a:r>
-              <a:t>pos = ctx.get('LAB:SIM:HMIR')</a:t>
+              <a:t># Move the motor from Phoebus and watch the prints!</a:t>
             </a:r>
           </a:p>
           <a:p>
@@ -8067,7 +8341,31 @@
               </a:defRPr>
             </a:pPr>
             <a:r>
-              <a:t>print(f"HMIR arrived at: {pos}")</a:t>
+              <a:rPr err="1"/>
+              <a:t>time.sleep</a:t>
+            </a:r>
+            <a:r>
+              <a:t>(30)</a:t>
+            </a:r>
+          </a:p>
+          <a:p>
+            <a:pPr>
+              <a:spcBef>
+                <a:spcPts val="200"/>
+              </a:spcBef>
+              <a:defRPr sz="1600">
+                <a:solidFill>
+                  <a:srgbClr val="ABB2BF"/>
+                </a:solidFill>
+                <a:latin typeface="Consolas"/>
+              </a:defRPr>
+            </a:pPr>
+            <a:r>
+              <a:rPr err="1"/>
+              <a:t>sub.close</a:t>
+            </a:r>
+            <a:r>
+              <a:t>()</a:t>
             </a:r>
           </a:p>
         </p:txBody>
@@ -8114,7 +8412,7 @@
         <p:spPr>
           <a:xfrm>
             <a:off x="548640" y="274320"/>
-            <a:ext cx="10972800" cy="731520"/>
+            <a:ext cx="10972800" cy="822960"/>
           </a:xfrm>
           <a:prstGeom prst="rect">
             <a:avLst/>
@@ -8128,7 +8426,7 @@
           <a:lstStyle/>
           <a:p>
             <a:pPr algn="l">
-              <a:defRPr sz="3200" b="1">
+              <a:defRPr sz="3400" b="1">
                 <a:solidFill>
                   <a:srgbClr val="00B4D8"/>
                 </a:solidFill>
@@ -8136,32 +8434,30 @@
               </a:defRPr>
             </a:pPr>
             <a:r>
-              <a:t>p4p basics – Monitor (live updates)</a:t>
-            </a:r>
-          </a:p>
-        </p:txBody>
-      </p:sp>
-      <p:sp>
-        <p:nvSpPr>
-          <p:cNvPr id="3" name="Rounded Rectangle 2"/>
+              <a:t>Exercise 3a – Your first PV script</a:t>
+            </a:r>
+          </a:p>
+        </p:txBody>
+      </p:sp>
+      <p:sp>
+        <p:nvSpPr>
+          <p:cNvPr id="3" name="Rectangle 2"/>
           <p:cNvSpPr/>
           <p:nvPr/>
         </p:nvSpPr>
         <p:spPr>
           <a:xfrm>
-            <a:off x="548640" y="1188720"/>
-            <a:ext cx="11064240" cy="5120640"/>
-          </a:xfrm>
-          <a:prstGeom prst="roundRect">
+            <a:off x="548640" y="1051560"/>
+            <a:ext cx="4572000" cy="36576"/>
+          </a:xfrm>
+          <a:prstGeom prst="rect">
             <a:avLst/>
           </a:prstGeom>
           <a:solidFill>
-            <a:srgbClr val="0D1117"/>
+            <a:srgbClr val="48CAE4"/>
           </a:solidFill>
-          <a:ln w="12700">
-            <a:solidFill>
-              <a:srgbClr val="334455"/>
-            </a:solidFill>
+          <a:ln>
+            <a:noFill/>
           </a:ln>
         </p:spPr>
         <p:style>
@@ -8195,8 +8491,8 @@
         </p:nvSpPr>
         <p:spPr>
           <a:xfrm>
-            <a:off x="9601200" y="914400"/>
-            <a:ext cx="1828800" cy="320040"/>
+            <a:off x="731520" y="1371600"/>
+            <a:ext cx="10515600" cy="5029200"/>
           </a:xfrm>
           <a:prstGeom prst="rect">
             <a:avLst/>
@@ -8209,255 +8505,115 @@
           </a:bodyPr>
           <a:lstStyle/>
           <a:p>
-            <a:pPr algn="r">
-              <a:defRPr sz="1300" b="0">
-                <a:solidFill>
-                  <a:srgbClr val="48CAE4"/>
-                </a:solidFill>
-                <a:latin typeface="Calibri"/>
-              </a:defRPr>
-            </a:pPr>
-            <a:r>
-              <a:t>python</a:t>
-            </a:r>
-          </a:p>
-        </p:txBody>
-      </p:sp>
-      <p:sp>
-        <p:nvSpPr>
-          <p:cNvPr id="5" name="TextBox 4"/>
-          <p:cNvSpPr txBox="1"/>
-          <p:nvPr/>
-        </p:nvSpPr>
-        <p:spPr>
-          <a:xfrm>
-            <a:off x="822960" y="1371600"/>
-            <a:ext cx="10515600" cy="4754880"/>
-          </a:xfrm>
-          <a:prstGeom prst="rect">
-            <a:avLst/>
-          </a:prstGeom>
-          <a:noFill/>
-        </p:spPr>
-        <p:txBody>
-          <a:bodyPr wrap="square">
-            <a:spAutoFit/>
-          </a:bodyPr>
-          <a:lstStyle/>
-          <a:p>
-            <a:pPr>
-              <a:spcBef>
-                <a:spcPts val="200"/>
-              </a:spcBef>
-              <a:defRPr sz="1600">
-                <a:solidFill>
-                  <a:srgbClr val="ABB2BF"/>
-                </a:solidFill>
-                <a:latin typeface="Consolas"/>
-              </a:defRPr>
-            </a:pPr>
-            <a:r>
-              <a:t>from p4p.client.thread import Context</a:t>
-            </a:r>
-          </a:p>
-          <a:p>
-            <a:pPr>
-              <a:spcBef>
-                <a:spcPts val="200"/>
-              </a:spcBef>
-              <a:defRPr sz="1600">
-                <a:solidFill>
-                  <a:srgbClr val="ABB2BF"/>
-                </a:solidFill>
-                <a:latin typeface="Consolas"/>
-              </a:defRPr>
-            </a:pPr>
-            <a:r>
-              <a:t>import time</a:t>
-            </a:r>
-          </a:p>
-          <a:p>
-            <a:pPr>
-              <a:spcBef>
-                <a:spcPts val="200"/>
-              </a:spcBef>
-              <a:defRPr sz="1600">
-                <a:solidFill>
-                  <a:srgbClr val="ABB2BF"/>
-                </a:solidFill>
-                <a:latin typeface="Consolas"/>
-              </a:defRPr>
-            </a:pPr>
-            <a:endParaRPr/>
-          </a:p>
-          <a:p>
-            <a:pPr>
-              <a:spcBef>
-                <a:spcPts val="200"/>
-              </a:spcBef>
-              <a:defRPr sz="1600">
-                <a:solidFill>
-                  <a:srgbClr val="ABB2BF"/>
-                </a:solidFill>
-                <a:latin typeface="Consolas"/>
-              </a:defRPr>
-            </a:pPr>
-            <a:r>
-              <a:t>ctx = Context('pva')</a:t>
-            </a:r>
-          </a:p>
-          <a:p>
-            <a:pPr>
-              <a:spcBef>
-                <a:spcPts val="200"/>
-              </a:spcBef>
-              <a:defRPr sz="1600">
-                <a:solidFill>
-                  <a:srgbClr val="ABB2BF"/>
-                </a:solidFill>
-                <a:latin typeface="Consolas"/>
-              </a:defRPr>
-            </a:pPr>
-            <a:endParaRPr/>
-          </a:p>
-          <a:p>
-            <a:pPr>
-              <a:spcBef>
-                <a:spcPts val="200"/>
-              </a:spcBef>
-              <a:defRPr sz="1600">
-                <a:solidFill>
-                  <a:srgbClr val="ABB2BF"/>
-                </a:solidFill>
-                <a:latin typeface="Consolas"/>
-              </a:defRPr>
-            </a:pPr>
-            <a:r>
-              <a:t>def on_value_change(value):</a:t>
-            </a:r>
-          </a:p>
-          <a:p>
-            <a:pPr>
-              <a:spcBef>
-                <a:spcPts val="200"/>
-              </a:spcBef>
-              <a:defRPr sz="1600">
-                <a:solidFill>
-                  <a:srgbClr val="ABB2BF"/>
-                </a:solidFill>
-                <a:latin typeface="Consolas"/>
-              </a:defRPr>
-            </a:pPr>
-            <a:r>
-              <a:t>    print(f"HMIR moved to: {value}")</a:t>
-            </a:r>
-          </a:p>
-          <a:p>
-            <a:pPr>
-              <a:spcBef>
-                <a:spcPts val="200"/>
-              </a:spcBef>
-              <a:defRPr sz="1600">
-                <a:solidFill>
-                  <a:srgbClr val="ABB2BF"/>
-                </a:solidFill>
-                <a:latin typeface="Consolas"/>
-              </a:defRPr>
-            </a:pPr>
-            <a:endParaRPr/>
-          </a:p>
-          <a:p>
-            <a:pPr>
-              <a:spcBef>
-                <a:spcPts val="200"/>
-              </a:spcBef>
-              <a:defRPr sz="1600">
-                <a:solidFill>
-                  <a:srgbClr val="ABB2BF"/>
-                </a:solidFill>
-                <a:latin typeface="Consolas"/>
-              </a:defRPr>
-            </a:pPr>
-            <a:r>
-              <a:t># Subscribe to live updates</a:t>
-            </a:r>
-          </a:p>
-          <a:p>
-            <a:pPr>
-              <a:spcBef>
-                <a:spcPts val="200"/>
-              </a:spcBef>
-              <a:defRPr sz="1600">
-                <a:solidFill>
-                  <a:srgbClr val="ABB2BF"/>
-                </a:solidFill>
-                <a:latin typeface="Consolas"/>
-              </a:defRPr>
-            </a:pPr>
-            <a:r>
-              <a:t>sub = ctx.monitor('LAB:SIM:HMIR', on_value_change)</a:t>
-            </a:r>
-          </a:p>
-          <a:p>
-            <a:pPr>
-              <a:spcBef>
-                <a:spcPts val="200"/>
-              </a:spcBef>
-              <a:defRPr sz="1600">
-                <a:solidFill>
-                  <a:srgbClr val="ABB2BF"/>
-                </a:solidFill>
-                <a:latin typeface="Consolas"/>
-              </a:defRPr>
-            </a:pPr>
-            <a:endParaRPr/>
-          </a:p>
-          <a:p>
-            <a:pPr>
-              <a:spcBef>
-                <a:spcPts val="200"/>
-              </a:spcBef>
-              <a:defRPr sz="1600">
-                <a:solidFill>
-                  <a:srgbClr val="ABB2BF"/>
-                </a:solidFill>
-                <a:latin typeface="Consolas"/>
-              </a:defRPr>
-            </a:pPr>
-            <a:r>
-              <a:t># Move the motor from Phoebus and watch the prints!</a:t>
-            </a:r>
-          </a:p>
-          <a:p>
-            <a:pPr>
-              <a:spcBef>
-                <a:spcPts val="200"/>
-              </a:spcBef>
-              <a:defRPr sz="1600">
-                <a:solidFill>
-                  <a:srgbClr val="ABB2BF"/>
-                </a:solidFill>
-                <a:latin typeface="Consolas"/>
-              </a:defRPr>
-            </a:pPr>
-            <a:r>
-              <a:t>time.sleep(30)</a:t>
-            </a:r>
-          </a:p>
-          <a:p>
-            <a:pPr>
-              <a:spcBef>
-                <a:spcPts val="200"/>
-              </a:spcBef>
-              <a:defRPr sz="1600">
-                <a:solidFill>
-                  <a:srgbClr val="ABB2BF"/>
-                </a:solidFill>
-                <a:latin typeface="Consolas"/>
-              </a:defRPr>
-            </a:pPr>
-            <a:r>
-              <a:t>sub.close()</a:t>
+            <a:pPr>
+              <a:spcBef>
+                <a:spcPts val="800"/>
+              </a:spcBef>
+              <a:defRPr sz="2200">
+                <a:solidFill>
+                  <a:srgbClr val="FFFFFF"/>
+                </a:solidFill>
+                <a:latin typeface="Calibri"/>
+              </a:defRPr>
+            </a:pPr>
+            <a:r>
+              <a:t>▸  In Jupyter, create a new notebook called 'epics_basics'</a:t>
+            </a:r>
+          </a:p>
+          <a:p>
+            <a:pPr>
+              <a:spcBef>
+                <a:spcPts val="800"/>
+              </a:spcBef>
+              <a:defRPr sz="2200">
+                <a:solidFill>
+                  <a:srgbClr val="FFFFFF"/>
+                </a:solidFill>
+                <a:latin typeface="Calibri"/>
+              </a:defRPr>
+            </a:pPr>
+            <a:r>
+              <a:t>▸  Read both motor positions: LAB:SIM:HMIR and LAB:SIM:VMIR</a:t>
+            </a:r>
+          </a:p>
+          <a:p>
+            <a:pPr>
+              <a:spcBef>
+                <a:spcPts val="800"/>
+              </a:spcBef>
+              <a:defRPr sz="2200">
+                <a:solidFill>
+                  <a:srgbClr val="FFFFFF"/>
+                </a:solidFill>
+                <a:latin typeface="Calibri"/>
+              </a:defRPr>
+            </a:pPr>
+            <a:r>
+              <a:t>▸  Read the camera centroid: Stats1:CentroidX_RBV, CentroidY_RBV</a:t>
+            </a:r>
+          </a:p>
+          <a:p>
+            <a:pPr>
+              <a:spcBef>
+                <a:spcPts val="800"/>
+              </a:spcBef>
+              <a:defRPr sz="2200">
+                <a:solidFill>
+                  <a:srgbClr val="FFFFFF"/>
+                </a:solidFill>
+                <a:latin typeface="Calibri"/>
+              </a:defRPr>
+            </a:pPr>
+            <a:r>
+              <a:t>▸  Move HMIR to position 5.0 → wait 2s → read back</a:t>
+            </a:r>
+          </a:p>
+          <a:p>
+            <a:pPr>
+              <a:spcBef>
+                <a:spcPts val="800"/>
+              </a:spcBef>
+              <a:defRPr sz="2200">
+                <a:solidFill>
+                  <a:srgbClr val="FFFFFF"/>
+                </a:solidFill>
+                <a:latin typeface="Calibri"/>
+              </a:defRPr>
+            </a:pPr>
+            <a:r>
+              <a:t>▸  Move VMIR to position -2.0 → wait 2s → read back</a:t>
+            </a:r>
+          </a:p>
+          <a:p>
+            <a:pPr>
+              <a:spcBef>
+                <a:spcPts val="800"/>
+              </a:spcBef>
+              <a:defRPr sz="2200">
+                <a:solidFill>
+                  <a:srgbClr val="FFFFFF"/>
+                </a:solidFill>
+                <a:latin typeface="Calibri"/>
+              </a:defRPr>
+            </a:pPr>
+            <a:r>
+              <a:t>▸  Re-read the centroid – did it change?</a:t>
+            </a:r>
+          </a:p>
+          <a:p>
+            <a:pPr>
+              <a:spcBef>
+                <a:spcPts val="800"/>
+              </a:spcBef>
+              <a:defRPr sz="2200">
+                <a:solidFill>
+                  <a:srgbClr val="FFFFFF"/>
+                </a:solidFill>
+                <a:latin typeface="Calibri"/>
+              </a:defRPr>
+            </a:pPr>
+            <a:r>
+              <a:t>▸  Tip: the simtwin maps motor → beam position with some geometry</a:t>
             </a:r>
           </a:p>
         </p:txBody>
@@ -8504,7 +8660,7 @@
         <p:spPr>
           <a:xfrm>
             <a:off x="548640" y="274320"/>
-            <a:ext cx="10972800" cy="822960"/>
+            <a:ext cx="10972800" cy="731520"/>
           </a:xfrm>
           <a:prstGeom prst="rect">
             <a:avLst/>
@@ -8518,7 +8674,7 @@
           <a:lstStyle/>
           <a:p>
             <a:pPr algn="l">
-              <a:defRPr sz="3400" b="1">
+              <a:defRPr sz="3200" b="1">
                 <a:solidFill>
                   <a:srgbClr val="00B4D8"/>
                 </a:solidFill>
@@ -8526,30 +8682,32 @@
               </a:defRPr>
             </a:pPr>
             <a:r>
-              <a:t>Exercise 3a – Your first PV script</a:t>
-            </a:r>
-          </a:p>
-        </p:txBody>
-      </p:sp>
-      <p:sp>
-        <p:nvSpPr>
-          <p:cNvPr id="3" name="Rectangle 2"/>
+              <a:t>Exercise 3b – Read the overlay target</a:t>
+            </a:r>
+          </a:p>
+        </p:txBody>
+      </p:sp>
+      <p:sp>
+        <p:nvSpPr>
+          <p:cNvPr id="3" name="Rounded Rectangle 2"/>
           <p:cNvSpPr/>
           <p:nvPr/>
         </p:nvSpPr>
         <p:spPr>
           <a:xfrm>
-            <a:off x="548640" y="1051560"/>
-            <a:ext cx="4572000" cy="36576"/>
-          </a:xfrm>
-          <a:prstGeom prst="rect">
+            <a:off x="548640" y="1188719"/>
+            <a:ext cx="11064240" cy="5573587"/>
+          </a:xfrm>
+          <a:prstGeom prst="roundRect">
             <a:avLst/>
           </a:prstGeom>
           <a:solidFill>
-            <a:srgbClr val="48CAE4"/>
+            <a:srgbClr val="0D1117"/>
           </a:solidFill>
-          <a:ln>
-            <a:noFill/>
+          <a:ln w="12700">
+            <a:solidFill>
+              <a:srgbClr val="334455"/>
+            </a:solidFill>
           </a:ln>
         </p:spPr>
         <p:style>
@@ -8583,8 +8741,8 @@
         </p:nvSpPr>
         <p:spPr>
           <a:xfrm>
-            <a:off x="731520" y="1371600"/>
-            <a:ext cx="10515600" cy="5029200"/>
+            <a:off x="9601200" y="914400"/>
+            <a:ext cx="1828800" cy="320040"/>
           </a:xfrm>
           <a:prstGeom prst="rect">
             <a:avLst/>
@@ -8597,115 +8755,532 @@
           </a:bodyPr>
           <a:lstStyle/>
           <a:p>
-            <a:pPr>
-              <a:spcBef>
-                <a:spcPts val="800"/>
-              </a:spcBef>
-              <a:defRPr sz="2200">
-                <a:solidFill>
-                  <a:srgbClr val="FFFFFF"/>
-                </a:solidFill>
-                <a:latin typeface="Calibri"/>
-              </a:defRPr>
-            </a:pPr>
-            <a:r>
-              <a:t>▸  In Jupyter, create a new notebook called 'epics_basics'</a:t>
-            </a:r>
-          </a:p>
-          <a:p>
-            <a:pPr>
-              <a:spcBef>
-                <a:spcPts val="800"/>
-              </a:spcBef>
-              <a:defRPr sz="2200">
-                <a:solidFill>
-                  <a:srgbClr val="FFFFFF"/>
-                </a:solidFill>
-                <a:latin typeface="Calibri"/>
-              </a:defRPr>
-            </a:pPr>
-            <a:r>
-              <a:t>▸  Read both motor positions: LAB:SIM:HMIR and LAB:SIM:VMIR</a:t>
-            </a:r>
-          </a:p>
-          <a:p>
-            <a:pPr>
-              <a:spcBef>
-                <a:spcPts val="800"/>
-              </a:spcBef>
-              <a:defRPr sz="2200">
-                <a:solidFill>
-                  <a:srgbClr val="FFFFFF"/>
-                </a:solidFill>
-                <a:latin typeface="Calibri"/>
-              </a:defRPr>
-            </a:pPr>
-            <a:r>
-              <a:t>▸  Read the camera centroid: Stats1:CentroidX_RBV, CentroidY_RBV</a:t>
-            </a:r>
-          </a:p>
-          <a:p>
-            <a:pPr>
-              <a:spcBef>
-                <a:spcPts val="800"/>
-              </a:spcBef>
-              <a:defRPr sz="2200">
-                <a:solidFill>
-                  <a:srgbClr val="FFFFFF"/>
-                </a:solidFill>
-                <a:latin typeface="Calibri"/>
-              </a:defRPr>
-            </a:pPr>
-            <a:r>
-              <a:t>▸  Move HMIR to position 5.0 → wait 2s → read back</a:t>
-            </a:r>
-          </a:p>
-          <a:p>
-            <a:pPr>
-              <a:spcBef>
-                <a:spcPts val="800"/>
-              </a:spcBef>
-              <a:defRPr sz="2200">
-                <a:solidFill>
-                  <a:srgbClr val="FFFFFF"/>
-                </a:solidFill>
-                <a:latin typeface="Calibri"/>
-              </a:defRPr>
-            </a:pPr>
-            <a:r>
-              <a:t>▸  Move VMIR to position -2.0 → wait 2s → read back</a:t>
-            </a:r>
-          </a:p>
-          <a:p>
-            <a:pPr>
-              <a:spcBef>
-                <a:spcPts val="800"/>
-              </a:spcBef>
-              <a:defRPr sz="2200">
-                <a:solidFill>
-                  <a:srgbClr val="FFFFFF"/>
-                </a:solidFill>
-                <a:latin typeface="Calibri"/>
-              </a:defRPr>
-            </a:pPr>
-            <a:r>
-              <a:t>▸  Re-read the centroid – did it change?</a:t>
-            </a:r>
-          </a:p>
-          <a:p>
-            <a:pPr>
-              <a:spcBef>
-                <a:spcPts val="800"/>
-              </a:spcBef>
-              <a:defRPr sz="2200">
-                <a:solidFill>
-                  <a:srgbClr val="FFFFFF"/>
-                </a:solidFill>
-                <a:latin typeface="Calibri"/>
-              </a:defRPr>
-            </a:pPr>
-            <a:r>
-              <a:t>▸  Tip: the simtwin maps motor → beam position with some geometry</a:t>
+            <a:pPr algn="r">
+              <a:defRPr sz="1300" b="0">
+                <a:solidFill>
+                  <a:srgbClr val="48CAE4"/>
+                </a:solidFill>
+                <a:latin typeface="Calibri"/>
+              </a:defRPr>
+            </a:pPr>
+            <a:r>
+              <a:t>python</a:t>
+            </a:r>
+          </a:p>
+        </p:txBody>
+      </p:sp>
+      <p:sp>
+        <p:nvSpPr>
+          <p:cNvPr id="5" name="TextBox 4"/>
+          <p:cNvSpPr txBox="1"/>
+          <p:nvPr/>
+        </p:nvSpPr>
+        <p:spPr>
+          <a:xfrm>
+            <a:off x="822960" y="1371600"/>
+            <a:ext cx="10515600" cy="5129609"/>
+          </a:xfrm>
+          <a:prstGeom prst="rect">
+            <a:avLst/>
+          </a:prstGeom>
+          <a:noFill/>
+        </p:spPr>
+        <p:txBody>
+          <a:bodyPr wrap="square">
+            <a:spAutoFit/>
+          </a:bodyPr>
+          <a:lstStyle/>
+          <a:p>
+            <a:pPr>
+              <a:spcBef>
+                <a:spcPts val="200"/>
+              </a:spcBef>
+              <a:defRPr sz="1600">
+                <a:solidFill>
+                  <a:srgbClr val="ABB2BF"/>
+                </a:solidFill>
+                <a:latin typeface="Consolas"/>
+              </a:defRPr>
+            </a:pPr>
+            <a:r>
+              <a:rPr sz="1400" dirty="0"/>
+              <a:t>from p4p.client.thread import Context</a:t>
+            </a:r>
+          </a:p>
+          <a:p>
+            <a:pPr>
+              <a:spcBef>
+                <a:spcPts val="200"/>
+              </a:spcBef>
+              <a:defRPr sz="1600">
+                <a:solidFill>
+                  <a:srgbClr val="ABB2BF"/>
+                </a:solidFill>
+                <a:latin typeface="Consolas"/>
+              </a:defRPr>
+            </a:pPr>
+            <a:r>
+              <a:rPr sz="1400" dirty="0" err="1"/>
+              <a:t>ctx</a:t>
+            </a:r>
+            <a:r>
+              <a:rPr sz="1400" dirty="0"/>
+              <a:t> = Context('</a:t>
+            </a:r>
+            <a:r>
+              <a:rPr sz="1400" dirty="0" err="1"/>
+              <a:t>pva</a:t>
+            </a:r>
+            <a:r>
+              <a:rPr sz="1400" dirty="0"/>
+              <a:t>')</a:t>
+            </a:r>
+          </a:p>
+          <a:p>
+            <a:pPr>
+              <a:spcBef>
+                <a:spcPts val="200"/>
+              </a:spcBef>
+              <a:defRPr sz="1600">
+                <a:solidFill>
+                  <a:srgbClr val="ABB2BF"/>
+                </a:solidFill>
+                <a:latin typeface="Consolas"/>
+              </a:defRPr>
+            </a:pPr>
+            <a:endParaRPr sz="1400" dirty="0"/>
+          </a:p>
+          <a:p>
+            <a:pPr>
+              <a:spcBef>
+                <a:spcPts val="200"/>
+              </a:spcBef>
+              <a:defRPr sz="1600">
+                <a:solidFill>
+                  <a:srgbClr val="ABB2BF"/>
+                </a:solidFill>
+                <a:latin typeface="Consolas"/>
+              </a:defRPr>
+            </a:pPr>
+            <a:r>
+              <a:rPr sz="1400" dirty="0"/>
+              <a:t>CAM = 'LAB:SIM:CAM01'</a:t>
+            </a:r>
+          </a:p>
+          <a:p>
+            <a:pPr>
+              <a:spcBef>
+                <a:spcPts val="200"/>
+              </a:spcBef>
+              <a:defRPr sz="1600">
+                <a:solidFill>
+                  <a:srgbClr val="ABB2BF"/>
+                </a:solidFill>
+                <a:latin typeface="Consolas"/>
+              </a:defRPr>
+            </a:pPr>
+            <a:endParaRPr sz="1400" dirty="0"/>
+          </a:p>
+          <a:p>
+            <a:pPr>
+              <a:spcBef>
+                <a:spcPts val="200"/>
+              </a:spcBef>
+              <a:defRPr sz="1600">
+                <a:solidFill>
+                  <a:srgbClr val="ABB2BF"/>
+                </a:solidFill>
+                <a:latin typeface="Consolas"/>
+              </a:defRPr>
+            </a:pPr>
+            <a:r>
+              <a:rPr sz="1400" dirty="0"/>
+              <a:t># Read overlay 1 rectangle</a:t>
+            </a:r>
+          </a:p>
+          <a:p>
+            <a:pPr>
+              <a:spcBef>
+                <a:spcPts val="200"/>
+              </a:spcBef>
+              <a:defRPr sz="1600">
+                <a:solidFill>
+                  <a:srgbClr val="ABB2BF"/>
+                </a:solidFill>
+                <a:latin typeface="Consolas"/>
+              </a:defRPr>
+            </a:pPr>
+            <a:r>
+              <a:rPr sz="1400" dirty="0"/>
+              <a:t>ox = </a:t>
+            </a:r>
+            <a:r>
+              <a:rPr sz="1400" dirty="0" err="1"/>
+              <a:t>ctx.get</a:t>
+            </a:r>
+            <a:r>
+              <a:rPr sz="1400" dirty="0"/>
+              <a:t>(f'{CAM}:Overlay1:1:PositionX_RBV')</a:t>
+            </a:r>
+          </a:p>
+          <a:p>
+            <a:pPr>
+              <a:spcBef>
+                <a:spcPts val="200"/>
+              </a:spcBef>
+              <a:defRPr sz="1600">
+                <a:solidFill>
+                  <a:srgbClr val="ABB2BF"/>
+                </a:solidFill>
+                <a:latin typeface="Consolas"/>
+              </a:defRPr>
+            </a:pPr>
+            <a:r>
+              <a:rPr sz="1400" dirty="0"/>
+              <a:t>oy = </a:t>
+            </a:r>
+            <a:r>
+              <a:rPr sz="1400" dirty="0" err="1"/>
+              <a:t>ctx.get</a:t>
+            </a:r>
+            <a:r>
+              <a:rPr sz="1400" dirty="0"/>
+              <a:t>(f'{CAM}:Overlay1:1:PositionY_RBV')</a:t>
+            </a:r>
+          </a:p>
+          <a:p>
+            <a:pPr>
+              <a:spcBef>
+                <a:spcPts val="200"/>
+              </a:spcBef>
+              <a:defRPr sz="1600">
+                <a:solidFill>
+                  <a:srgbClr val="ABB2BF"/>
+                </a:solidFill>
+                <a:latin typeface="Consolas"/>
+              </a:defRPr>
+            </a:pPr>
+            <a:r>
+              <a:rPr sz="1400" dirty="0" err="1"/>
+              <a:t>sx</a:t>
+            </a:r>
+            <a:r>
+              <a:rPr sz="1400" dirty="0"/>
+              <a:t> = </a:t>
+            </a:r>
+            <a:r>
+              <a:rPr sz="1400" dirty="0" err="1"/>
+              <a:t>ctx.get</a:t>
+            </a:r>
+            <a:r>
+              <a:rPr sz="1400" dirty="0"/>
+              <a:t>(f'{CAM}:Overlay1:1:SizeX_RBV')</a:t>
+            </a:r>
+          </a:p>
+          <a:p>
+            <a:pPr>
+              <a:spcBef>
+                <a:spcPts val="200"/>
+              </a:spcBef>
+              <a:defRPr sz="1600">
+                <a:solidFill>
+                  <a:srgbClr val="ABB2BF"/>
+                </a:solidFill>
+                <a:latin typeface="Consolas"/>
+              </a:defRPr>
+            </a:pPr>
+            <a:r>
+              <a:rPr sz="1400" dirty="0" err="1"/>
+              <a:t>sy</a:t>
+            </a:r>
+            <a:r>
+              <a:rPr sz="1400" dirty="0"/>
+              <a:t> = </a:t>
+            </a:r>
+            <a:r>
+              <a:rPr sz="1400" dirty="0" err="1"/>
+              <a:t>ctx.get</a:t>
+            </a:r>
+            <a:r>
+              <a:rPr sz="1400" dirty="0"/>
+              <a:t>(f'{CAM}:Overlay1:1:SizeY_RBV')</a:t>
+            </a:r>
+          </a:p>
+          <a:p>
+            <a:pPr>
+              <a:spcBef>
+                <a:spcPts val="200"/>
+              </a:spcBef>
+              <a:defRPr sz="1600">
+                <a:solidFill>
+                  <a:srgbClr val="ABB2BF"/>
+                </a:solidFill>
+                <a:latin typeface="Consolas"/>
+              </a:defRPr>
+            </a:pPr>
+            <a:endParaRPr sz="1400" dirty="0"/>
+          </a:p>
+          <a:p>
+            <a:pPr>
+              <a:spcBef>
+                <a:spcPts val="200"/>
+              </a:spcBef>
+              <a:defRPr sz="1600">
+                <a:solidFill>
+                  <a:srgbClr val="ABB2BF"/>
+                </a:solidFill>
+                <a:latin typeface="Consolas"/>
+              </a:defRPr>
+            </a:pPr>
+            <a:r>
+              <a:rPr sz="1400" dirty="0"/>
+              <a:t># Compute overlay center</a:t>
+            </a:r>
+          </a:p>
+          <a:p>
+            <a:pPr>
+              <a:spcBef>
+                <a:spcPts val="200"/>
+              </a:spcBef>
+              <a:defRPr sz="1600">
+                <a:solidFill>
+                  <a:srgbClr val="ABB2BF"/>
+                </a:solidFill>
+                <a:latin typeface="Consolas"/>
+              </a:defRPr>
+            </a:pPr>
+            <a:r>
+              <a:rPr sz="1400" dirty="0" err="1"/>
+              <a:t>target_x</a:t>
+            </a:r>
+            <a:r>
+              <a:rPr sz="1400" dirty="0"/>
+              <a:t> = ox + </a:t>
+            </a:r>
+            <a:r>
+              <a:rPr sz="1400" dirty="0" err="1"/>
+              <a:t>sx</a:t>
+            </a:r>
+            <a:r>
+              <a:rPr sz="1400" dirty="0"/>
+              <a:t> / 2</a:t>
+            </a:r>
+          </a:p>
+          <a:p>
+            <a:pPr>
+              <a:spcBef>
+                <a:spcPts val="200"/>
+              </a:spcBef>
+              <a:defRPr sz="1600">
+                <a:solidFill>
+                  <a:srgbClr val="ABB2BF"/>
+                </a:solidFill>
+                <a:latin typeface="Consolas"/>
+              </a:defRPr>
+            </a:pPr>
+            <a:r>
+              <a:rPr sz="1400" dirty="0" err="1"/>
+              <a:t>target_y</a:t>
+            </a:r>
+            <a:r>
+              <a:rPr sz="1400" dirty="0"/>
+              <a:t> = oy + </a:t>
+            </a:r>
+            <a:r>
+              <a:rPr sz="1400" dirty="0" err="1"/>
+              <a:t>sy</a:t>
+            </a:r>
+            <a:r>
+              <a:rPr sz="1400" dirty="0"/>
+              <a:t> / 2</a:t>
+            </a:r>
+          </a:p>
+          <a:p>
+            <a:pPr>
+              <a:spcBef>
+                <a:spcPts val="200"/>
+              </a:spcBef>
+              <a:defRPr sz="1600">
+                <a:solidFill>
+                  <a:srgbClr val="ABB2BF"/>
+                </a:solidFill>
+                <a:latin typeface="Consolas"/>
+              </a:defRPr>
+            </a:pPr>
+            <a:r>
+              <a:rPr sz="1400" dirty="0"/>
+              <a:t>print(</a:t>
+            </a:r>
+            <a:r>
+              <a:rPr sz="1400" dirty="0" err="1"/>
+              <a:t>f"Target</a:t>
+            </a:r>
+            <a:r>
+              <a:rPr sz="1400" dirty="0"/>
+              <a:t> center: ({</a:t>
+            </a:r>
+            <a:r>
+              <a:rPr sz="1400" dirty="0" err="1"/>
+              <a:t>target_x</a:t>
+            </a:r>
+            <a:r>
+              <a:rPr sz="1400" dirty="0"/>
+              <a:t>}, {</a:t>
+            </a:r>
+            <a:r>
+              <a:rPr sz="1400" dirty="0" err="1"/>
+              <a:t>target_y</a:t>
+            </a:r>
+            <a:r>
+              <a:rPr sz="1400" dirty="0"/>
+              <a:t>})")</a:t>
+            </a:r>
+          </a:p>
+          <a:p>
+            <a:pPr>
+              <a:spcBef>
+                <a:spcPts val="200"/>
+              </a:spcBef>
+              <a:defRPr sz="1600">
+                <a:solidFill>
+                  <a:srgbClr val="ABB2BF"/>
+                </a:solidFill>
+                <a:latin typeface="Consolas"/>
+              </a:defRPr>
+            </a:pPr>
+            <a:endParaRPr sz="1400" dirty="0"/>
+          </a:p>
+          <a:p>
+            <a:pPr>
+              <a:spcBef>
+                <a:spcPts val="200"/>
+              </a:spcBef>
+              <a:defRPr sz="1600">
+                <a:solidFill>
+                  <a:srgbClr val="ABB2BF"/>
+                </a:solidFill>
+                <a:latin typeface="Consolas"/>
+              </a:defRPr>
+            </a:pPr>
+            <a:r>
+              <a:rPr sz="1400" dirty="0"/>
+              <a:t># Compute error</a:t>
+            </a:r>
+          </a:p>
+          <a:p>
+            <a:pPr>
+              <a:spcBef>
+                <a:spcPts val="200"/>
+              </a:spcBef>
+              <a:defRPr sz="1600">
+                <a:solidFill>
+                  <a:srgbClr val="ABB2BF"/>
+                </a:solidFill>
+                <a:latin typeface="Consolas"/>
+              </a:defRPr>
+            </a:pPr>
+            <a:r>
+              <a:rPr sz="1400" dirty="0"/>
+              <a:t>cx = </a:t>
+            </a:r>
+            <a:r>
+              <a:rPr sz="1400" dirty="0" err="1"/>
+              <a:t>ctx.get</a:t>
+            </a:r>
+            <a:r>
+              <a:rPr sz="1400" dirty="0"/>
+              <a:t>(f'{CAM}:Stats1:CentroidX_RBV')</a:t>
+            </a:r>
+          </a:p>
+          <a:p>
+            <a:pPr>
+              <a:spcBef>
+                <a:spcPts val="200"/>
+              </a:spcBef>
+              <a:defRPr sz="1600">
+                <a:solidFill>
+                  <a:srgbClr val="ABB2BF"/>
+                </a:solidFill>
+                <a:latin typeface="Consolas"/>
+              </a:defRPr>
+            </a:pPr>
+            <a:r>
+              <a:rPr sz="1400" dirty="0"/>
+              <a:t>cy = </a:t>
+            </a:r>
+            <a:r>
+              <a:rPr sz="1400" dirty="0" err="1"/>
+              <a:t>ctx.get</a:t>
+            </a:r>
+            <a:r>
+              <a:rPr sz="1400" dirty="0"/>
+              <a:t>(f'{CAM}:Stats1:CentroidY_RBV')</a:t>
+            </a:r>
+          </a:p>
+          <a:p>
+            <a:pPr>
+              <a:spcBef>
+                <a:spcPts val="200"/>
+              </a:spcBef>
+              <a:defRPr sz="1600">
+                <a:solidFill>
+                  <a:srgbClr val="ABB2BF"/>
+                </a:solidFill>
+                <a:latin typeface="Consolas"/>
+              </a:defRPr>
+            </a:pPr>
+            <a:r>
+              <a:rPr sz="1400" dirty="0"/>
+              <a:t>print(</a:t>
+            </a:r>
+            <a:r>
+              <a:rPr sz="1400" dirty="0" err="1"/>
+              <a:t>f"Beam</a:t>
+            </a:r>
+            <a:r>
+              <a:rPr sz="1400" dirty="0"/>
+              <a:t> centroid: ({cx}, {cy})")</a:t>
+            </a:r>
+          </a:p>
+          <a:p>
+            <a:pPr>
+              <a:spcBef>
+                <a:spcPts val="200"/>
+              </a:spcBef>
+              <a:defRPr sz="1600">
+                <a:solidFill>
+                  <a:srgbClr val="ABB2BF"/>
+                </a:solidFill>
+                <a:latin typeface="Consolas"/>
+              </a:defRPr>
+            </a:pPr>
+            <a:r>
+              <a:rPr sz="1400" dirty="0"/>
+              <a:t>print(</a:t>
+            </a:r>
+            <a:r>
+              <a:rPr sz="1400" dirty="0" err="1"/>
+              <a:t>f"Error</a:t>
+            </a:r>
+            <a:r>
+              <a:rPr sz="1400" dirty="0"/>
+              <a:t>: ({</a:t>
+            </a:r>
+            <a:r>
+              <a:rPr sz="1400" dirty="0" err="1"/>
+              <a:t>target_x</a:t>
+            </a:r>
+            <a:r>
+              <a:rPr sz="1400" dirty="0"/>
+              <a:t> - cx:.1f}, {</a:t>
+            </a:r>
+            <a:r>
+              <a:rPr sz="1400" dirty="0" err="1"/>
+              <a:t>target_y</a:t>
+            </a:r>
+            <a:r>
+              <a:rPr sz="1400" dirty="0"/>
+              <a:t> - cy:.1f}) pixels")</a:t>
             </a:r>
           </a:p>
         </p:txBody>
@@ -8745,61 +9320,23 @@
       </p:grpSpPr>
       <p:sp>
         <p:nvSpPr>
-          <p:cNvPr id="2" name="TextBox 1"/>
-          <p:cNvSpPr txBox="1"/>
+          <p:cNvPr id="2" name="Rectangle 1"/>
+          <p:cNvSpPr/>
           <p:nvPr/>
         </p:nvSpPr>
         <p:spPr>
           <a:xfrm>
-            <a:off x="548640" y="274320"/>
-            <a:ext cx="10972800" cy="731520"/>
+            <a:off x="0" y="2926080"/>
+            <a:ext cx="12191695" cy="54864"/>
           </a:xfrm>
           <a:prstGeom prst="rect">
             <a:avLst/>
           </a:prstGeom>
-          <a:noFill/>
-        </p:spPr>
-        <p:txBody>
-          <a:bodyPr wrap="square">
-            <a:spAutoFit/>
-          </a:bodyPr>
-          <a:lstStyle/>
-          <a:p>
-            <a:pPr algn="l">
-              <a:defRPr sz="3200" b="1">
-                <a:solidFill>
-                  <a:srgbClr val="00B4D8"/>
-                </a:solidFill>
-                <a:latin typeface="Calibri"/>
-              </a:defRPr>
-            </a:pPr>
-            <a:r>
-              <a:t>Exercise 3b – Read the overlay target</a:t>
-            </a:r>
-          </a:p>
-        </p:txBody>
-      </p:sp>
-      <p:sp>
-        <p:nvSpPr>
-          <p:cNvPr id="3" name="Rounded Rectangle 2"/>
-          <p:cNvSpPr/>
-          <p:nvPr/>
-        </p:nvSpPr>
-        <p:spPr>
-          <a:xfrm>
-            <a:off x="548640" y="1188719"/>
-            <a:ext cx="11064240" cy="5573587"/>
-          </a:xfrm>
-          <a:prstGeom prst="roundRect">
-            <a:avLst/>
-          </a:prstGeom>
           <a:solidFill>
-            <a:srgbClr val="0D1117"/>
+            <a:srgbClr val="00B4D8"/>
           </a:solidFill>
-          <a:ln w="12700">
-            <a:solidFill>
-              <a:srgbClr val="334455"/>
-            </a:solidFill>
+          <a:ln>
+            <a:noFill/>
           </a:ln>
         </p:spPr>
         <p:style>
@@ -8827,14 +9364,14 @@
       </p:sp>
       <p:sp>
         <p:nvSpPr>
-          <p:cNvPr id="4" name="TextBox 3"/>
+          <p:cNvPr id="3" name="TextBox 2"/>
           <p:cNvSpPr txBox="1"/>
           <p:nvPr/>
         </p:nvSpPr>
         <p:spPr>
           <a:xfrm>
-            <a:off x="9601200" y="914400"/>
-            <a:ext cx="1828800" cy="320040"/>
+            <a:off x="731520" y="1828800"/>
+            <a:ext cx="10515600" cy="1097280"/>
           </a:xfrm>
           <a:prstGeom prst="rect">
             <a:avLst/>
@@ -8847,30 +9384,30 @@
           </a:bodyPr>
           <a:lstStyle/>
           <a:p>
-            <a:pPr algn="r">
-              <a:defRPr sz="1300" b="0">
-                <a:solidFill>
-                  <a:srgbClr val="48CAE4"/>
-                </a:solidFill>
-                <a:latin typeface="Calibri"/>
-              </a:defRPr>
-            </a:pPr>
-            <a:r>
-              <a:t>python</a:t>
-            </a:r>
-          </a:p>
-        </p:txBody>
-      </p:sp>
-      <p:sp>
-        <p:nvSpPr>
-          <p:cNvPr id="5" name="TextBox 4"/>
+            <a:pPr algn="ctr">
+              <a:defRPr sz="4000" b="1">
+                <a:solidFill>
+                  <a:srgbClr val="00B4D8"/>
+                </a:solidFill>
+                <a:latin typeface="Calibri"/>
+              </a:defRPr>
+            </a:pPr>
+            <a:r>
+              <a:t>Part 4 – Build a Beam-Center App</a:t>
+            </a:r>
+          </a:p>
+        </p:txBody>
+      </p:sp>
+      <p:sp>
+        <p:nvSpPr>
+          <p:cNvPr id="4" name="TextBox 3"/>
           <p:cNvSpPr txBox="1"/>
           <p:nvPr/>
         </p:nvSpPr>
         <p:spPr>
           <a:xfrm>
-            <a:off x="822960" y="1371600"/>
-            <a:ext cx="10515600" cy="5129609"/>
+            <a:off x="1371600" y="3291840"/>
+            <a:ext cx="9144000" cy="914400"/>
           </a:xfrm>
           <a:prstGeom prst="rect">
             <a:avLst/>
@@ -8883,496 +9420,16 @@
           </a:bodyPr>
           <a:lstStyle/>
           <a:p>
-            <a:pPr>
-              <a:spcBef>
-                <a:spcPts val="200"/>
-              </a:spcBef>
-              <a:defRPr sz="1600">
-                <a:solidFill>
-                  <a:srgbClr val="ABB2BF"/>
-                </a:solidFill>
-                <a:latin typeface="Consolas"/>
-              </a:defRPr>
-            </a:pPr>
-            <a:r>
-              <a:rPr sz="1400" dirty="0"/>
-              <a:t>from p4p.client.thread import Context</a:t>
-            </a:r>
-          </a:p>
-          <a:p>
-            <a:pPr>
-              <a:spcBef>
-                <a:spcPts val="200"/>
-              </a:spcBef>
-              <a:defRPr sz="1600">
-                <a:solidFill>
-                  <a:srgbClr val="ABB2BF"/>
-                </a:solidFill>
-                <a:latin typeface="Consolas"/>
-              </a:defRPr>
-            </a:pPr>
-            <a:r>
-              <a:rPr sz="1400" dirty="0" err="1"/>
-              <a:t>ctx</a:t>
-            </a:r>
-            <a:r>
-              <a:rPr sz="1400" dirty="0"/>
-              <a:t> = Context('</a:t>
-            </a:r>
-            <a:r>
-              <a:rPr sz="1400" dirty="0" err="1"/>
-              <a:t>pva</a:t>
-            </a:r>
-            <a:r>
-              <a:rPr sz="1400" dirty="0"/>
-              <a:t>')</a:t>
-            </a:r>
-          </a:p>
-          <a:p>
-            <a:pPr>
-              <a:spcBef>
-                <a:spcPts val="200"/>
-              </a:spcBef>
-              <a:defRPr sz="1600">
-                <a:solidFill>
-                  <a:srgbClr val="ABB2BF"/>
-                </a:solidFill>
-                <a:latin typeface="Consolas"/>
-              </a:defRPr>
-            </a:pPr>
-            <a:endParaRPr sz="1400" dirty="0"/>
-          </a:p>
-          <a:p>
-            <a:pPr>
-              <a:spcBef>
-                <a:spcPts val="200"/>
-              </a:spcBef>
-              <a:defRPr sz="1600">
-                <a:solidFill>
-                  <a:srgbClr val="ABB2BF"/>
-                </a:solidFill>
-                <a:latin typeface="Consolas"/>
-              </a:defRPr>
-            </a:pPr>
-            <a:r>
-              <a:rPr sz="1400" dirty="0"/>
-              <a:t>CAM = 'LAB:SIM:CAM01'</a:t>
-            </a:r>
-          </a:p>
-          <a:p>
-            <a:pPr>
-              <a:spcBef>
-                <a:spcPts val="200"/>
-              </a:spcBef>
-              <a:defRPr sz="1600">
-                <a:solidFill>
-                  <a:srgbClr val="ABB2BF"/>
-                </a:solidFill>
-                <a:latin typeface="Consolas"/>
-              </a:defRPr>
-            </a:pPr>
-            <a:endParaRPr sz="1400" dirty="0"/>
-          </a:p>
-          <a:p>
-            <a:pPr>
-              <a:spcBef>
-                <a:spcPts val="200"/>
-              </a:spcBef>
-              <a:defRPr sz="1600">
-                <a:solidFill>
-                  <a:srgbClr val="ABB2BF"/>
-                </a:solidFill>
-                <a:latin typeface="Consolas"/>
-              </a:defRPr>
-            </a:pPr>
-            <a:r>
-              <a:rPr sz="1400" dirty="0"/>
-              <a:t># Read overlay 1 rectangle</a:t>
-            </a:r>
-          </a:p>
-          <a:p>
-            <a:pPr>
-              <a:spcBef>
-                <a:spcPts val="200"/>
-              </a:spcBef>
-              <a:defRPr sz="1600">
-                <a:solidFill>
-                  <a:srgbClr val="ABB2BF"/>
-                </a:solidFill>
-                <a:latin typeface="Consolas"/>
-              </a:defRPr>
-            </a:pPr>
-            <a:r>
-              <a:rPr sz="1400" dirty="0"/>
-              <a:t>ox = </a:t>
-            </a:r>
-            <a:r>
-              <a:rPr sz="1400" dirty="0" err="1"/>
-              <a:t>ctx.get</a:t>
-            </a:r>
-            <a:r>
-              <a:rPr sz="1400" dirty="0"/>
-              <a:t>(f'{CAM}:Overlay1:1:PositionX_RBV')</a:t>
-            </a:r>
-          </a:p>
-          <a:p>
-            <a:pPr>
-              <a:spcBef>
-                <a:spcPts val="200"/>
-              </a:spcBef>
-              <a:defRPr sz="1600">
-                <a:solidFill>
-                  <a:srgbClr val="ABB2BF"/>
-                </a:solidFill>
-                <a:latin typeface="Consolas"/>
-              </a:defRPr>
-            </a:pPr>
-            <a:r>
-              <a:rPr sz="1400" dirty="0"/>
-              <a:t>oy = </a:t>
-            </a:r>
-            <a:r>
-              <a:rPr sz="1400" dirty="0" err="1"/>
-              <a:t>ctx.get</a:t>
-            </a:r>
-            <a:r>
-              <a:rPr sz="1400" dirty="0"/>
-              <a:t>(f'{CAM}:Overlay1:1:PositionY_RBV')</a:t>
-            </a:r>
-          </a:p>
-          <a:p>
-            <a:pPr>
-              <a:spcBef>
-                <a:spcPts val="200"/>
-              </a:spcBef>
-              <a:defRPr sz="1600">
-                <a:solidFill>
-                  <a:srgbClr val="ABB2BF"/>
-                </a:solidFill>
-                <a:latin typeface="Consolas"/>
-              </a:defRPr>
-            </a:pPr>
-            <a:r>
-              <a:rPr sz="1400" dirty="0" err="1"/>
-              <a:t>sx</a:t>
-            </a:r>
-            <a:r>
-              <a:rPr sz="1400" dirty="0"/>
-              <a:t> = </a:t>
-            </a:r>
-            <a:r>
-              <a:rPr sz="1400" dirty="0" err="1"/>
-              <a:t>ctx.get</a:t>
-            </a:r>
-            <a:r>
-              <a:rPr sz="1400" dirty="0"/>
-              <a:t>(f'{CAM}:Overlay1:1:SizeX_RBV')</a:t>
-            </a:r>
-          </a:p>
-          <a:p>
-            <a:pPr>
-              <a:spcBef>
-                <a:spcPts val="200"/>
-              </a:spcBef>
-              <a:defRPr sz="1600">
-                <a:solidFill>
-                  <a:srgbClr val="ABB2BF"/>
-                </a:solidFill>
-                <a:latin typeface="Consolas"/>
-              </a:defRPr>
-            </a:pPr>
-            <a:r>
-              <a:rPr sz="1400" dirty="0" err="1"/>
-              <a:t>sy</a:t>
-            </a:r>
-            <a:r>
-              <a:rPr sz="1400" dirty="0"/>
-              <a:t> = </a:t>
-            </a:r>
-            <a:r>
-              <a:rPr sz="1400" dirty="0" err="1"/>
-              <a:t>ctx.get</a:t>
-            </a:r>
-            <a:r>
-              <a:rPr sz="1400" dirty="0"/>
-              <a:t>(f'{CAM}:Overlay1:1:SizeY_RBV')</a:t>
-            </a:r>
-          </a:p>
-          <a:p>
-            <a:pPr>
-              <a:spcBef>
-                <a:spcPts val="200"/>
-              </a:spcBef>
-              <a:defRPr sz="1600">
-                <a:solidFill>
-                  <a:srgbClr val="ABB2BF"/>
-                </a:solidFill>
-                <a:latin typeface="Consolas"/>
-              </a:defRPr>
-            </a:pPr>
-            <a:endParaRPr sz="1400" dirty="0"/>
-          </a:p>
-          <a:p>
-            <a:pPr>
-              <a:spcBef>
-                <a:spcPts val="200"/>
-              </a:spcBef>
-              <a:defRPr sz="1600">
-                <a:solidFill>
-                  <a:srgbClr val="ABB2BF"/>
-                </a:solidFill>
-                <a:latin typeface="Consolas"/>
-              </a:defRPr>
-            </a:pPr>
-            <a:r>
-              <a:rPr sz="1400" dirty="0"/>
-              <a:t># Compute overlay center</a:t>
-            </a:r>
-          </a:p>
-          <a:p>
-            <a:pPr>
-              <a:spcBef>
-                <a:spcPts val="200"/>
-              </a:spcBef>
-              <a:defRPr sz="1600">
-                <a:solidFill>
-                  <a:srgbClr val="ABB2BF"/>
-                </a:solidFill>
-                <a:latin typeface="Consolas"/>
-              </a:defRPr>
-            </a:pPr>
-            <a:r>
-              <a:rPr sz="1400" dirty="0" err="1"/>
-              <a:t>target_x</a:t>
-            </a:r>
-            <a:r>
-              <a:rPr sz="1400" dirty="0"/>
-              <a:t> = ox + </a:t>
-            </a:r>
-            <a:r>
-              <a:rPr sz="1400" dirty="0" err="1"/>
-              <a:t>sx</a:t>
-            </a:r>
-            <a:r>
-              <a:rPr sz="1400" dirty="0"/>
-              <a:t> / 2</a:t>
-            </a:r>
-          </a:p>
-          <a:p>
-            <a:pPr>
-              <a:spcBef>
-                <a:spcPts val="200"/>
-              </a:spcBef>
-              <a:defRPr sz="1600">
-                <a:solidFill>
-                  <a:srgbClr val="ABB2BF"/>
-                </a:solidFill>
-                <a:latin typeface="Consolas"/>
-              </a:defRPr>
-            </a:pPr>
-            <a:r>
-              <a:rPr sz="1400" dirty="0" err="1"/>
-              <a:t>target_y</a:t>
-            </a:r>
-            <a:r>
-              <a:rPr sz="1400" dirty="0"/>
-              <a:t> = oy + </a:t>
-            </a:r>
-            <a:r>
-              <a:rPr sz="1400" dirty="0" err="1"/>
-              <a:t>sy</a:t>
-            </a:r>
-            <a:r>
-              <a:rPr sz="1400" dirty="0"/>
-              <a:t> / 2</a:t>
-            </a:r>
-          </a:p>
-          <a:p>
-            <a:pPr>
-              <a:spcBef>
-                <a:spcPts val="200"/>
-              </a:spcBef>
-              <a:defRPr sz="1600">
-                <a:solidFill>
-                  <a:srgbClr val="ABB2BF"/>
-                </a:solidFill>
-                <a:latin typeface="Consolas"/>
-              </a:defRPr>
-            </a:pPr>
-            <a:r>
-              <a:rPr sz="1400" dirty="0"/>
-              <a:t>print(</a:t>
-            </a:r>
-            <a:r>
-              <a:rPr sz="1400" dirty="0" err="1"/>
-              <a:t>f"Target</a:t>
-            </a:r>
-            <a:r>
-              <a:rPr sz="1400" dirty="0"/>
-              <a:t> center: ({</a:t>
-            </a:r>
-            <a:r>
-              <a:rPr sz="1400" dirty="0" err="1"/>
-              <a:t>target_x</a:t>
-            </a:r>
-            <a:r>
-              <a:rPr sz="1400" dirty="0"/>
-              <a:t>}, {</a:t>
-            </a:r>
-            <a:r>
-              <a:rPr sz="1400" dirty="0" err="1"/>
-              <a:t>target_y</a:t>
-            </a:r>
-            <a:r>
-              <a:rPr sz="1400" dirty="0"/>
-              <a:t>})")</a:t>
-            </a:r>
-          </a:p>
-          <a:p>
-            <a:pPr>
-              <a:spcBef>
-                <a:spcPts val="200"/>
-              </a:spcBef>
-              <a:defRPr sz="1600">
-                <a:solidFill>
-                  <a:srgbClr val="ABB2BF"/>
-                </a:solidFill>
-                <a:latin typeface="Consolas"/>
-              </a:defRPr>
-            </a:pPr>
-            <a:endParaRPr sz="1400" dirty="0"/>
-          </a:p>
-          <a:p>
-            <a:pPr>
-              <a:spcBef>
-                <a:spcPts val="200"/>
-              </a:spcBef>
-              <a:defRPr sz="1600">
-                <a:solidFill>
-                  <a:srgbClr val="ABB2BF"/>
-                </a:solidFill>
-                <a:latin typeface="Consolas"/>
-              </a:defRPr>
-            </a:pPr>
-            <a:r>
-              <a:rPr sz="1400" dirty="0"/>
-              <a:t># Compute error</a:t>
-            </a:r>
-          </a:p>
-          <a:p>
-            <a:pPr>
-              <a:spcBef>
-                <a:spcPts val="200"/>
-              </a:spcBef>
-              <a:defRPr sz="1600">
-                <a:solidFill>
-                  <a:srgbClr val="ABB2BF"/>
-                </a:solidFill>
-                <a:latin typeface="Consolas"/>
-              </a:defRPr>
-            </a:pPr>
-            <a:r>
-              <a:rPr sz="1400" dirty="0"/>
-              <a:t>cx = </a:t>
-            </a:r>
-            <a:r>
-              <a:rPr sz="1400" dirty="0" err="1"/>
-              <a:t>ctx.get</a:t>
-            </a:r>
-            <a:r>
-              <a:rPr sz="1400" dirty="0"/>
-              <a:t>(f'{CAM}:Stats1:CentroidX_RBV')</a:t>
-            </a:r>
-          </a:p>
-          <a:p>
-            <a:pPr>
-              <a:spcBef>
-                <a:spcPts val="200"/>
-              </a:spcBef>
-              <a:defRPr sz="1600">
-                <a:solidFill>
-                  <a:srgbClr val="ABB2BF"/>
-                </a:solidFill>
-                <a:latin typeface="Consolas"/>
-              </a:defRPr>
-            </a:pPr>
-            <a:r>
-              <a:rPr sz="1400" dirty="0"/>
-              <a:t>cy = </a:t>
-            </a:r>
-            <a:r>
-              <a:rPr sz="1400" dirty="0" err="1"/>
-              <a:t>ctx.get</a:t>
-            </a:r>
-            <a:r>
-              <a:rPr sz="1400" dirty="0"/>
-              <a:t>(f'{CAM}:Stats1:CentroidY_RBV')</a:t>
-            </a:r>
-          </a:p>
-          <a:p>
-            <a:pPr>
-              <a:spcBef>
-                <a:spcPts val="200"/>
-              </a:spcBef>
-              <a:defRPr sz="1600">
-                <a:solidFill>
-                  <a:srgbClr val="ABB2BF"/>
-                </a:solidFill>
-                <a:latin typeface="Consolas"/>
-              </a:defRPr>
-            </a:pPr>
-            <a:r>
-              <a:rPr sz="1400" dirty="0"/>
-              <a:t>print(</a:t>
-            </a:r>
-            <a:r>
-              <a:rPr sz="1400" dirty="0" err="1"/>
-              <a:t>f"Beam</a:t>
-            </a:r>
-            <a:r>
-              <a:rPr sz="1400" dirty="0"/>
-              <a:t> centroid: ({cx}, {cy})")</a:t>
-            </a:r>
-          </a:p>
-          <a:p>
-            <a:pPr>
-              <a:spcBef>
-                <a:spcPts val="200"/>
-              </a:spcBef>
-              <a:defRPr sz="1600">
-                <a:solidFill>
-                  <a:srgbClr val="ABB2BF"/>
-                </a:solidFill>
-                <a:latin typeface="Consolas"/>
-              </a:defRPr>
-            </a:pPr>
-            <a:r>
-              <a:rPr sz="1400" dirty="0"/>
-              <a:t>print(</a:t>
-            </a:r>
-            <a:r>
-              <a:rPr sz="1400" dirty="0" err="1"/>
-              <a:t>f"Error</a:t>
-            </a:r>
-            <a:r>
-              <a:rPr sz="1400" dirty="0"/>
-              <a:t>: ({</a:t>
-            </a:r>
-            <a:r>
-              <a:rPr sz="1400" dirty="0" err="1"/>
-              <a:t>target_x</a:t>
-            </a:r>
-            <a:r>
-              <a:rPr sz="1400" dirty="0"/>
-              <a:t> - cx:.1f}, {</a:t>
-            </a:r>
-            <a:r>
-              <a:rPr sz="1400" dirty="0" err="1"/>
-              <a:t>target_y</a:t>
-            </a:r>
-            <a:r>
-              <a:rPr sz="1400" dirty="0"/>
-              <a:t> - cy:.1f}) pixels")</a:t>
+            <a:pPr algn="ctr">
+              <a:defRPr sz="2200" b="0">
+                <a:solidFill>
+                  <a:srgbClr val="CCCCCC"/>
+                </a:solidFill>
+                <a:latin typeface="Calibri"/>
+              </a:defRPr>
+            </a:pPr>
+            <a:r>
+              <a:t>Closed-loop: move motors to center the beam on overlay  (≈ 45 min)</a:t>
             </a:r>
           </a:p>
         </p:txBody>
@@ -9412,20 +9469,56 @@
       </p:grpSpPr>
       <p:sp>
         <p:nvSpPr>
-          <p:cNvPr id="2" name="Rectangle 1"/>
+          <p:cNvPr id="2" name="TextBox 1"/>
+          <p:cNvSpPr txBox="1"/>
+          <p:nvPr/>
+        </p:nvSpPr>
+        <p:spPr>
+          <a:xfrm>
+            <a:off x="548640" y="274320"/>
+            <a:ext cx="10972800" cy="822960"/>
+          </a:xfrm>
+          <a:prstGeom prst="rect">
+            <a:avLst/>
+          </a:prstGeom>
+          <a:noFill/>
+        </p:spPr>
+        <p:txBody>
+          <a:bodyPr wrap="square">
+            <a:spAutoFit/>
+          </a:bodyPr>
+          <a:lstStyle/>
+          <a:p>
+            <a:pPr algn="l">
+              <a:defRPr sz="3400" b="1">
+                <a:solidFill>
+                  <a:srgbClr val="00B4D8"/>
+                </a:solidFill>
+                <a:latin typeface="Calibri"/>
+              </a:defRPr>
+            </a:pPr>
+            <a:r>
+              <a:t>The Challenge</a:t>
+            </a:r>
+          </a:p>
+        </p:txBody>
+      </p:sp>
+      <p:sp>
+        <p:nvSpPr>
+          <p:cNvPr id="3" name="Rectangle 2"/>
           <p:cNvSpPr/>
           <p:nvPr/>
         </p:nvSpPr>
         <p:spPr>
           <a:xfrm>
-            <a:off x="0" y="2926080"/>
-            <a:ext cx="12191695" cy="54864"/>
+            <a:off x="548640" y="1051560"/>
+            <a:ext cx="4572000" cy="36576"/>
           </a:xfrm>
           <a:prstGeom prst="rect">
             <a:avLst/>
           </a:prstGeom>
           <a:solidFill>
-            <a:srgbClr val="00B4D8"/>
+            <a:srgbClr val="48CAE4"/>
           </a:solidFill>
           <a:ln>
             <a:noFill/>
@@ -9456,14 +9549,14 @@
       </p:sp>
       <p:sp>
         <p:nvSpPr>
-          <p:cNvPr id="3" name="TextBox 2"/>
+          <p:cNvPr id="4" name="TextBox 3"/>
           <p:cNvSpPr txBox="1"/>
           <p:nvPr/>
         </p:nvSpPr>
         <p:spPr>
           <a:xfrm>
-            <a:off x="731520" y="1828800"/>
-            <a:ext cx="10515600" cy="1097280"/>
+            <a:off x="731520" y="1371600"/>
+            <a:ext cx="10515600" cy="5029200"/>
           </a:xfrm>
           <a:prstGeom prst="rect">
             <a:avLst/>
@@ -9476,44 +9569,63 @@
           </a:bodyPr>
           <a:lstStyle/>
           <a:p>
-            <a:pPr algn="ctr">
-              <a:defRPr sz="4000" b="1">
-                <a:solidFill>
-                  <a:srgbClr val="00B4D8"/>
-                </a:solidFill>
-                <a:latin typeface="Calibri"/>
-              </a:defRPr>
-            </a:pPr>
-            <a:r>
-              <a:t>Part 4 – Build a Beam-Center App</a:t>
-            </a:r>
-          </a:p>
-        </p:txBody>
-      </p:sp>
-      <p:sp>
-        <p:nvSpPr>
-          <p:cNvPr id="4" name="TextBox 3"/>
-          <p:cNvSpPr txBox="1"/>
-          <p:nvPr/>
-        </p:nvSpPr>
-        <p:spPr>
-          <a:xfrm>
-            <a:off x="1371600" y="3291840"/>
-            <a:ext cx="9144000" cy="914400"/>
-          </a:xfrm>
-          <a:prstGeom prst="rect">
-            <a:avLst/>
-          </a:prstGeom>
-          <a:noFill/>
-        </p:spPr>
-        <p:txBody>
-          <a:bodyPr wrap="square">
-            <a:spAutoFit/>
-          </a:bodyPr>
-          <a:lstStyle/>
-          <a:p>
-            <a:pPr algn="ctr">
-              <a:defRPr sz="2200" b="0">
+            <a:pPr>
+              <a:spcBef>
+                <a:spcPts val="800"/>
+              </a:spcBef>
+              <a:defRPr sz="2200">
+                <a:solidFill>
+                  <a:srgbClr val="FFFFFF"/>
+                </a:solidFill>
+                <a:latin typeface="Calibri"/>
+              </a:defRPr>
+            </a:pPr>
+            <a:r>
+              <a:t>▸  Goal: automatically move HMIR and VMIR so that the beam centroid</a:t>
+            </a:r>
+            <a:br/>
+            <a:r>
+              <a:t>    lands exactly in the center of overlay rectangle 1</a:t>
+            </a:r>
+          </a:p>
+          <a:p>
+            <a:pPr>
+              <a:spcBef>
+                <a:spcPts val="800"/>
+              </a:spcBef>
+              <a:defRPr sz="2200">
+                <a:solidFill>
+                  <a:srgbClr val="FFFFFF"/>
+                </a:solidFill>
+                <a:latin typeface="Calibri"/>
+              </a:defRPr>
+            </a:pPr>
+            <a:r>
+              <a:t>▸  </a:t>
+            </a:r>
+          </a:p>
+          <a:p>
+            <a:pPr>
+              <a:spcBef>
+                <a:spcPts val="800"/>
+              </a:spcBef>
+              <a:defRPr sz="2200">
+                <a:solidFill>
+                  <a:srgbClr val="FFFFFF"/>
+                </a:solidFill>
+                <a:latin typeface="Calibri"/>
+              </a:defRPr>
+            </a:pPr>
+            <a:r>
+              <a:t>▸  You need:</a:t>
+            </a:r>
+          </a:p>
+          <a:p>
+            <a:pPr>
+              <a:spcBef>
+                <a:spcPts val="800"/>
+              </a:spcBef>
+              <a:defRPr sz="1900">
                 <a:solidFill>
                   <a:srgbClr val="CCCCCC"/>
                 </a:solidFill>
@@ -9521,7 +9633,103 @@
               </a:defRPr>
             </a:pPr>
             <a:r>
-              <a:t>Closed-loop: move motors to center the beam on overlay  (≈ 45 min)</a:t>
+              <a:t>     ‣  Read the beam centroid (Stats1:CentroidX_RBV, CentroidY_RBV)</a:t>
+            </a:r>
+          </a:p>
+          <a:p>
+            <a:pPr>
+              <a:spcBef>
+                <a:spcPts val="800"/>
+              </a:spcBef>
+              <a:defRPr sz="1900">
+                <a:solidFill>
+                  <a:srgbClr val="CCCCCC"/>
+                </a:solidFill>
+                <a:latin typeface="Calibri"/>
+              </a:defRPr>
+            </a:pPr>
+            <a:r>
+              <a:t>     ‣  Read the overlay center (Overlay1:1:Position + Size / 2)</a:t>
+            </a:r>
+          </a:p>
+          <a:p>
+            <a:pPr>
+              <a:spcBef>
+                <a:spcPts val="800"/>
+              </a:spcBef>
+              <a:defRPr sz="1900">
+                <a:solidFill>
+                  <a:srgbClr val="CCCCCC"/>
+                </a:solidFill>
+                <a:latin typeface="Calibri"/>
+              </a:defRPr>
+            </a:pPr>
+            <a:r>
+              <a:t>     ‣  Compute the error in pixels</a:t>
+            </a:r>
+          </a:p>
+          <a:p>
+            <a:pPr>
+              <a:spcBef>
+                <a:spcPts val="800"/>
+              </a:spcBef>
+              <a:defRPr sz="1900">
+                <a:solidFill>
+                  <a:srgbClr val="CCCCCC"/>
+                </a:solidFill>
+                <a:latin typeface="Calibri"/>
+              </a:defRPr>
+            </a:pPr>
+            <a:r>
+              <a:t>     ‣  Convert pixel error → motor correction (gain factor)</a:t>
+            </a:r>
+          </a:p>
+          <a:p>
+            <a:pPr>
+              <a:spcBef>
+                <a:spcPts val="800"/>
+              </a:spcBef>
+              <a:defRPr sz="1900">
+                <a:solidFill>
+                  <a:srgbClr val="CCCCCC"/>
+                </a:solidFill>
+                <a:latin typeface="Calibri"/>
+              </a:defRPr>
+            </a:pPr>
+            <a:r>
+              <a:t>     ‣  Move motors, wait, repeat until error &lt; tolerance</a:t>
+            </a:r>
+          </a:p>
+          <a:p>
+            <a:pPr>
+              <a:spcBef>
+                <a:spcPts val="800"/>
+              </a:spcBef>
+              <a:defRPr sz="2200">
+                <a:solidFill>
+                  <a:srgbClr val="FFFFFF"/>
+                </a:solidFill>
+                <a:latin typeface="Calibri"/>
+              </a:defRPr>
+            </a:pPr>
+            <a:r>
+              <a:t>▸  </a:t>
+            </a:r>
+          </a:p>
+          <a:p>
+            <a:pPr>
+              <a:spcBef>
+                <a:spcPts val="800"/>
+              </a:spcBef>
+              <a:defRPr sz="2200">
+                <a:solidFill>
+                  <a:srgbClr val="FFFFFF"/>
+                </a:solidFill>
+                <a:latin typeface="Calibri"/>
+              </a:defRPr>
+            </a:pPr>
+            <a:r>
+              <a:t>▸  This is a proportional control loop!</a:t>
             </a:r>
           </a:p>
         </p:txBody>
@@ -9590,7 +9798,7 @@
               </a:defRPr>
             </a:pPr>
             <a:r>
-              <a:t>The Challenge</a:t>
+              <a:t>Algorithm – Step by step</a:t>
             </a:r>
           </a:p>
         </p:txBody>
@@ -9673,11 +9881,7 @@
               </a:defRPr>
             </a:pPr>
             <a:r>
-              <a:t>▸  Goal: automatically move HMIR and VMIR so that the beam centroid</a:t>
-            </a:r>
-            <a:br/>
-            <a:r>
-              <a:t>    lands exactly in the center of overlay rectangle 1</a:t>
+              <a:t>▸  1. Enable centroid computation:  Stats1:ComputeCentroid = 1</a:t>
             </a:r>
           </a:p>
           <a:p>
@@ -9693,23 +9897,7 @@
               </a:defRPr>
             </a:pPr>
             <a:r>
-              <a:t>▸  </a:t>
-            </a:r>
-          </a:p>
-          <a:p>
-            <a:pPr>
-              <a:spcBef>
-                <a:spcPts val="800"/>
-              </a:spcBef>
-              <a:defRPr sz="2200">
-                <a:solidFill>
-                  <a:srgbClr val="FFFFFF"/>
-                </a:solidFill>
-                <a:latin typeface="Calibri"/>
-              </a:defRPr>
-            </a:pPr>
-            <a:r>
-              <a:t>▸  You need:</a:t>
+              <a:t>▸  2. LOOP:</a:t>
             </a:r>
           </a:p>
           <a:p>
@@ -9725,7 +9913,7 @@
               </a:defRPr>
             </a:pPr>
             <a:r>
-              <a:t>     ‣  Read the beam centroid (Stats1:CentroidX_RBV, CentroidY_RBV)</a:t>
+              <a:t>     ‣    a. Read beam centroid (cx, cy)</a:t>
             </a:r>
           </a:p>
           <a:p>
@@ -9741,7 +9929,7 @@
               </a:defRPr>
             </a:pPr>
             <a:r>
-              <a:t>     ‣  Read the overlay center (Overlay1:1:Position + Size / 2)</a:t>
+              <a:t>     ‣    b. Read overlay 1 center (tx, ty)</a:t>
             </a:r>
           </a:p>
           <a:p>
@@ -9757,7 +9945,7 @@
               </a:defRPr>
             </a:pPr>
             <a:r>
-              <a:t>     ‣  Compute the error in pixels</a:t>
+              <a:t>     ‣    c. error_x = tx – cx ,  error_y = ty – cy</a:t>
             </a:r>
           </a:p>
           <a:p>
@@ -9773,7 +9961,7 @@
               </a:defRPr>
             </a:pPr>
             <a:r>
-              <a:t>     ‣  Convert pixel error → motor correction (gain factor)</a:t>
+              <a:t>     ‣    d. If |error_x| &lt; tolerance AND |error_y| &lt; tolerance → DONE!</a:t>
             </a:r>
           </a:p>
           <a:p>
@@ -9789,39 +9977,71 @@
               </a:defRPr>
             </a:pPr>
             <a:r>
-              <a:t>     ‣  Move motors, wait, repeat until error &lt; tolerance</a:t>
-            </a:r>
-          </a:p>
-          <a:p>
-            <a:pPr>
-              <a:spcBef>
-                <a:spcPts val="800"/>
-              </a:spcBef>
-              <a:defRPr sz="2200">
-                <a:solidFill>
-                  <a:srgbClr val="FFFFFF"/>
-                </a:solidFill>
-                <a:latin typeface="Calibri"/>
-              </a:defRPr>
-            </a:pPr>
-            <a:r>
-              <a:t>▸  </a:t>
-            </a:r>
-          </a:p>
-          <a:p>
-            <a:pPr>
-              <a:spcBef>
-                <a:spcPts val="800"/>
-              </a:spcBef>
-              <a:defRPr sz="2200">
-                <a:solidFill>
-                  <a:srgbClr val="FFFFFF"/>
-                </a:solidFill>
-                <a:latin typeface="Calibri"/>
-              </a:defRPr>
-            </a:pPr>
-            <a:r>
-              <a:t>▸  This is a proportional control loop!</a:t>
+              <a:t>     ‣    e. delta_motor_x = error_x × gain</a:t>
+            </a:r>
+          </a:p>
+          <a:p>
+            <a:pPr>
+              <a:spcBef>
+                <a:spcPts val="800"/>
+              </a:spcBef>
+              <a:defRPr sz="1900">
+                <a:solidFill>
+                  <a:srgbClr val="CCCCCC"/>
+                </a:solidFill>
+                <a:latin typeface="Calibri"/>
+              </a:defRPr>
+            </a:pPr>
+            <a:r>
+              <a:t>     ‣    f. delta_motor_y = error_y × gain</a:t>
+            </a:r>
+          </a:p>
+          <a:p>
+            <a:pPr>
+              <a:spcBef>
+                <a:spcPts val="800"/>
+              </a:spcBef>
+              <a:defRPr sz="1900">
+                <a:solidFill>
+                  <a:srgbClr val="CCCCCC"/>
+                </a:solidFill>
+                <a:latin typeface="Calibri"/>
+              </a:defRPr>
+            </a:pPr>
+            <a:r>
+              <a:t>     ‣    g. Move HMIR by delta_motor_x</a:t>
+            </a:r>
+          </a:p>
+          <a:p>
+            <a:pPr>
+              <a:spcBef>
+                <a:spcPts val="800"/>
+              </a:spcBef>
+              <a:defRPr sz="1900">
+                <a:solidFill>
+                  <a:srgbClr val="CCCCCC"/>
+                </a:solidFill>
+                <a:latin typeface="Calibri"/>
+              </a:defRPr>
+            </a:pPr>
+            <a:r>
+              <a:t>     ‣    h. Move VMIR by delta_motor_y</a:t>
+            </a:r>
+          </a:p>
+          <a:p>
+            <a:pPr>
+              <a:spcBef>
+                <a:spcPts val="800"/>
+              </a:spcBef>
+              <a:defRPr sz="1900">
+                <a:solidFill>
+                  <a:srgbClr val="CCCCCC"/>
+                </a:solidFill>
+                <a:latin typeface="Calibri"/>
+              </a:defRPr>
+            </a:pPr>
+            <a:r>
+              <a:t>     ‣    i. Wait for motors to finish, then go to step 2</a:t>
             </a:r>
           </a:p>
         </p:txBody>
@@ -9890,7 +10110,7 @@
               </a:defRPr>
             </a:pPr>
             <a:r>
-              <a:t>Algorithm – Step by step</a:t>
+              <a:t>What is 'gain'?</a:t>
             </a:r>
           </a:p>
         </p:txBody>
@@ -9973,7 +10193,7 @@
               </a:defRPr>
             </a:pPr>
             <a:r>
-              <a:t>▸  1. Enable centroid computation:  Stats1:ComputeCentroid = 1</a:t>
+              <a:t>▸  Gain converts pixels → motor units</a:t>
             </a:r>
           </a:p>
           <a:p>
@@ -9989,151 +10209,87 @@
               </a:defRPr>
             </a:pPr>
             <a:r>
-              <a:t>▸  2. LOOP:</a:t>
-            </a:r>
-          </a:p>
-          <a:p>
-            <a:pPr>
-              <a:spcBef>
-                <a:spcPts val="800"/>
-              </a:spcBef>
-              <a:defRPr sz="1900">
-                <a:solidFill>
-                  <a:srgbClr val="CCCCCC"/>
-                </a:solidFill>
-                <a:latin typeface="Calibri"/>
-              </a:defRPr>
-            </a:pPr>
-            <a:r>
-              <a:t>     ‣    a. Read beam centroid (cx, cy)</a:t>
-            </a:r>
-          </a:p>
-          <a:p>
-            <a:pPr>
-              <a:spcBef>
-                <a:spcPts val="800"/>
-              </a:spcBef>
-              <a:defRPr sz="1900">
-                <a:solidFill>
-                  <a:srgbClr val="CCCCCC"/>
-                </a:solidFill>
-                <a:latin typeface="Calibri"/>
-              </a:defRPr>
-            </a:pPr>
-            <a:r>
-              <a:t>     ‣    b. Read overlay 1 center (tx, ty)</a:t>
-            </a:r>
-          </a:p>
-          <a:p>
-            <a:pPr>
-              <a:spcBef>
-                <a:spcPts val="800"/>
-              </a:spcBef>
-              <a:defRPr sz="1900">
-                <a:solidFill>
-                  <a:srgbClr val="CCCCCC"/>
-                </a:solidFill>
-                <a:latin typeface="Calibri"/>
-              </a:defRPr>
-            </a:pPr>
-            <a:r>
-              <a:t>     ‣    c. error_x = tx – cx ,  error_y = ty – cy</a:t>
-            </a:r>
-          </a:p>
-          <a:p>
-            <a:pPr>
-              <a:spcBef>
-                <a:spcPts val="800"/>
-              </a:spcBef>
-              <a:defRPr sz="1900">
-                <a:solidFill>
-                  <a:srgbClr val="CCCCCC"/>
-                </a:solidFill>
-                <a:latin typeface="Calibri"/>
-              </a:defRPr>
-            </a:pPr>
-            <a:r>
-              <a:t>     ‣    d. If |error_x| &lt; tolerance AND |error_y| &lt; tolerance → DONE!</a:t>
-            </a:r>
-          </a:p>
-          <a:p>
-            <a:pPr>
-              <a:spcBef>
-                <a:spcPts val="800"/>
-              </a:spcBef>
-              <a:defRPr sz="1900">
-                <a:solidFill>
-                  <a:srgbClr val="CCCCCC"/>
-                </a:solidFill>
-                <a:latin typeface="Calibri"/>
-              </a:defRPr>
-            </a:pPr>
-            <a:r>
-              <a:t>     ‣    e. delta_motor_x = error_x × gain</a:t>
-            </a:r>
-          </a:p>
-          <a:p>
-            <a:pPr>
-              <a:spcBef>
-                <a:spcPts val="800"/>
-              </a:spcBef>
-              <a:defRPr sz="1900">
-                <a:solidFill>
-                  <a:srgbClr val="CCCCCC"/>
-                </a:solidFill>
-                <a:latin typeface="Calibri"/>
-              </a:defRPr>
-            </a:pPr>
-            <a:r>
-              <a:t>     ‣    f. delta_motor_y = error_y × gain</a:t>
-            </a:r>
-          </a:p>
-          <a:p>
-            <a:pPr>
-              <a:spcBef>
-                <a:spcPts val="800"/>
-              </a:spcBef>
-              <a:defRPr sz="1900">
-                <a:solidFill>
-                  <a:srgbClr val="CCCCCC"/>
-                </a:solidFill>
-                <a:latin typeface="Calibri"/>
-              </a:defRPr>
-            </a:pPr>
-            <a:r>
-              <a:t>     ‣    g. Move HMIR by delta_motor_x</a:t>
-            </a:r>
-          </a:p>
-          <a:p>
-            <a:pPr>
-              <a:spcBef>
-                <a:spcPts val="800"/>
-              </a:spcBef>
-              <a:defRPr sz="1900">
-                <a:solidFill>
-                  <a:srgbClr val="CCCCCC"/>
-                </a:solidFill>
-                <a:latin typeface="Calibri"/>
-              </a:defRPr>
-            </a:pPr>
-            <a:r>
-              <a:t>     ‣    h. Move VMIR by delta_motor_y</a:t>
-            </a:r>
-          </a:p>
-          <a:p>
-            <a:pPr>
-              <a:spcBef>
-                <a:spcPts val="800"/>
-              </a:spcBef>
-              <a:defRPr sz="1900">
-                <a:solidFill>
-                  <a:srgbClr val="CCCCCC"/>
-                </a:solidFill>
-                <a:latin typeface="Calibri"/>
-              </a:defRPr>
-            </a:pPr>
-            <a:r>
-              <a:t>     ‣    i. Wait for motors to finish, then go to step 2</a:t>
+              <a:t>▸  If the beam moves 100 pixels when the motor moves 1 mm → gain ≈ 0.01</a:t>
+            </a:r>
+          </a:p>
+          <a:p>
+            <a:pPr>
+              <a:spcBef>
+                <a:spcPts val="800"/>
+              </a:spcBef>
+              <a:defRPr sz="2200">
+                <a:solidFill>
+                  <a:srgbClr val="FFFFFF"/>
+                </a:solidFill>
+                <a:latin typeface="Calibri"/>
+              </a:defRPr>
+            </a:pPr>
+            <a:r>
+              <a:t>▸  Too large gain → overshooting, oscillation</a:t>
+            </a:r>
+          </a:p>
+          <a:p>
+            <a:pPr>
+              <a:spcBef>
+                <a:spcPts val="800"/>
+              </a:spcBef>
+              <a:defRPr sz="2200">
+                <a:solidFill>
+                  <a:srgbClr val="FFFFFF"/>
+                </a:solidFill>
+                <a:latin typeface="Calibri"/>
+              </a:defRPr>
+            </a:pPr>
+            <a:r>
+              <a:t>▸  Too small gain → slow convergence, many iterations</a:t>
+            </a:r>
+          </a:p>
+          <a:p>
+            <a:pPr>
+              <a:spcBef>
+                <a:spcPts val="800"/>
+              </a:spcBef>
+              <a:defRPr sz="2200">
+                <a:solidFill>
+                  <a:srgbClr val="FFFFFF"/>
+                </a:solidFill>
+                <a:latin typeface="Calibri"/>
+              </a:defRPr>
+            </a:pPr>
+            <a:r>
+              <a:t>▸  Start with gain = 0.01 and adjust!</a:t>
+            </a:r>
+          </a:p>
+          <a:p>
+            <a:pPr>
+              <a:spcBef>
+                <a:spcPts val="800"/>
+              </a:spcBef>
+              <a:defRPr sz="2200">
+                <a:solidFill>
+                  <a:srgbClr val="FFFFFF"/>
+                </a:solidFill>
+                <a:latin typeface="Calibri"/>
+              </a:defRPr>
+            </a:pPr>
+            <a:r>
+              <a:t>▸  </a:t>
+            </a:r>
+          </a:p>
+          <a:p>
+            <a:pPr>
+              <a:spcBef>
+                <a:spcPts val="800"/>
+              </a:spcBef>
+              <a:defRPr sz="2200">
+                <a:solidFill>
+                  <a:srgbClr val="FFFFFF"/>
+                </a:solidFill>
+                <a:latin typeface="Calibri"/>
+              </a:defRPr>
+            </a:pPr>
+            <a:r>
+              <a:t>▸  Tolerance = how close is 'good enough' (e.g., 5 pixels)</a:t>
             </a:r>
           </a:p>
         </p:txBody>
@@ -10329,7 +10485,7 @@
         <p:spPr>
           <a:xfrm>
             <a:off x="548640" y="274320"/>
-            <a:ext cx="10972800" cy="822960"/>
+            <a:ext cx="10972800" cy="731520"/>
           </a:xfrm>
           <a:prstGeom prst="rect">
             <a:avLst/>
@@ -10343,7 +10499,7 @@
           <a:lstStyle/>
           <a:p>
             <a:pPr algn="l">
-              <a:defRPr sz="3400" b="1">
+              <a:defRPr sz="3200" b="1">
                 <a:solidFill>
                   <a:srgbClr val="00B4D8"/>
                 </a:solidFill>
@@ -10351,30 +10507,32 @@
               </a:defRPr>
             </a:pPr>
             <a:r>
-              <a:t>What is 'gain'?</a:t>
-            </a:r>
-          </a:p>
-        </p:txBody>
-      </p:sp>
-      <p:sp>
-        <p:nvSpPr>
-          <p:cNvPr id="3" name="Rectangle 2"/>
+              <a:t>Skeleton – beam_center notebook</a:t>
+            </a:r>
+          </a:p>
+        </p:txBody>
+      </p:sp>
+      <p:sp>
+        <p:nvSpPr>
+          <p:cNvPr id="3" name="Rounded Rectangle 2"/>
           <p:cNvSpPr/>
           <p:nvPr/>
         </p:nvSpPr>
         <p:spPr>
           <a:xfrm>
-            <a:off x="548640" y="1051560"/>
-            <a:ext cx="4572000" cy="36576"/>
-          </a:xfrm>
-          <a:prstGeom prst="rect">
+            <a:off x="548640" y="1188720"/>
+            <a:ext cx="11064240" cy="5468454"/>
+          </a:xfrm>
+          <a:prstGeom prst="roundRect">
             <a:avLst/>
           </a:prstGeom>
           <a:solidFill>
-            <a:srgbClr val="48CAE4"/>
+            <a:srgbClr val="0D1117"/>
           </a:solidFill>
-          <a:ln>
-            <a:noFill/>
+          <a:ln w="12700">
+            <a:solidFill>
+              <a:srgbClr val="334455"/>
+            </a:solidFill>
           </a:ln>
         </p:spPr>
         <p:style>
@@ -10408,8 +10566,8 @@
         </p:nvSpPr>
         <p:spPr>
           <a:xfrm>
-            <a:off x="731520" y="1371600"/>
-            <a:ext cx="10515600" cy="5029200"/>
+            <a:off x="9601200" y="914400"/>
+            <a:ext cx="1828800" cy="320040"/>
           </a:xfrm>
           <a:prstGeom prst="rect">
             <a:avLst/>
@@ -10422,115 +10580,525 @@
           </a:bodyPr>
           <a:lstStyle/>
           <a:p>
-            <a:pPr>
-              <a:spcBef>
-                <a:spcPts val="800"/>
-              </a:spcBef>
-              <a:defRPr sz="2200">
-                <a:solidFill>
-                  <a:srgbClr val="FFFFFF"/>
-                </a:solidFill>
-                <a:latin typeface="Calibri"/>
-              </a:defRPr>
-            </a:pPr>
-            <a:r>
-              <a:t>▸  Gain converts pixels → motor units</a:t>
-            </a:r>
-          </a:p>
-          <a:p>
-            <a:pPr>
-              <a:spcBef>
-                <a:spcPts val="800"/>
-              </a:spcBef>
-              <a:defRPr sz="2200">
-                <a:solidFill>
-                  <a:srgbClr val="FFFFFF"/>
-                </a:solidFill>
-                <a:latin typeface="Calibri"/>
-              </a:defRPr>
-            </a:pPr>
-            <a:r>
-              <a:t>▸  If the beam moves 100 pixels when the motor moves 1 mm → gain ≈ 0.01</a:t>
-            </a:r>
-          </a:p>
-          <a:p>
-            <a:pPr>
-              <a:spcBef>
-                <a:spcPts val="800"/>
-              </a:spcBef>
-              <a:defRPr sz="2200">
-                <a:solidFill>
-                  <a:srgbClr val="FFFFFF"/>
-                </a:solidFill>
-                <a:latin typeface="Calibri"/>
-              </a:defRPr>
-            </a:pPr>
-            <a:r>
-              <a:t>▸  Too large gain → overshooting, oscillation</a:t>
-            </a:r>
-          </a:p>
-          <a:p>
-            <a:pPr>
-              <a:spcBef>
-                <a:spcPts val="800"/>
-              </a:spcBef>
-              <a:defRPr sz="2200">
-                <a:solidFill>
-                  <a:srgbClr val="FFFFFF"/>
-                </a:solidFill>
-                <a:latin typeface="Calibri"/>
-              </a:defRPr>
-            </a:pPr>
-            <a:r>
-              <a:t>▸  Too small gain → slow convergence, many iterations</a:t>
-            </a:r>
-          </a:p>
-          <a:p>
-            <a:pPr>
-              <a:spcBef>
-                <a:spcPts val="800"/>
-              </a:spcBef>
-              <a:defRPr sz="2200">
-                <a:solidFill>
-                  <a:srgbClr val="FFFFFF"/>
-                </a:solidFill>
-                <a:latin typeface="Calibri"/>
-              </a:defRPr>
-            </a:pPr>
-            <a:r>
-              <a:t>▸  Start with gain = 0.01 and adjust!</a:t>
-            </a:r>
-          </a:p>
-          <a:p>
-            <a:pPr>
-              <a:spcBef>
-                <a:spcPts val="800"/>
-              </a:spcBef>
-              <a:defRPr sz="2200">
-                <a:solidFill>
-                  <a:srgbClr val="FFFFFF"/>
-                </a:solidFill>
-                <a:latin typeface="Calibri"/>
-              </a:defRPr>
-            </a:pPr>
-            <a:r>
-              <a:t>▸  </a:t>
-            </a:r>
-          </a:p>
-          <a:p>
-            <a:pPr>
-              <a:spcBef>
-                <a:spcPts val="800"/>
-              </a:spcBef>
-              <a:defRPr sz="2200">
-                <a:solidFill>
-                  <a:srgbClr val="FFFFFF"/>
-                </a:solidFill>
-                <a:latin typeface="Calibri"/>
-              </a:defRPr>
-            </a:pPr>
-            <a:r>
-              <a:t>▸  Tolerance = how close is 'good enough' (e.g., 5 pixels)</a:t>
+            <a:pPr algn="r">
+              <a:defRPr sz="1300" b="0">
+                <a:solidFill>
+                  <a:srgbClr val="48CAE4"/>
+                </a:solidFill>
+                <a:latin typeface="Calibri"/>
+              </a:defRPr>
+            </a:pPr>
+            <a:r>
+              <a:t>python</a:t>
+            </a:r>
+          </a:p>
+        </p:txBody>
+      </p:sp>
+      <p:sp>
+        <p:nvSpPr>
+          <p:cNvPr id="5" name="TextBox 4"/>
+          <p:cNvSpPr txBox="1"/>
+          <p:nvPr/>
+        </p:nvSpPr>
+        <p:spPr>
+          <a:xfrm>
+            <a:off x="822960" y="1371600"/>
+            <a:ext cx="10515600" cy="5121915"/>
+          </a:xfrm>
+          <a:prstGeom prst="rect">
+            <a:avLst/>
+          </a:prstGeom>
+          <a:noFill/>
+        </p:spPr>
+        <p:txBody>
+          <a:bodyPr wrap="square">
+            <a:spAutoFit/>
+          </a:bodyPr>
+          <a:lstStyle/>
+          <a:p>
+            <a:pPr>
+              <a:spcBef>
+                <a:spcPts val="200"/>
+              </a:spcBef>
+              <a:defRPr sz="1600">
+                <a:solidFill>
+                  <a:srgbClr val="ABB2BF"/>
+                </a:solidFill>
+                <a:latin typeface="Consolas"/>
+              </a:defRPr>
+            </a:pPr>
+            <a:r>
+              <a:rPr sz="1050" dirty="0"/>
+              <a:t>from p4p.client.thread import Context</a:t>
+            </a:r>
+          </a:p>
+          <a:p>
+            <a:pPr>
+              <a:spcBef>
+                <a:spcPts val="200"/>
+              </a:spcBef>
+              <a:defRPr sz="1600">
+                <a:solidFill>
+                  <a:srgbClr val="ABB2BF"/>
+                </a:solidFill>
+                <a:latin typeface="Consolas"/>
+              </a:defRPr>
+            </a:pPr>
+            <a:r>
+              <a:rPr sz="1050" dirty="0"/>
+              <a:t>import time</a:t>
+            </a:r>
+          </a:p>
+          <a:p>
+            <a:pPr>
+              <a:spcBef>
+                <a:spcPts val="200"/>
+              </a:spcBef>
+              <a:defRPr sz="1600">
+                <a:solidFill>
+                  <a:srgbClr val="ABB2BF"/>
+                </a:solidFill>
+                <a:latin typeface="Consolas"/>
+              </a:defRPr>
+            </a:pPr>
+            <a:endParaRPr sz="1050" dirty="0"/>
+          </a:p>
+          <a:p>
+            <a:pPr>
+              <a:spcBef>
+                <a:spcPts val="200"/>
+              </a:spcBef>
+              <a:defRPr sz="1600">
+                <a:solidFill>
+                  <a:srgbClr val="ABB2BF"/>
+                </a:solidFill>
+                <a:latin typeface="Consolas"/>
+              </a:defRPr>
+            </a:pPr>
+            <a:r>
+              <a:rPr sz="1050" dirty="0" err="1"/>
+              <a:t>ctx</a:t>
+            </a:r>
+            <a:r>
+              <a:rPr sz="1050" dirty="0"/>
+              <a:t> = Context('</a:t>
+            </a:r>
+            <a:r>
+              <a:rPr sz="1050" dirty="0" err="1"/>
+              <a:t>pva</a:t>
+            </a:r>
+            <a:r>
+              <a:rPr sz="1050" dirty="0"/>
+              <a:t>')</a:t>
+            </a:r>
+          </a:p>
+          <a:p>
+            <a:pPr>
+              <a:spcBef>
+                <a:spcPts val="200"/>
+              </a:spcBef>
+              <a:defRPr sz="1600">
+                <a:solidFill>
+                  <a:srgbClr val="ABB2BF"/>
+                </a:solidFill>
+                <a:latin typeface="Consolas"/>
+              </a:defRPr>
+            </a:pPr>
+            <a:r>
+              <a:rPr sz="1050" dirty="0"/>
+              <a:t>CAM = 'LAB:SIM:CAM01'</a:t>
+            </a:r>
+          </a:p>
+          <a:p>
+            <a:pPr>
+              <a:spcBef>
+                <a:spcPts val="200"/>
+              </a:spcBef>
+              <a:defRPr sz="1600">
+                <a:solidFill>
+                  <a:srgbClr val="ABB2BF"/>
+                </a:solidFill>
+                <a:latin typeface="Consolas"/>
+              </a:defRPr>
+            </a:pPr>
+            <a:r>
+              <a:rPr sz="1050" dirty="0"/>
+              <a:t>GAIN = 0.01       # pixels -&gt; motor units</a:t>
+            </a:r>
+          </a:p>
+          <a:p>
+            <a:pPr>
+              <a:spcBef>
+                <a:spcPts val="200"/>
+              </a:spcBef>
+              <a:defRPr sz="1600">
+                <a:solidFill>
+                  <a:srgbClr val="ABB2BF"/>
+                </a:solidFill>
+                <a:latin typeface="Consolas"/>
+              </a:defRPr>
+            </a:pPr>
+            <a:r>
+              <a:rPr sz="1050" dirty="0"/>
+              <a:t>TOLERANCE = 5.0   # pixels</a:t>
+            </a:r>
+          </a:p>
+          <a:p>
+            <a:pPr>
+              <a:spcBef>
+                <a:spcPts val="200"/>
+              </a:spcBef>
+              <a:defRPr sz="1600">
+                <a:solidFill>
+                  <a:srgbClr val="ABB2BF"/>
+                </a:solidFill>
+                <a:latin typeface="Consolas"/>
+              </a:defRPr>
+            </a:pPr>
+            <a:endParaRPr sz="1050" dirty="0"/>
+          </a:p>
+          <a:p>
+            <a:pPr>
+              <a:spcBef>
+                <a:spcPts val="200"/>
+              </a:spcBef>
+              <a:defRPr sz="1600">
+                <a:solidFill>
+                  <a:srgbClr val="ABB2BF"/>
+                </a:solidFill>
+                <a:latin typeface="Consolas"/>
+              </a:defRPr>
+            </a:pPr>
+            <a:r>
+              <a:rPr sz="1050" dirty="0"/>
+              <a:t># Step 1: enable centroid calculation</a:t>
+            </a:r>
+          </a:p>
+          <a:p>
+            <a:pPr>
+              <a:spcBef>
+                <a:spcPts val="200"/>
+              </a:spcBef>
+              <a:defRPr sz="1600">
+                <a:solidFill>
+                  <a:srgbClr val="ABB2BF"/>
+                </a:solidFill>
+                <a:latin typeface="Consolas"/>
+              </a:defRPr>
+            </a:pPr>
+            <a:r>
+              <a:rPr sz="1050" dirty="0" err="1"/>
+              <a:t>ctx.put</a:t>
+            </a:r>
+            <a:r>
+              <a:rPr sz="1050" dirty="0"/>
+              <a:t>(f'{CAM}:Stats1:ComputeCentroid', 1)</a:t>
+            </a:r>
+          </a:p>
+          <a:p>
+            <a:pPr>
+              <a:spcBef>
+                <a:spcPts val="200"/>
+              </a:spcBef>
+              <a:defRPr sz="1600">
+                <a:solidFill>
+                  <a:srgbClr val="ABB2BF"/>
+                </a:solidFill>
+                <a:latin typeface="Consolas"/>
+              </a:defRPr>
+            </a:pPr>
+            <a:endParaRPr sz="1050" dirty="0"/>
+          </a:p>
+          <a:p>
+            <a:pPr>
+              <a:spcBef>
+                <a:spcPts val="200"/>
+              </a:spcBef>
+              <a:defRPr sz="1600">
+                <a:solidFill>
+                  <a:srgbClr val="ABB2BF"/>
+                </a:solidFill>
+                <a:latin typeface="Consolas"/>
+              </a:defRPr>
+            </a:pPr>
+            <a:r>
+              <a:rPr sz="1050" dirty="0"/>
+              <a:t>for iteration in range(20):  # max 20 iterations</a:t>
+            </a:r>
+          </a:p>
+          <a:p>
+            <a:pPr>
+              <a:spcBef>
+                <a:spcPts val="200"/>
+              </a:spcBef>
+              <a:defRPr sz="1600">
+                <a:solidFill>
+                  <a:srgbClr val="ABB2BF"/>
+                </a:solidFill>
+                <a:latin typeface="Consolas"/>
+              </a:defRPr>
+            </a:pPr>
+            <a:r>
+              <a:rPr sz="1050" dirty="0"/>
+              <a:t>    # Step 2a: read beam centroid</a:t>
+            </a:r>
+          </a:p>
+          <a:p>
+            <a:pPr>
+              <a:spcBef>
+                <a:spcPts val="200"/>
+              </a:spcBef>
+              <a:defRPr sz="1600">
+                <a:solidFill>
+                  <a:srgbClr val="ABB2BF"/>
+                </a:solidFill>
+                <a:latin typeface="Consolas"/>
+              </a:defRPr>
+            </a:pPr>
+            <a:r>
+              <a:rPr sz="1050" dirty="0"/>
+              <a:t>    cx = </a:t>
+            </a:r>
+            <a:r>
+              <a:rPr sz="1050" dirty="0" err="1"/>
+              <a:t>ctx.get</a:t>
+            </a:r>
+            <a:r>
+              <a:rPr sz="1050" dirty="0"/>
+              <a:t>(f'{CAM}:Stats1:CentroidX_RBV')</a:t>
+            </a:r>
+          </a:p>
+          <a:p>
+            <a:pPr>
+              <a:spcBef>
+                <a:spcPts val="200"/>
+              </a:spcBef>
+              <a:defRPr sz="1600">
+                <a:solidFill>
+                  <a:srgbClr val="ABB2BF"/>
+                </a:solidFill>
+                <a:latin typeface="Consolas"/>
+              </a:defRPr>
+            </a:pPr>
+            <a:r>
+              <a:rPr sz="1050" dirty="0"/>
+              <a:t>    cy = </a:t>
+            </a:r>
+            <a:r>
+              <a:rPr sz="1050" dirty="0" err="1"/>
+              <a:t>ctx.get</a:t>
+            </a:r>
+            <a:r>
+              <a:rPr sz="1050" dirty="0"/>
+              <a:t>(f'{CAM}:Stats1:CentroidY_RBV')</a:t>
+            </a:r>
+          </a:p>
+          <a:p>
+            <a:pPr>
+              <a:spcBef>
+                <a:spcPts val="200"/>
+              </a:spcBef>
+              <a:defRPr sz="1600">
+                <a:solidFill>
+                  <a:srgbClr val="ABB2BF"/>
+                </a:solidFill>
+                <a:latin typeface="Consolas"/>
+              </a:defRPr>
+            </a:pPr>
+            <a:endParaRPr sz="1050" dirty="0"/>
+          </a:p>
+          <a:p>
+            <a:pPr>
+              <a:spcBef>
+                <a:spcPts val="200"/>
+              </a:spcBef>
+              <a:defRPr sz="1600">
+                <a:solidFill>
+                  <a:srgbClr val="ABB2BF"/>
+                </a:solidFill>
+                <a:latin typeface="Consolas"/>
+              </a:defRPr>
+            </a:pPr>
+            <a:r>
+              <a:rPr sz="1050" dirty="0"/>
+              <a:t>    # Step 2b: read overlay center  (FILL THIS IN!)</a:t>
+            </a:r>
+          </a:p>
+          <a:p>
+            <a:pPr>
+              <a:spcBef>
+                <a:spcPts val="200"/>
+              </a:spcBef>
+              <a:defRPr sz="1600">
+                <a:solidFill>
+                  <a:srgbClr val="ABB2BF"/>
+                </a:solidFill>
+                <a:latin typeface="Consolas"/>
+              </a:defRPr>
+            </a:pPr>
+            <a:r>
+              <a:rPr sz="1050" dirty="0"/>
+              <a:t>    # </a:t>
+            </a:r>
+            <a:r>
+              <a:rPr sz="1050" dirty="0" err="1"/>
+              <a:t>tx</a:t>
+            </a:r>
+            <a:r>
+              <a:rPr sz="1050" dirty="0"/>
+              <a:t> = ...</a:t>
+            </a:r>
+          </a:p>
+          <a:p>
+            <a:pPr>
+              <a:spcBef>
+                <a:spcPts val="200"/>
+              </a:spcBef>
+              <a:defRPr sz="1600">
+                <a:solidFill>
+                  <a:srgbClr val="ABB2BF"/>
+                </a:solidFill>
+                <a:latin typeface="Consolas"/>
+              </a:defRPr>
+            </a:pPr>
+            <a:r>
+              <a:rPr sz="1050" dirty="0"/>
+              <a:t>    # ty = ...</a:t>
+            </a:r>
+          </a:p>
+          <a:p>
+            <a:pPr>
+              <a:spcBef>
+                <a:spcPts val="200"/>
+              </a:spcBef>
+              <a:defRPr sz="1600">
+                <a:solidFill>
+                  <a:srgbClr val="ABB2BF"/>
+                </a:solidFill>
+                <a:latin typeface="Consolas"/>
+              </a:defRPr>
+            </a:pPr>
+            <a:endParaRPr sz="1050" dirty="0"/>
+          </a:p>
+          <a:p>
+            <a:pPr>
+              <a:spcBef>
+                <a:spcPts val="200"/>
+              </a:spcBef>
+              <a:defRPr sz="1600">
+                <a:solidFill>
+                  <a:srgbClr val="ABB2BF"/>
+                </a:solidFill>
+                <a:latin typeface="Consolas"/>
+              </a:defRPr>
+            </a:pPr>
+            <a:r>
+              <a:rPr sz="1050" dirty="0"/>
+              <a:t>    # Step 2c-d: compute error and check convergence</a:t>
+            </a:r>
+          </a:p>
+          <a:p>
+            <a:pPr>
+              <a:spcBef>
+                <a:spcPts val="200"/>
+              </a:spcBef>
+              <a:defRPr sz="1600">
+                <a:solidFill>
+                  <a:srgbClr val="ABB2BF"/>
+                </a:solidFill>
+                <a:latin typeface="Consolas"/>
+              </a:defRPr>
+            </a:pPr>
+            <a:r>
+              <a:rPr sz="1050" dirty="0"/>
+              <a:t>    # ...</a:t>
+            </a:r>
+          </a:p>
+          <a:p>
+            <a:pPr>
+              <a:spcBef>
+                <a:spcPts val="200"/>
+              </a:spcBef>
+              <a:defRPr sz="1600">
+                <a:solidFill>
+                  <a:srgbClr val="ABB2BF"/>
+                </a:solidFill>
+                <a:latin typeface="Consolas"/>
+              </a:defRPr>
+            </a:pPr>
+            <a:endParaRPr sz="1050" dirty="0"/>
+          </a:p>
+          <a:p>
+            <a:pPr>
+              <a:spcBef>
+                <a:spcPts val="200"/>
+              </a:spcBef>
+              <a:defRPr sz="1600">
+                <a:solidFill>
+                  <a:srgbClr val="ABB2BF"/>
+                </a:solidFill>
+                <a:latin typeface="Consolas"/>
+              </a:defRPr>
+            </a:pPr>
+            <a:r>
+              <a:rPr sz="1050" dirty="0"/>
+              <a:t>    # Step 2e-h: move motors</a:t>
+            </a:r>
+          </a:p>
+          <a:p>
+            <a:pPr>
+              <a:spcBef>
+                <a:spcPts val="200"/>
+              </a:spcBef>
+              <a:defRPr sz="1600">
+                <a:solidFill>
+                  <a:srgbClr val="ABB2BF"/>
+                </a:solidFill>
+                <a:latin typeface="Consolas"/>
+              </a:defRPr>
+            </a:pPr>
+            <a:r>
+              <a:rPr sz="1050" dirty="0"/>
+              <a:t>    # ...</a:t>
+            </a:r>
+          </a:p>
+          <a:p>
+            <a:pPr>
+              <a:spcBef>
+                <a:spcPts val="200"/>
+              </a:spcBef>
+              <a:defRPr sz="1600">
+                <a:solidFill>
+                  <a:srgbClr val="ABB2BF"/>
+                </a:solidFill>
+                <a:latin typeface="Consolas"/>
+              </a:defRPr>
+            </a:pPr>
+            <a:endParaRPr sz="1050" dirty="0"/>
+          </a:p>
+          <a:p>
+            <a:pPr>
+              <a:spcBef>
+                <a:spcPts val="200"/>
+              </a:spcBef>
+              <a:defRPr sz="1600">
+                <a:solidFill>
+                  <a:srgbClr val="ABB2BF"/>
+                </a:solidFill>
+                <a:latin typeface="Consolas"/>
+              </a:defRPr>
+            </a:pPr>
+            <a:r>
+              <a:rPr sz="1050" dirty="0"/>
+              <a:t>    </a:t>
+            </a:r>
+            <a:r>
+              <a:rPr sz="1050" dirty="0" err="1"/>
+              <a:t>time.sleep</a:t>
+            </a:r>
+            <a:r>
+              <a:rPr sz="1050" dirty="0"/>
+              <a:t>(1)  # wait before next iteration</a:t>
             </a:r>
           </a:p>
         </p:txBody>
@@ -10599,7 +11167,7 @@
               </a:defRPr>
             </a:pPr>
             <a:r>
-              <a:t>Skeleton – beam_center notebook</a:t>
+              <a:t>Solution – beam_center (1/2)</a:t>
             </a:r>
           </a:p>
         </p:txBody>
@@ -10613,7 +11181,7 @@
         <p:spPr>
           <a:xfrm>
             <a:off x="548640" y="1188720"/>
-            <a:ext cx="11064240" cy="5468454"/>
+            <a:ext cx="11064240" cy="5120640"/>
           </a:xfrm>
           <a:prstGeom prst="roundRect">
             <a:avLst/>
@@ -10695,7 +11263,7 @@
         <p:spPr>
           <a:xfrm>
             <a:off x="822960" y="1371600"/>
-            <a:ext cx="10515600" cy="5121915"/>
+            <a:ext cx="10515600" cy="4744889"/>
           </a:xfrm>
           <a:prstGeom prst="rect">
             <a:avLst/>
@@ -10720,7 +11288,7 @@
               </a:defRPr>
             </a:pPr>
             <a:r>
-              <a:rPr sz="1050" dirty="0"/>
+              <a:rPr sz="1100" dirty="0"/>
               <a:t>from p4p.client.thread import Context</a:t>
             </a:r>
           </a:p>
@@ -10737,7 +11305,7 @@
               </a:defRPr>
             </a:pPr>
             <a:r>
-              <a:rPr sz="1050" dirty="0"/>
+              <a:rPr sz="1100" dirty="0"/>
               <a:t>import time</a:t>
             </a:r>
           </a:p>
@@ -10753,7 +11321,7 @@
                 <a:latin typeface="Consolas"/>
               </a:defRPr>
             </a:pPr>
-            <a:endParaRPr sz="1050" dirty="0"/>
+            <a:endParaRPr sz="1100" dirty="0"/>
           </a:p>
           <a:p>
             <a:pPr>
@@ -10768,19 +11336,19 @@
               </a:defRPr>
             </a:pPr>
             <a:r>
-              <a:rPr sz="1050" dirty="0" err="1"/>
+              <a:rPr sz="1100" dirty="0" err="1"/>
               <a:t>ctx</a:t>
             </a:r>
             <a:r>
-              <a:rPr sz="1050" dirty="0"/>
+              <a:rPr sz="1100" dirty="0"/>
               <a:t> = Context('</a:t>
             </a:r>
             <a:r>
-              <a:rPr sz="1050" dirty="0" err="1"/>
+              <a:rPr sz="1100" dirty="0" err="1"/>
               <a:t>pva</a:t>
             </a:r>
             <a:r>
-              <a:rPr sz="1050" dirty="0"/>
+              <a:rPr sz="1100" dirty="0"/>
               <a:t>')</a:t>
             </a:r>
           </a:p>
@@ -10797,8 +11365,8 @@
               </a:defRPr>
             </a:pPr>
             <a:r>
-              <a:rPr sz="1050" dirty="0"/>
-              <a:t>CAM = 'LAB:SIM:CAM01'</a:t>
+              <a:rPr sz="1100" dirty="0"/>
+              <a:t>CAM  = 'LAB:SIM:CAM01'</a:t>
             </a:r>
           </a:p>
           <a:p>
@@ -10814,8 +11382,8 @@
               </a:defRPr>
             </a:pPr>
             <a:r>
-              <a:rPr sz="1050" dirty="0"/>
-              <a:t>GAIN = 0.01       # pixels -&gt; motor units</a:t>
+              <a:rPr sz="1100" dirty="0"/>
+              <a:t>MOTX = 'LAB:SIM:HMIR'</a:t>
             </a:r>
           </a:p>
           <a:p>
@@ -10831,8 +11399,8 @@
               </a:defRPr>
             </a:pPr>
             <a:r>
-              <a:rPr sz="1050" dirty="0"/>
-              <a:t>TOLERANCE = 5.0   # pixels</a:t>
+              <a:rPr sz="1100" dirty="0"/>
+              <a:t>MOTY = 'LAB:SIM:VMIR'</a:t>
             </a:r>
           </a:p>
           <a:p>
@@ -10847,7 +11415,10 @@
                 <a:latin typeface="Consolas"/>
               </a:defRPr>
             </a:pPr>
-            <a:endParaRPr sz="1050" dirty="0"/>
+            <a:r>
+              <a:rPr sz="1100" dirty="0"/>
+              <a:t>GAIN = 0.01</a:t>
+            </a:r>
           </a:p>
           <a:p>
             <a:pPr>
@@ -10862,8 +11433,8 @@
               </a:defRPr>
             </a:pPr>
             <a:r>
-              <a:rPr sz="1050" dirty="0"/>
-              <a:t># Step 1: enable centroid calculation</a:t>
+              <a:rPr sz="1100" dirty="0"/>
+              <a:t>TOLERANCE = 5.0</a:t>
             </a:r>
           </a:p>
           <a:p>
@@ -10878,12 +11449,43 @@
                 <a:latin typeface="Consolas"/>
               </a:defRPr>
             </a:pPr>
-            <a:r>
-              <a:rPr sz="1050" dirty="0" err="1"/>
+            <a:endParaRPr sz="1100" dirty="0"/>
+          </a:p>
+          <a:p>
+            <a:pPr>
+              <a:spcBef>
+                <a:spcPts val="200"/>
+              </a:spcBef>
+              <a:defRPr sz="1600">
+                <a:solidFill>
+                  <a:srgbClr val="ABB2BF"/>
+                </a:solidFill>
+                <a:latin typeface="Consolas"/>
+              </a:defRPr>
+            </a:pPr>
+            <a:r>
+              <a:rPr sz="1100" dirty="0"/>
+              <a:t># Enable centroid</a:t>
+            </a:r>
+          </a:p>
+          <a:p>
+            <a:pPr>
+              <a:spcBef>
+                <a:spcPts val="200"/>
+              </a:spcBef>
+              <a:defRPr sz="1600">
+                <a:solidFill>
+                  <a:srgbClr val="ABB2BF"/>
+                </a:solidFill>
+                <a:latin typeface="Consolas"/>
+              </a:defRPr>
+            </a:pPr>
+            <a:r>
+              <a:rPr sz="1100" dirty="0" err="1"/>
               <a:t>ctx.put</a:t>
             </a:r>
             <a:r>
-              <a:rPr sz="1050" dirty="0"/>
+              <a:rPr sz="1100" dirty="0"/>
               <a:t>(f'{CAM}:Stats1:ComputeCentroid', 1)</a:t>
             </a:r>
           </a:p>
@@ -10899,7 +11501,14 @@
                 <a:latin typeface="Consolas"/>
               </a:defRPr>
             </a:pPr>
-            <a:endParaRPr sz="1050" dirty="0"/>
+            <a:r>
+              <a:rPr sz="1100" dirty="0" err="1"/>
+              <a:t>time.sleep</a:t>
+            </a:r>
+            <a:r>
+              <a:rPr sz="1100" dirty="0"/>
+              <a:t>(0.5)</a:t>
+            </a:r>
           </a:p>
           <a:p>
             <a:pPr>
@@ -10913,10 +11522,7 @@
                 <a:latin typeface="Consolas"/>
               </a:defRPr>
             </a:pPr>
-            <a:r>
-              <a:rPr sz="1050" dirty="0"/>
-              <a:t>for iteration in range(20):  # max 20 iterations</a:t>
-            </a:r>
+            <a:endParaRPr sz="1100" dirty="0"/>
           </a:p>
           <a:p>
             <a:pPr>
@@ -10931,8 +11537,16 @@
               </a:defRPr>
             </a:pPr>
             <a:r>
-              <a:rPr sz="1050" dirty="0"/>
-              <a:t>    # Step 2a: read beam centroid</a:t>
+              <a:rPr sz="1100" dirty="0"/>
+              <a:t>for </a:t>
+            </a:r>
+            <a:r>
+              <a:rPr sz="1100" dirty="0" err="1"/>
+              <a:t>i</a:t>
+            </a:r>
+            <a:r>
+              <a:rPr sz="1100" dirty="0"/>
+              <a:t> in range(20):</a:t>
             </a:r>
           </a:p>
           <a:p>
@@ -10948,15 +11562,32 @@
               </a:defRPr>
             </a:pPr>
             <a:r>
-              <a:rPr sz="1050" dirty="0"/>
+              <a:rPr sz="1100" dirty="0"/>
+              <a:t>    # Read beam centroid</a:t>
+            </a:r>
+          </a:p>
+          <a:p>
+            <a:pPr>
+              <a:spcBef>
+                <a:spcPts val="200"/>
+              </a:spcBef>
+              <a:defRPr sz="1600">
+                <a:solidFill>
+                  <a:srgbClr val="ABB2BF"/>
+                </a:solidFill>
+                <a:latin typeface="Consolas"/>
+              </a:defRPr>
+            </a:pPr>
+            <a:r>
+              <a:rPr sz="1100" dirty="0"/>
               <a:t>    cx = </a:t>
             </a:r>
             <a:r>
-              <a:rPr sz="1050" dirty="0" err="1"/>
+              <a:rPr sz="1100" dirty="0" err="1"/>
               <a:t>ctx.get</a:t>
             </a:r>
             <a:r>
-              <a:rPr sz="1050" dirty="0"/>
+              <a:rPr sz="1100" dirty="0"/>
               <a:t>(f'{CAM}:Stats1:CentroidX_RBV')</a:t>
             </a:r>
           </a:p>
@@ -10973,15 +11604,15 @@
               </a:defRPr>
             </a:pPr>
             <a:r>
-              <a:rPr sz="1050" dirty="0"/>
+              <a:rPr sz="1100" dirty="0"/>
               <a:t>    cy = </a:t>
             </a:r>
             <a:r>
-              <a:rPr sz="1050" dirty="0" err="1"/>
+              <a:rPr sz="1100" dirty="0" err="1"/>
               <a:t>ctx.get</a:t>
             </a:r>
             <a:r>
-              <a:rPr sz="1050" dirty="0"/>
+              <a:rPr sz="1100" dirty="0"/>
               <a:t>(f'{CAM}:Stats1:CentroidY_RBV')</a:t>
             </a:r>
           </a:p>
@@ -10997,7 +11628,10 @@
                 <a:latin typeface="Consolas"/>
               </a:defRPr>
             </a:pPr>
-            <a:endParaRPr sz="1050" dirty="0"/>
+            <a:r>
+              <a:rPr sz="1100" dirty="0"/>
+              <a:t>    # Read overlay 1 center</a:t>
+            </a:r>
           </a:p>
           <a:p>
             <a:pPr>
@@ -11012,8 +11646,16 @@
               </a:defRPr>
             </a:pPr>
             <a:r>
-              <a:rPr sz="1050" dirty="0"/>
-              <a:t>    # Step 2b: read overlay center  (FILL THIS IN!)</a:t>
+              <a:rPr sz="1100" dirty="0"/>
+              <a:t>    ox = </a:t>
+            </a:r>
+            <a:r>
+              <a:rPr sz="1100" dirty="0" err="1"/>
+              <a:t>ctx.get</a:t>
+            </a:r>
+            <a:r>
+              <a:rPr sz="1100" dirty="0"/>
+              <a:t>(f'{CAM}:Overlay1:1:PositionX_RBV')</a:t>
             </a:r>
           </a:p>
           <a:p>
@@ -11029,168 +11671,123 @@
               </a:defRPr>
             </a:pPr>
             <a:r>
-              <a:rPr sz="1050" dirty="0"/>
-              <a:t>    # </a:t>
-            </a:r>
-            <a:r>
-              <a:rPr sz="1050" dirty="0" err="1"/>
+              <a:rPr sz="1100" dirty="0"/>
+              <a:t>    oy = </a:t>
+            </a:r>
+            <a:r>
+              <a:rPr sz="1100" dirty="0" err="1"/>
+              <a:t>ctx.get</a:t>
+            </a:r>
+            <a:r>
+              <a:rPr sz="1100" dirty="0"/>
+              <a:t>(f'{CAM}:Overlay1:1:PositionY_RBV')</a:t>
+            </a:r>
+          </a:p>
+          <a:p>
+            <a:pPr>
+              <a:spcBef>
+                <a:spcPts val="200"/>
+              </a:spcBef>
+              <a:defRPr sz="1600">
+                <a:solidFill>
+                  <a:srgbClr val="ABB2BF"/>
+                </a:solidFill>
+                <a:latin typeface="Consolas"/>
+              </a:defRPr>
+            </a:pPr>
+            <a:r>
+              <a:rPr sz="1100" dirty="0"/>
+              <a:t>    </a:t>
+            </a:r>
+            <a:r>
+              <a:rPr sz="1100" dirty="0" err="1"/>
+              <a:t>sx</a:t>
+            </a:r>
+            <a:r>
+              <a:rPr sz="1100" dirty="0"/>
+              <a:t> = </a:t>
+            </a:r>
+            <a:r>
+              <a:rPr sz="1100" dirty="0" err="1"/>
+              <a:t>ctx.get</a:t>
+            </a:r>
+            <a:r>
+              <a:rPr sz="1100" dirty="0"/>
+              <a:t>(f'{CAM}:Overlay1:1:SizeX_RBV')</a:t>
+            </a:r>
+          </a:p>
+          <a:p>
+            <a:pPr>
+              <a:spcBef>
+                <a:spcPts val="200"/>
+              </a:spcBef>
+              <a:defRPr sz="1600">
+                <a:solidFill>
+                  <a:srgbClr val="ABB2BF"/>
+                </a:solidFill>
+                <a:latin typeface="Consolas"/>
+              </a:defRPr>
+            </a:pPr>
+            <a:r>
+              <a:rPr sz="1100" dirty="0"/>
+              <a:t>    </a:t>
+            </a:r>
+            <a:r>
+              <a:rPr sz="1100" dirty="0" err="1"/>
+              <a:t>sy</a:t>
+            </a:r>
+            <a:r>
+              <a:rPr sz="1100" dirty="0"/>
+              <a:t> = </a:t>
+            </a:r>
+            <a:r>
+              <a:rPr sz="1100" dirty="0" err="1"/>
+              <a:t>ctx.get</a:t>
+            </a:r>
+            <a:r>
+              <a:rPr sz="1100" dirty="0"/>
+              <a:t>(f'{CAM}:Overlay1:1:SizeY_RBV')</a:t>
+            </a:r>
+          </a:p>
+          <a:p>
+            <a:pPr>
+              <a:spcBef>
+                <a:spcPts val="200"/>
+              </a:spcBef>
+              <a:defRPr sz="1600">
+                <a:solidFill>
+                  <a:srgbClr val="ABB2BF"/>
+                </a:solidFill>
+                <a:latin typeface="Consolas"/>
+              </a:defRPr>
+            </a:pPr>
+            <a:r>
+              <a:rPr sz="1100" dirty="0"/>
+              <a:t>    </a:t>
+            </a:r>
+            <a:r>
+              <a:rPr sz="1100" dirty="0" err="1"/>
               <a:t>tx</a:t>
             </a:r>
             <a:r>
-              <a:rPr sz="1050" dirty="0"/>
-              <a:t> = ...</a:t>
-            </a:r>
-          </a:p>
-          <a:p>
-            <a:pPr>
-              <a:spcBef>
-                <a:spcPts val="200"/>
-              </a:spcBef>
-              <a:defRPr sz="1600">
-                <a:solidFill>
-                  <a:srgbClr val="ABB2BF"/>
-                </a:solidFill>
-                <a:latin typeface="Consolas"/>
-              </a:defRPr>
-            </a:pPr>
-            <a:r>
-              <a:rPr sz="1050" dirty="0"/>
-              <a:t>    # ty = ...</a:t>
-            </a:r>
-          </a:p>
-          <a:p>
-            <a:pPr>
-              <a:spcBef>
-                <a:spcPts val="200"/>
-              </a:spcBef>
-              <a:defRPr sz="1600">
-                <a:solidFill>
-                  <a:srgbClr val="ABB2BF"/>
-                </a:solidFill>
-                <a:latin typeface="Consolas"/>
-              </a:defRPr>
-            </a:pPr>
-            <a:endParaRPr sz="1050" dirty="0"/>
-          </a:p>
-          <a:p>
-            <a:pPr>
-              <a:spcBef>
-                <a:spcPts val="200"/>
-              </a:spcBef>
-              <a:defRPr sz="1600">
-                <a:solidFill>
-                  <a:srgbClr val="ABB2BF"/>
-                </a:solidFill>
-                <a:latin typeface="Consolas"/>
-              </a:defRPr>
-            </a:pPr>
-            <a:r>
-              <a:rPr sz="1050" dirty="0"/>
-              <a:t>    # Step 2c-d: compute error and check convergence</a:t>
-            </a:r>
-          </a:p>
-          <a:p>
-            <a:pPr>
-              <a:spcBef>
-                <a:spcPts val="200"/>
-              </a:spcBef>
-              <a:defRPr sz="1600">
-                <a:solidFill>
-                  <a:srgbClr val="ABB2BF"/>
-                </a:solidFill>
-                <a:latin typeface="Consolas"/>
-              </a:defRPr>
-            </a:pPr>
-            <a:r>
-              <a:rPr sz="1050" dirty="0"/>
-              <a:t>    # ...</a:t>
-            </a:r>
-          </a:p>
-          <a:p>
-            <a:pPr>
-              <a:spcBef>
-                <a:spcPts val="200"/>
-              </a:spcBef>
-              <a:defRPr sz="1600">
-                <a:solidFill>
-                  <a:srgbClr val="ABB2BF"/>
-                </a:solidFill>
-                <a:latin typeface="Consolas"/>
-              </a:defRPr>
-            </a:pPr>
-            <a:endParaRPr sz="1050" dirty="0"/>
-          </a:p>
-          <a:p>
-            <a:pPr>
-              <a:spcBef>
-                <a:spcPts val="200"/>
-              </a:spcBef>
-              <a:defRPr sz="1600">
-                <a:solidFill>
-                  <a:srgbClr val="ABB2BF"/>
-                </a:solidFill>
-                <a:latin typeface="Consolas"/>
-              </a:defRPr>
-            </a:pPr>
-            <a:r>
-              <a:rPr sz="1050" dirty="0"/>
-              <a:t>    # Step 2e-h: move motors</a:t>
-            </a:r>
-          </a:p>
-          <a:p>
-            <a:pPr>
-              <a:spcBef>
-                <a:spcPts val="200"/>
-              </a:spcBef>
-              <a:defRPr sz="1600">
-                <a:solidFill>
-                  <a:srgbClr val="ABB2BF"/>
-                </a:solidFill>
-                <a:latin typeface="Consolas"/>
-              </a:defRPr>
-            </a:pPr>
-            <a:r>
-              <a:rPr sz="1050" dirty="0"/>
-              <a:t>    # ...</a:t>
-            </a:r>
-          </a:p>
-          <a:p>
-            <a:pPr>
-              <a:spcBef>
-                <a:spcPts val="200"/>
-              </a:spcBef>
-              <a:defRPr sz="1600">
-                <a:solidFill>
-                  <a:srgbClr val="ABB2BF"/>
-                </a:solidFill>
-                <a:latin typeface="Consolas"/>
-              </a:defRPr>
-            </a:pPr>
-            <a:endParaRPr sz="1050" dirty="0"/>
-          </a:p>
-          <a:p>
-            <a:pPr>
-              <a:spcBef>
-                <a:spcPts val="200"/>
-              </a:spcBef>
-              <a:defRPr sz="1600">
-                <a:solidFill>
-                  <a:srgbClr val="ABB2BF"/>
-                </a:solidFill>
-                <a:latin typeface="Consolas"/>
-              </a:defRPr>
-            </a:pPr>
-            <a:r>
-              <a:rPr sz="1050" dirty="0"/>
-              <a:t>    </a:t>
-            </a:r>
-            <a:r>
-              <a:rPr sz="1050" dirty="0" err="1"/>
-              <a:t>time.sleep</a:t>
-            </a:r>
-            <a:r>
-              <a:rPr sz="1050" dirty="0"/>
-              <a:t>(1)  # wait before next iteration</a:t>
+              <a:rPr sz="1100" dirty="0"/>
+              <a:t>, ty = ox + </a:t>
+            </a:r>
+            <a:r>
+              <a:rPr sz="1100" dirty="0" err="1"/>
+              <a:t>sx</a:t>
+            </a:r>
+            <a:r>
+              <a:rPr sz="1100" dirty="0"/>
+              <a:t>/2, oy + </a:t>
+            </a:r>
+            <a:r>
+              <a:rPr sz="1100" dirty="0" err="1"/>
+              <a:t>sy</a:t>
+            </a:r>
+            <a:r>
+              <a:rPr sz="1100" dirty="0"/>
+              <a:t>/2</a:t>
             </a:r>
           </a:p>
         </p:txBody>
@@ -11259,7 +11856,7 @@
               </a:defRPr>
             </a:pPr>
             <a:r>
-              <a:t>Solution – beam_center (1/2)</a:t>
+              <a:t>Solution – beam_center (2/2)</a:t>
             </a:r>
           </a:p>
         </p:txBody>
@@ -11355,7 +11952,7 @@
         <p:spPr>
           <a:xfrm>
             <a:off x="822960" y="1371600"/>
-            <a:ext cx="10515600" cy="4744889"/>
+            <a:ext cx="10515600" cy="4754880"/>
           </a:xfrm>
           <a:prstGeom prst="rect">
             <a:avLst/>
@@ -11380,8 +11977,7 @@
               </a:defRPr>
             </a:pPr>
             <a:r>
-              <a:rPr sz="1100" dirty="0"/>
-              <a:t>from p4p.client.thread import Context</a:t>
+              <a:t># Compute error</a:t>
             </a:r>
           </a:p>
           <a:p>
@@ -11397,8 +11993,7 @@
               </a:defRPr>
             </a:pPr>
             <a:r>
-              <a:rPr sz="1100" dirty="0"/>
-              <a:t>import time</a:t>
+              <a:t>    ex, ey = tx - cx, ty - cy</a:t>
             </a:r>
           </a:p>
           <a:p>
@@ -11413,7 +12008,9 @@
                 <a:latin typeface="Consolas"/>
               </a:defRPr>
             </a:pPr>
-            <a:endParaRPr sz="1100" dirty="0"/>
+            <a:r>
+              <a:t>    print(f"[{i}] centroid=({cx:.0f},{cy:.0f})  "</a:t>
+            </a:r>
           </a:p>
           <a:p>
             <a:pPr>
@@ -11428,20 +12025,7 @@
               </a:defRPr>
             </a:pPr>
             <a:r>
-              <a:rPr sz="1100" dirty="0" err="1"/>
-              <a:t>ctx</a:t>
-            </a:r>
-            <a:r>
-              <a:rPr sz="1100" dirty="0"/>
-              <a:t> = Context('</a:t>
-            </a:r>
-            <a:r>
-              <a:rPr sz="1100" dirty="0" err="1"/>
-              <a:t>pva</a:t>
-            </a:r>
-            <a:r>
-              <a:rPr sz="1100" dirty="0"/>
-              <a:t>')</a:t>
+              <a:t>          f"target=({tx:.0f},{ty:.0f})  err=({ex:.1f},{ey:.1f})")</a:t>
             </a:r>
           </a:p>
           <a:p>
@@ -11456,10 +12040,7 @@
                 <a:latin typeface="Consolas"/>
               </a:defRPr>
             </a:pPr>
-            <a:r>
-              <a:rPr sz="1100" dirty="0"/>
-              <a:t>CAM  = 'LAB:SIM:CAM01'</a:t>
-            </a:r>
+            <a:endParaRPr/>
           </a:p>
           <a:p>
             <a:pPr>
@@ -11474,8 +12055,7 @@
               </a:defRPr>
             </a:pPr>
             <a:r>
-              <a:rPr sz="1100" dirty="0"/>
-              <a:t>MOTX = 'LAB:SIM:HMIR'</a:t>
+              <a:t>    if abs(ex) &lt; TOLERANCE and abs(ey) &lt; TOLERANCE:</a:t>
             </a:r>
           </a:p>
           <a:p>
@@ -11491,8 +12071,7 @@
               </a:defRPr>
             </a:pPr>
             <a:r>
-              <a:rPr sz="1100" dirty="0"/>
-              <a:t>MOTY = 'LAB:SIM:VMIR'</a:t>
+              <a:t>        print(f"✅ Converged in {i+1} iterations!")</a:t>
             </a:r>
           </a:p>
           <a:p>
@@ -11508,8 +12087,7 @@
               </a:defRPr>
             </a:pPr>
             <a:r>
-              <a:rPr sz="1100" dirty="0"/>
-              <a:t>GAIN = 0.01</a:t>
+              <a:t>        break</a:t>
             </a:r>
           </a:p>
           <a:p>
@@ -11524,10 +12102,7 @@
                 <a:latin typeface="Consolas"/>
               </a:defRPr>
             </a:pPr>
-            <a:r>
-              <a:rPr sz="1100" dirty="0"/>
-              <a:t>TOLERANCE = 5.0</a:t>
-            </a:r>
+            <a:endParaRPr/>
           </a:p>
           <a:p>
             <a:pPr>
@@ -11541,7 +12116,9 @@
                 <a:latin typeface="Consolas"/>
               </a:defRPr>
             </a:pPr>
-            <a:endParaRPr sz="1100" dirty="0"/>
+            <a:r>
+              <a:t>    # Move motors</a:t>
+            </a:r>
           </a:p>
           <a:p>
             <a:pPr>
@@ -11556,8 +12133,7 @@
               </a:defRPr>
             </a:pPr>
             <a:r>
-              <a:rPr sz="1100" dirty="0"/>
-              <a:t># Enable centroid</a:t>
+              <a:t>    cur_x = ctx.get(f'{MOTX}')</a:t>
             </a:r>
           </a:p>
           <a:p>
@@ -11573,12 +12149,7 @@
               </a:defRPr>
             </a:pPr>
             <a:r>
-              <a:rPr sz="1100" dirty="0" err="1"/>
-              <a:t>ctx.put</a:t>
-            </a:r>
-            <a:r>
-              <a:rPr sz="1100" dirty="0"/>
-              <a:t>(f'{CAM}:Stats1:ComputeCentroid', 1)</a:t>
+              <a:t>    cur_y = ctx.get(f'{MOTY}')</a:t>
             </a:r>
           </a:p>
           <a:p>
@@ -11594,12 +12165,7 @@
               </a:defRPr>
             </a:pPr>
             <a:r>
-              <a:rPr sz="1100" dirty="0" err="1"/>
-              <a:t>time.sleep</a:t>
-            </a:r>
-            <a:r>
-              <a:rPr sz="1100" dirty="0"/>
-              <a:t>(0.5)</a:t>
+              <a:t>    ctx.put(f'{MOTX}', cur_x + ex * GAIN)</a:t>
             </a:r>
           </a:p>
           <a:p>
@@ -11614,7 +12180,9 @@
                 <a:latin typeface="Consolas"/>
               </a:defRPr>
             </a:pPr>
-            <a:endParaRPr sz="1100" dirty="0"/>
+            <a:r>
+              <a:t>    ctx.put(f'{MOTY}', cur_y + ey * GAIN)</a:t>
+            </a:r>
           </a:p>
           <a:p>
             <a:pPr>
@@ -11629,16 +12197,7 @@
               </a:defRPr>
             </a:pPr>
             <a:r>
-              <a:rPr sz="1100" dirty="0"/>
-              <a:t>for </a:t>
-            </a:r>
-            <a:r>
-              <a:rPr sz="1100" dirty="0" err="1"/>
-              <a:t>i</a:t>
-            </a:r>
-            <a:r>
-              <a:rPr sz="1100" dirty="0"/>
-              <a:t> in range(20):</a:t>
+              <a:t>    time.sleep(1.5)  # wait for motors + new image</a:t>
             </a:r>
           </a:p>
           <a:p>
@@ -11654,8 +12213,7 @@
               </a:defRPr>
             </a:pPr>
             <a:r>
-              <a:rPr sz="1100" dirty="0"/>
-              <a:t>    # Read beam centroid</a:t>
+              <a:t>else:</a:t>
             </a:r>
           </a:p>
           <a:p>
@@ -11671,215 +12229,7 @@
               </a:defRPr>
             </a:pPr>
             <a:r>
-              <a:rPr sz="1100" dirty="0"/>
-              <a:t>    cx = </a:t>
-            </a:r>
-            <a:r>
-              <a:rPr sz="1100" dirty="0" err="1"/>
-              <a:t>ctx.get</a:t>
-            </a:r>
-            <a:r>
-              <a:rPr sz="1100" dirty="0"/>
-              <a:t>(f'{CAM}:Stats1:CentroidX_RBV')</a:t>
-            </a:r>
-          </a:p>
-          <a:p>
-            <a:pPr>
-              <a:spcBef>
-                <a:spcPts val="200"/>
-              </a:spcBef>
-              <a:defRPr sz="1600">
-                <a:solidFill>
-                  <a:srgbClr val="ABB2BF"/>
-                </a:solidFill>
-                <a:latin typeface="Consolas"/>
-              </a:defRPr>
-            </a:pPr>
-            <a:r>
-              <a:rPr sz="1100" dirty="0"/>
-              <a:t>    cy = </a:t>
-            </a:r>
-            <a:r>
-              <a:rPr sz="1100" dirty="0" err="1"/>
-              <a:t>ctx.get</a:t>
-            </a:r>
-            <a:r>
-              <a:rPr sz="1100" dirty="0"/>
-              <a:t>(f'{CAM}:Stats1:CentroidY_RBV')</a:t>
-            </a:r>
-          </a:p>
-          <a:p>
-            <a:pPr>
-              <a:spcBef>
-                <a:spcPts val="200"/>
-              </a:spcBef>
-              <a:defRPr sz="1600">
-                <a:solidFill>
-                  <a:srgbClr val="ABB2BF"/>
-                </a:solidFill>
-                <a:latin typeface="Consolas"/>
-              </a:defRPr>
-            </a:pPr>
-            <a:r>
-              <a:rPr sz="1100" dirty="0"/>
-              <a:t>    # Read overlay 1 center</a:t>
-            </a:r>
-          </a:p>
-          <a:p>
-            <a:pPr>
-              <a:spcBef>
-                <a:spcPts val="200"/>
-              </a:spcBef>
-              <a:defRPr sz="1600">
-                <a:solidFill>
-                  <a:srgbClr val="ABB2BF"/>
-                </a:solidFill>
-                <a:latin typeface="Consolas"/>
-              </a:defRPr>
-            </a:pPr>
-            <a:r>
-              <a:rPr sz="1100" dirty="0"/>
-              <a:t>    ox = </a:t>
-            </a:r>
-            <a:r>
-              <a:rPr sz="1100" dirty="0" err="1"/>
-              <a:t>ctx.get</a:t>
-            </a:r>
-            <a:r>
-              <a:rPr sz="1100" dirty="0"/>
-              <a:t>(f'{CAM}:Overlay1:1:PositionX_RBV')</a:t>
-            </a:r>
-          </a:p>
-          <a:p>
-            <a:pPr>
-              <a:spcBef>
-                <a:spcPts val="200"/>
-              </a:spcBef>
-              <a:defRPr sz="1600">
-                <a:solidFill>
-                  <a:srgbClr val="ABB2BF"/>
-                </a:solidFill>
-                <a:latin typeface="Consolas"/>
-              </a:defRPr>
-            </a:pPr>
-            <a:r>
-              <a:rPr sz="1100" dirty="0"/>
-              <a:t>    oy = </a:t>
-            </a:r>
-            <a:r>
-              <a:rPr sz="1100" dirty="0" err="1"/>
-              <a:t>ctx.get</a:t>
-            </a:r>
-            <a:r>
-              <a:rPr sz="1100" dirty="0"/>
-              <a:t>(f'{CAM}:Overlay1:1:PositionY_RBV')</a:t>
-            </a:r>
-          </a:p>
-          <a:p>
-            <a:pPr>
-              <a:spcBef>
-                <a:spcPts val="200"/>
-              </a:spcBef>
-              <a:defRPr sz="1600">
-                <a:solidFill>
-                  <a:srgbClr val="ABB2BF"/>
-                </a:solidFill>
-                <a:latin typeface="Consolas"/>
-              </a:defRPr>
-            </a:pPr>
-            <a:r>
-              <a:rPr sz="1100" dirty="0"/>
-              <a:t>    </a:t>
-            </a:r>
-            <a:r>
-              <a:rPr sz="1100" dirty="0" err="1"/>
-              <a:t>sx</a:t>
-            </a:r>
-            <a:r>
-              <a:rPr sz="1100" dirty="0"/>
-              <a:t> = </a:t>
-            </a:r>
-            <a:r>
-              <a:rPr sz="1100" dirty="0" err="1"/>
-              <a:t>ctx.get</a:t>
-            </a:r>
-            <a:r>
-              <a:rPr sz="1100" dirty="0"/>
-              <a:t>(f'{CAM}:Overlay1:1:SizeX_RBV')</a:t>
-            </a:r>
-          </a:p>
-          <a:p>
-            <a:pPr>
-              <a:spcBef>
-                <a:spcPts val="200"/>
-              </a:spcBef>
-              <a:defRPr sz="1600">
-                <a:solidFill>
-                  <a:srgbClr val="ABB2BF"/>
-                </a:solidFill>
-                <a:latin typeface="Consolas"/>
-              </a:defRPr>
-            </a:pPr>
-            <a:r>
-              <a:rPr sz="1100" dirty="0"/>
-              <a:t>    </a:t>
-            </a:r>
-            <a:r>
-              <a:rPr sz="1100" dirty="0" err="1"/>
-              <a:t>sy</a:t>
-            </a:r>
-            <a:r>
-              <a:rPr sz="1100" dirty="0"/>
-              <a:t> = </a:t>
-            </a:r>
-            <a:r>
-              <a:rPr sz="1100" dirty="0" err="1"/>
-              <a:t>ctx.get</a:t>
-            </a:r>
-            <a:r>
-              <a:rPr sz="1100" dirty="0"/>
-              <a:t>(f'{CAM}:Overlay1:1:SizeY_RBV')</a:t>
-            </a:r>
-          </a:p>
-          <a:p>
-            <a:pPr>
-              <a:spcBef>
-                <a:spcPts val="200"/>
-              </a:spcBef>
-              <a:defRPr sz="1600">
-                <a:solidFill>
-                  <a:srgbClr val="ABB2BF"/>
-                </a:solidFill>
-                <a:latin typeface="Consolas"/>
-              </a:defRPr>
-            </a:pPr>
-            <a:r>
-              <a:rPr sz="1100" dirty="0"/>
-              <a:t>    </a:t>
-            </a:r>
-            <a:r>
-              <a:rPr sz="1100" dirty="0" err="1"/>
-              <a:t>tx</a:t>
-            </a:r>
-            <a:r>
-              <a:rPr sz="1100" dirty="0"/>
-              <a:t>, ty = ox + </a:t>
-            </a:r>
-            <a:r>
-              <a:rPr sz="1100" dirty="0" err="1"/>
-              <a:t>sx</a:t>
-            </a:r>
-            <a:r>
-              <a:rPr sz="1100" dirty="0"/>
-              <a:t>/2, oy + </a:t>
-            </a:r>
-            <a:r>
-              <a:rPr sz="1100" dirty="0" err="1"/>
-              <a:t>sy</a:t>
-            </a:r>
-            <a:r>
-              <a:rPr sz="1100" dirty="0"/>
-              <a:t>/2</a:t>
+              <a:t>    print("⚠️  Did not converge in 20 iterations – try adjusting GAIN")</a:t>
             </a:r>
           </a:p>
         </p:txBody>
@@ -11926,7 +12276,7 @@
         <p:spPr>
           <a:xfrm>
             <a:off x="548640" y="274320"/>
-            <a:ext cx="10972800" cy="731520"/>
+            <a:ext cx="10972800" cy="822960"/>
           </a:xfrm>
           <a:prstGeom prst="rect">
             <a:avLst/>
@@ -11940,7 +12290,7 @@
           <a:lstStyle/>
           <a:p>
             <a:pPr algn="l">
-              <a:defRPr sz="3200" b="1">
+              <a:defRPr sz="3400" b="1">
                 <a:solidFill>
                   <a:srgbClr val="00B4D8"/>
                 </a:solidFill>
@@ -11948,32 +12298,30 @@
               </a:defRPr>
             </a:pPr>
             <a:r>
-              <a:t>Solution – beam_center (2/2)</a:t>
-            </a:r>
-          </a:p>
-        </p:txBody>
-      </p:sp>
-      <p:sp>
-        <p:nvSpPr>
-          <p:cNvPr id="3" name="Rounded Rectangle 2"/>
+              <a:t>Exercise 4 – Try it yourself!</a:t>
+            </a:r>
+          </a:p>
+        </p:txBody>
+      </p:sp>
+      <p:sp>
+        <p:nvSpPr>
+          <p:cNvPr id="3" name="Rectangle 2"/>
           <p:cNvSpPr/>
           <p:nvPr/>
         </p:nvSpPr>
         <p:spPr>
           <a:xfrm>
-            <a:off x="548640" y="1188720"/>
-            <a:ext cx="11064240" cy="5120640"/>
-          </a:xfrm>
-          <a:prstGeom prst="roundRect">
+            <a:off x="548640" y="1051560"/>
+            <a:ext cx="4572000" cy="36576"/>
+          </a:xfrm>
+          <a:prstGeom prst="rect">
             <a:avLst/>
           </a:prstGeom>
           <a:solidFill>
-            <a:srgbClr val="0D1117"/>
+            <a:srgbClr val="48CAE4"/>
           </a:solidFill>
-          <a:ln w="12700">
-            <a:solidFill>
-              <a:srgbClr val="334455"/>
-            </a:solidFill>
+          <a:ln>
+            <a:noFill/>
           </a:ln>
         </p:spPr>
         <p:style>
@@ -12007,8 +12355,8 @@
         </p:nvSpPr>
         <p:spPr>
           <a:xfrm>
-            <a:off x="9601200" y="914400"/>
-            <a:ext cx="1828800" cy="320040"/>
+            <a:off x="731520" y="1371600"/>
+            <a:ext cx="10515600" cy="5029200"/>
           </a:xfrm>
           <a:prstGeom prst="rect">
             <a:avLst/>
@@ -12021,307 +12369,163 @@
           </a:bodyPr>
           <a:lstStyle/>
           <a:p>
-            <a:pPr algn="r">
-              <a:defRPr sz="1300" b="0">
-                <a:solidFill>
-                  <a:srgbClr val="48CAE4"/>
-                </a:solidFill>
-                <a:latin typeface="Calibri"/>
-              </a:defRPr>
-            </a:pPr>
-            <a:r>
-              <a:t>python</a:t>
-            </a:r>
-          </a:p>
-        </p:txBody>
-      </p:sp>
-      <p:sp>
-        <p:nvSpPr>
-          <p:cNvPr id="5" name="TextBox 4"/>
-          <p:cNvSpPr txBox="1"/>
-          <p:nvPr/>
-        </p:nvSpPr>
-        <p:spPr>
-          <a:xfrm>
-            <a:off x="822960" y="1371600"/>
-            <a:ext cx="10515600" cy="4754880"/>
-          </a:xfrm>
-          <a:prstGeom prst="rect">
-            <a:avLst/>
-          </a:prstGeom>
-          <a:noFill/>
-        </p:spPr>
-        <p:txBody>
-          <a:bodyPr wrap="square">
-            <a:spAutoFit/>
-          </a:bodyPr>
-          <a:lstStyle/>
-          <a:p>
-            <a:pPr>
-              <a:spcBef>
-                <a:spcPts val="200"/>
-              </a:spcBef>
-              <a:defRPr sz="1600">
-                <a:solidFill>
-                  <a:srgbClr val="ABB2BF"/>
-                </a:solidFill>
-                <a:latin typeface="Consolas"/>
-              </a:defRPr>
-            </a:pPr>
-            <a:r>
-              <a:t># Compute error</a:t>
-            </a:r>
-          </a:p>
-          <a:p>
-            <a:pPr>
-              <a:spcBef>
-                <a:spcPts val="200"/>
-              </a:spcBef>
-              <a:defRPr sz="1600">
-                <a:solidFill>
-                  <a:srgbClr val="ABB2BF"/>
-                </a:solidFill>
-                <a:latin typeface="Consolas"/>
-              </a:defRPr>
-            </a:pPr>
-            <a:r>
-              <a:t>    ex, ey = tx - cx, ty - cy</a:t>
-            </a:r>
-          </a:p>
-          <a:p>
-            <a:pPr>
-              <a:spcBef>
-                <a:spcPts val="200"/>
-              </a:spcBef>
-              <a:defRPr sz="1600">
-                <a:solidFill>
-                  <a:srgbClr val="ABB2BF"/>
-                </a:solidFill>
-                <a:latin typeface="Consolas"/>
-              </a:defRPr>
-            </a:pPr>
-            <a:r>
-              <a:t>    print(f"[{i}] centroid=({cx:.0f},{cy:.0f})  "</a:t>
-            </a:r>
-          </a:p>
-          <a:p>
-            <a:pPr>
-              <a:spcBef>
-                <a:spcPts val="200"/>
-              </a:spcBef>
-              <a:defRPr sz="1600">
-                <a:solidFill>
-                  <a:srgbClr val="ABB2BF"/>
-                </a:solidFill>
-                <a:latin typeface="Consolas"/>
-              </a:defRPr>
-            </a:pPr>
-            <a:r>
-              <a:t>          f"target=({tx:.0f},{ty:.0f})  err=({ex:.1f},{ey:.1f})")</a:t>
-            </a:r>
-          </a:p>
-          <a:p>
-            <a:pPr>
-              <a:spcBef>
-                <a:spcPts val="200"/>
-              </a:spcBef>
-              <a:defRPr sz="1600">
-                <a:solidFill>
-                  <a:srgbClr val="ABB2BF"/>
-                </a:solidFill>
-                <a:latin typeface="Consolas"/>
-              </a:defRPr>
-            </a:pPr>
-            <a:endParaRPr/>
-          </a:p>
-          <a:p>
-            <a:pPr>
-              <a:spcBef>
-                <a:spcPts val="200"/>
-              </a:spcBef>
-              <a:defRPr sz="1600">
-                <a:solidFill>
-                  <a:srgbClr val="ABB2BF"/>
-                </a:solidFill>
-                <a:latin typeface="Consolas"/>
-              </a:defRPr>
-            </a:pPr>
-            <a:r>
-              <a:t>    if abs(ex) &lt; TOLERANCE and abs(ey) &lt; TOLERANCE:</a:t>
-            </a:r>
-          </a:p>
-          <a:p>
-            <a:pPr>
-              <a:spcBef>
-                <a:spcPts val="200"/>
-              </a:spcBef>
-              <a:defRPr sz="1600">
-                <a:solidFill>
-                  <a:srgbClr val="ABB2BF"/>
-                </a:solidFill>
-                <a:latin typeface="Consolas"/>
-              </a:defRPr>
-            </a:pPr>
-            <a:r>
-              <a:t>        print(f"✅ Converged in {i+1} iterations!")</a:t>
-            </a:r>
-          </a:p>
-          <a:p>
-            <a:pPr>
-              <a:spcBef>
-                <a:spcPts val="200"/>
-              </a:spcBef>
-              <a:defRPr sz="1600">
-                <a:solidFill>
-                  <a:srgbClr val="ABB2BF"/>
-                </a:solidFill>
-                <a:latin typeface="Consolas"/>
-              </a:defRPr>
-            </a:pPr>
-            <a:r>
-              <a:t>        break</a:t>
-            </a:r>
-          </a:p>
-          <a:p>
-            <a:pPr>
-              <a:spcBef>
-                <a:spcPts val="200"/>
-              </a:spcBef>
-              <a:defRPr sz="1600">
-                <a:solidFill>
-                  <a:srgbClr val="ABB2BF"/>
-                </a:solidFill>
-                <a:latin typeface="Consolas"/>
-              </a:defRPr>
-            </a:pPr>
-            <a:endParaRPr/>
-          </a:p>
-          <a:p>
-            <a:pPr>
-              <a:spcBef>
-                <a:spcPts val="200"/>
-              </a:spcBef>
-              <a:defRPr sz="1600">
-                <a:solidFill>
-                  <a:srgbClr val="ABB2BF"/>
-                </a:solidFill>
-                <a:latin typeface="Consolas"/>
-              </a:defRPr>
-            </a:pPr>
-            <a:r>
-              <a:t>    # Move motors</a:t>
-            </a:r>
-          </a:p>
-          <a:p>
-            <a:pPr>
-              <a:spcBef>
-                <a:spcPts val="200"/>
-              </a:spcBef>
-              <a:defRPr sz="1600">
-                <a:solidFill>
-                  <a:srgbClr val="ABB2BF"/>
-                </a:solidFill>
-                <a:latin typeface="Consolas"/>
-              </a:defRPr>
-            </a:pPr>
-            <a:r>
-              <a:t>    cur_x = ctx.get(f'{MOTX}')</a:t>
-            </a:r>
-          </a:p>
-          <a:p>
-            <a:pPr>
-              <a:spcBef>
-                <a:spcPts val="200"/>
-              </a:spcBef>
-              <a:defRPr sz="1600">
-                <a:solidFill>
-                  <a:srgbClr val="ABB2BF"/>
-                </a:solidFill>
-                <a:latin typeface="Consolas"/>
-              </a:defRPr>
-            </a:pPr>
-            <a:r>
-              <a:t>    cur_y = ctx.get(f'{MOTY}')</a:t>
-            </a:r>
-          </a:p>
-          <a:p>
-            <a:pPr>
-              <a:spcBef>
-                <a:spcPts val="200"/>
-              </a:spcBef>
-              <a:defRPr sz="1600">
-                <a:solidFill>
-                  <a:srgbClr val="ABB2BF"/>
-                </a:solidFill>
-                <a:latin typeface="Consolas"/>
-              </a:defRPr>
-            </a:pPr>
-            <a:r>
-              <a:t>    ctx.put(f'{MOTX}', cur_x + ex * GAIN)</a:t>
-            </a:r>
-          </a:p>
-          <a:p>
-            <a:pPr>
-              <a:spcBef>
-                <a:spcPts val="200"/>
-              </a:spcBef>
-              <a:defRPr sz="1600">
-                <a:solidFill>
-                  <a:srgbClr val="ABB2BF"/>
-                </a:solidFill>
-                <a:latin typeface="Consolas"/>
-              </a:defRPr>
-            </a:pPr>
-            <a:r>
-              <a:t>    ctx.put(f'{MOTY}', cur_y + ey * GAIN)</a:t>
-            </a:r>
-          </a:p>
-          <a:p>
-            <a:pPr>
-              <a:spcBef>
-                <a:spcPts val="200"/>
-              </a:spcBef>
-              <a:defRPr sz="1600">
-                <a:solidFill>
-                  <a:srgbClr val="ABB2BF"/>
-                </a:solidFill>
-                <a:latin typeface="Consolas"/>
-              </a:defRPr>
-            </a:pPr>
-            <a:r>
-              <a:t>    time.sleep(1.5)  # wait for motors + new image</a:t>
-            </a:r>
-          </a:p>
-          <a:p>
-            <a:pPr>
-              <a:spcBef>
-                <a:spcPts val="200"/>
-              </a:spcBef>
-              <a:defRPr sz="1600">
-                <a:solidFill>
-                  <a:srgbClr val="ABB2BF"/>
-                </a:solidFill>
-                <a:latin typeface="Consolas"/>
-              </a:defRPr>
-            </a:pPr>
-            <a:r>
-              <a:t>else:</a:t>
-            </a:r>
-          </a:p>
-          <a:p>
-            <a:pPr>
-              <a:spcBef>
-                <a:spcPts val="200"/>
-              </a:spcBef>
-              <a:defRPr sz="1600">
-                <a:solidFill>
-                  <a:srgbClr val="ABB2BF"/>
-                </a:solidFill>
-                <a:latin typeface="Consolas"/>
-              </a:defRPr>
-            </a:pPr>
-            <a:r>
-              <a:t>    print("⚠️  Did not converge in 20 iterations – try adjusting GAIN")</a:t>
+            <a:pPr>
+              <a:spcBef>
+                <a:spcPts val="800"/>
+              </a:spcBef>
+              <a:defRPr sz="2200">
+                <a:solidFill>
+                  <a:srgbClr val="FFFFFF"/>
+                </a:solidFill>
+                <a:latin typeface="Calibri"/>
+              </a:defRPr>
+            </a:pPr>
+            <a:r>
+              <a:t>▸  1. In Phoebus: set overlay 1 somewhere on the camera image</a:t>
+            </a:r>
+          </a:p>
+          <a:p>
+            <a:pPr>
+              <a:spcBef>
+                <a:spcPts val="800"/>
+              </a:spcBef>
+              <a:defRPr sz="2200">
+                <a:solidFill>
+                  <a:srgbClr val="FFFFFF"/>
+                </a:solidFill>
+                <a:latin typeface="Calibri"/>
+              </a:defRPr>
+            </a:pPr>
+            <a:r>
+              <a:t>▸  2. In Jupyter: create a 'beam_center' notebook</a:t>
+            </a:r>
+          </a:p>
+          <a:p>
+            <a:pPr>
+              <a:spcBef>
+                <a:spcPts val="800"/>
+              </a:spcBef>
+              <a:defRPr sz="2200">
+                <a:solidFill>
+                  <a:srgbClr val="FFFFFF"/>
+                </a:solidFill>
+                <a:latin typeface="Calibri"/>
+              </a:defRPr>
+            </a:pPr>
+            <a:r>
+              <a:t>▸  3. Implement the closed loop (use the skeleton or write your own)</a:t>
+            </a:r>
+          </a:p>
+          <a:p>
+            <a:pPr>
+              <a:spcBef>
+                <a:spcPts val="800"/>
+              </a:spcBef>
+              <a:defRPr sz="2200">
+                <a:solidFill>
+                  <a:srgbClr val="FFFFFF"/>
+                </a:solidFill>
+                <a:latin typeface="Calibri"/>
+              </a:defRPr>
+            </a:pPr>
+            <a:r>
+              <a:t>▸  4. Run it and watch the beam move in the camera panel!</a:t>
+            </a:r>
+          </a:p>
+          <a:p>
+            <a:pPr>
+              <a:spcBef>
+                <a:spcPts val="800"/>
+              </a:spcBef>
+              <a:defRPr sz="2200">
+                <a:solidFill>
+                  <a:srgbClr val="FFFFFF"/>
+                </a:solidFill>
+                <a:latin typeface="Calibri"/>
+              </a:defRPr>
+            </a:pPr>
+            <a:r>
+              <a:t>▸  </a:t>
+            </a:r>
+          </a:p>
+          <a:p>
+            <a:pPr>
+              <a:spcBef>
+                <a:spcPts val="800"/>
+              </a:spcBef>
+              <a:defRPr sz="2200">
+                <a:solidFill>
+                  <a:srgbClr val="FFFFFF"/>
+                </a:solidFill>
+                <a:latin typeface="Calibri"/>
+              </a:defRPr>
+            </a:pPr>
+            <a:r>
+              <a:t>▸  Experiment:</a:t>
+            </a:r>
+          </a:p>
+          <a:p>
+            <a:pPr>
+              <a:spcBef>
+                <a:spcPts val="800"/>
+              </a:spcBef>
+              <a:defRPr sz="1900">
+                <a:solidFill>
+                  <a:srgbClr val="CCCCCC"/>
+                </a:solidFill>
+                <a:latin typeface="Calibri"/>
+              </a:defRPr>
+            </a:pPr>
+            <a:r>
+              <a:t>     ‣  Change GAIN – what happens with 0.1? with 0.001?</a:t>
+            </a:r>
+          </a:p>
+          <a:p>
+            <a:pPr>
+              <a:spcBef>
+                <a:spcPts val="800"/>
+              </a:spcBef>
+              <a:defRPr sz="1900">
+                <a:solidFill>
+                  <a:srgbClr val="CCCCCC"/>
+                </a:solidFill>
+                <a:latin typeface="Calibri"/>
+              </a:defRPr>
+            </a:pPr>
+            <a:r>
+              <a:t>     ‣  Change TOLERANCE – can you get to 1 pixel?</a:t>
+            </a:r>
+          </a:p>
+          <a:p>
+            <a:pPr>
+              <a:spcBef>
+                <a:spcPts val="800"/>
+              </a:spcBef>
+              <a:defRPr sz="1900">
+                <a:solidFill>
+                  <a:srgbClr val="CCCCCC"/>
+                </a:solidFill>
+                <a:latin typeface="Calibri"/>
+              </a:defRPr>
+            </a:pPr>
+            <a:r>
+              <a:t>     ‣  Move the overlay to a different position and re-run</a:t>
+            </a:r>
+          </a:p>
+          <a:p>
+            <a:pPr>
+              <a:spcBef>
+                <a:spcPts val="800"/>
+              </a:spcBef>
+              <a:defRPr sz="1900">
+                <a:solidFill>
+                  <a:srgbClr val="CCCCCC"/>
+                </a:solidFill>
+                <a:latin typeface="Calibri"/>
+              </a:defRPr>
+            </a:pPr>
+            <a:r>
+              <a:t>     ‣  Add a plot of error vs. iteration (matplotlib)</a:t>
             </a:r>
           </a:p>
         </p:txBody>
@@ -12368,7 +12572,7 @@
         <p:spPr>
           <a:xfrm>
             <a:off x="548640" y="274320"/>
-            <a:ext cx="10972800" cy="822960"/>
+            <a:ext cx="10972800" cy="731520"/>
           </a:xfrm>
           <a:prstGeom prst="rect">
             <a:avLst/>
@@ -12382,7 +12586,7 @@
           <a:lstStyle/>
           <a:p>
             <a:pPr algn="l">
-              <a:defRPr sz="3400" b="1">
+              <a:defRPr sz="3200" b="1">
                 <a:solidFill>
                   <a:srgbClr val="00B4D8"/>
                 </a:solidFill>
@@ -12390,30 +12594,32 @@
               </a:defRPr>
             </a:pPr>
             <a:r>
-              <a:t>Exercise 4 – Try it yourself!</a:t>
-            </a:r>
-          </a:p>
-        </p:txBody>
-      </p:sp>
-      <p:sp>
-        <p:nvSpPr>
-          <p:cNvPr id="3" name="Rectangle 2"/>
+              <a:t>Bonus – Plot convergence</a:t>
+            </a:r>
+          </a:p>
+        </p:txBody>
+      </p:sp>
+      <p:sp>
+        <p:nvSpPr>
+          <p:cNvPr id="3" name="Rounded Rectangle 2"/>
           <p:cNvSpPr/>
           <p:nvPr/>
         </p:nvSpPr>
         <p:spPr>
           <a:xfrm>
-            <a:off x="548640" y="1051560"/>
-            <a:ext cx="4572000" cy="36576"/>
-          </a:xfrm>
-          <a:prstGeom prst="rect">
+            <a:off x="548640" y="1188720"/>
+            <a:ext cx="11064240" cy="5120640"/>
+          </a:xfrm>
+          <a:prstGeom prst="roundRect">
             <a:avLst/>
           </a:prstGeom>
           <a:solidFill>
-            <a:srgbClr val="48CAE4"/>
+            <a:srgbClr val="0D1117"/>
           </a:solidFill>
-          <a:ln>
-            <a:noFill/>
+          <a:ln w="12700">
+            <a:solidFill>
+              <a:srgbClr val="334455"/>
+            </a:solidFill>
           </a:ln>
         </p:spPr>
         <p:style>
@@ -12435,7 +12641,7 @@
           <a:lstStyle/>
           <a:p>
             <a:pPr algn="ctr"/>
-            <a:endParaRPr/>
+            <a:endParaRPr sz="1100"/>
           </a:p>
         </p:txBody>
       </p:sp>
@@ -12447,8 +12653,8 @@
         </p:nvSpPr>
         <p:spPr>
           <a:xfrm>
-            <a:off x="731520" y="1371600"/>
-            <a:ext cx="10515600" cy="5029200"/>
+            <a:off x="9601200" y="914400"/>
+            <a:ext cx="1828800" cy="320040"/>
           </a:xfrm>
           <a:prstGeom prst="rect">
             <a:avLst/>
@@ -12461,163 +12667,511 @@
           </a:bodyPr>
           <a:lstStyle/>
           <a:p>
-            <a:pPr>
-              <a:spcBef>
-                <a:spcPts val="800"/>
-              </a:spcBef>
-              <a:defRPr sz="2200">
-                <a:solidFill>
-                  <a:srgbClr val="FFFFFF"/>
-                </a:solidFill>
-                <a:latin typeface="Calibri"/>
-              </a:defRPr>
-            </a:pPr>
-            <a:r>
-              <a:t>▸  1. In Phoebus: set overlay 1 somewhere on the camera image</a:t>
-            </a:r>
-          </a:p>
-          <a:p>
-            <a:pPr>
-              <a:spcBef>
-                <a:spcPts val="800"/>
-              </a:spcBef>
-              <a:defRPr sz="2200">
-                <a:solidFill>
-                  <a:srgbClr val="FFFFFF"/>
-                </a:solidFill>
-                <a:latin typeface="Calibri"/>
-              </a:defRPr>
-            </a:pPr>
-            <a:r>
-              <a:t>▸  2. In Jupyter: create a 'beam_center' notebook</a:t>
-            </a:r>
-          </a:p>
-          <a:p>
-            <a:pPr>
-              <a:spcBef>
-                <a:spcPts val="800"/>
-              </a:spcBef>
-              <a:defRPr sz="2200">
-                <a:solidFill>
-                  <a:srgbClr val="FFFFFF"/>
-                </a:solidFill>
-                <a:latin typeface="Calibri"/>
-              </a:defRPr>
-            </a:pPr>
-            <a:r>
-              <a:t>▸  3. Implement the closed loop (use the skeleton or write your own)</a:t>
-            </a:r>
-          </a:p>
-          <a:p>
-            <a:pPr>
-              <a:spcBef>
-                <a:spcPts val="800"/>
-              </a:spcBef>
-              <a:defRPr sz="2200">
-                <a:solidFill>
-                  <a:srgbClr val="FFFFFF"/>
-                </a:solidFill>
-                <a:latin typeface="Calibri"/>
-              </a:defRPr>
-            </a:pPr>
-            <a:r>
-              <a:t>▸  4. Run it and watch the beam move in the camera panel!</a:t>
-            </a:r>
-          </a:p>
-          <a:p>
-            <a:pPr>
-              <a:spcBef>
-                <a:spcPts val="800"/>
-              </a:spcBef>
-              <a:defRPr sz="2200">
-                <a:solidFill>
-                  <a:srgbClr val="FFFFFF"/>
-                </a:solidFill>
-                <a:latin typeface="Calibri"/>
-              </a:defRPr>
-            </a:pPr>
-            <a:r>
-              <a:t>▸  </a:t>
-            </a:r>
-          </a:p>
-          <a:p>
-            <a:pPr>
-              <a:spcBef>
-                <a:spcPts val="800"/>
-              </a:spcBef>
-              <a:defRPr sz="2200">
-                <a:solidFill>
-                  <a:srgbClr val="FFFFFF"/>
-                </a:solidFill>
-                <a:latin typeface="Calibri"/>
-              </a:defRPr>
-            </a:pPr>
-            <a:r>
-              <a:t>▸  Experiment:</a:t>
-            </a:r>
-          </a:p>
-          <a:p>
-            <a:pPr>
-              <a:spcBef>
-                <a:spcPts val="800"/>
-              </a:spcBef>
-              <a:defRPr sz="1900">
-                <a:solidFill>
-                  <a:srgbClr val="CCCCCC"/>
-                </a:solidFill>
-                <a:latin typeface="Calibri"/>
-              </a:defRPr>
-            </a:pPr>
-            <a:r>
-              <a:t>     ‣  Change GAIN – what happens with 0.1? with 0.001?</a:t>
-            </a:r>
-          </a:p>
-          <a:p>
-            <a:pPr>
-              <a:spcBef>
-                <a:spcPts val="800"/>
-              </a:spcBef>
-              <a:defRPr sz="1900">
-                <a:solidFill>
-                  <a:srgbClr val="CCCCCC"/>
-                </a:solidFill>
-                <a:latin typeface="Calibri"/>
-              </a:defRPr>
-            </a:pPr>
-            <a:r>
-              <a:t>     ‣  Change TOLERANCE – can you get to 1 pixel?</a:t>
-            </a:r>
-          </a:p>
-          <a:p>
-            <a:pPr>
-              <a:spcBef>
-                <a:spcPts val="800"/>
-              </a:spcBef>
-              <a:defRPr sz="1900">
-                <a:solidFill>
-                  <a:srgbClr val="CCCCCC"/>
-                </a:solidFill>
-                <a:latin typeface="Calibri"/>
-              </a:defRPr>
-            </a:pPr>
-            <a:r>
-              <a:t>     ‣  Move the overlay to a different position and re-run</a:t>
-            </a:r>
-          </a:p>
-          <a:p>
-            <a:pPr>
-              <a:spcBef>
-                <a:spcPts val="800"/>
-              </a:spcBef>
-              <a:defRPr sz="1900">
-                <a:solidFill>
-                  <a:srgbClr val="CCCCCC"/>
-                </a:solidFill>
-                <a:latin typeface="Calibri"/>
-              </a:defRPr>
-            </a:pPr>
-            <a:r>
-              <a:t>     ‣  Add a plot of error vs. iteration (matplotlib)</a:t>
+            <a:pPr algn="r">
+              <a:defRPr sz="1300" b="0">
+                <a:solidFill>
+                  <a:srgbClr val="48CAE4"/>
+                </a:solidFill>
+                <a:latin typeface="Calibri"/>
+              </a:defRPr>
+            </a:pPr>
+            <a:r>
+              <a:t>python</a:t>
+            </a:r>
+          </a:p>
+        </p:txBody>
+      </p:sp>
+      <p:sp>
+        <p:nvSpPr>
+          <p:cNvPr id="5" name="TextBox 4"/>
+          <p:cNvSpPr txBox="1"/>
+          <p:nvPr/>
+        </p:nvSpPr>
+        <p:spPr>
+          <a:xfrm>
+            <a:off x="822960" y="1371600"/>
+            <a:ext cx="10515600" cy="5042406"/>
+          </a:xfrm>
+          <a:prstGeom prst="rect">
+            <a:avLst/>
+          </a:prstGeom>
+          <a:noFill/>
+        </p:spPr>
+        <p:txBody>
+          <a:bodyPr wrap="square">
+            <a:spAutoFit/>
+          </a:bodyPr>
+          <a:lstStyle/>
+          <a:p>
+            <a:pPr>
+              <a:spcBef>
+                <a:spcPts val="200"/>
+              </a:spcBef>
+              <a:defRPr sz="1600">
+                <a:solidFill>
+                  <a:srgbClr val="ABB2BF"/>
+                </a:solidFill>
+                <a:latin typeface="Consolas"/>
+              </a:defRPr>
+            </a:pPr>
+            <a:r>
+              <a:rPr sz="1400" dirty="0"/>
+              <a:t>import </a:t>
+            </a:r>
+            <a:r>
+              <a:rPr sz="1400" dirty="0" err="1"/>
+              <a:t>matplotlib.pyplot</a:t>
+            </a:r>
+            <a:r>
+              <a:rPr sz="1400" dirty="0"/>
+              <a:t> as </a:t>
+            </a:r>
+            <a:r>
+              <a:rPr sz="1400" dirty="0" err="1"/>
+              <a:t>plt</a:t>
+            </a:r>
+            <a:endParaRPr sz="1400" dirty="0"/>
+          </a:p>
+          <a:p>
+            <a:pPr>
+              <a:spcBef>
+                <a:spcPts val="200"/>
+              </a:spcBef>
+              <a:defRPr sz="1600">
+                <a:solidFill>
+                  <a:srgbClr val="ABB2BF"/>
+                </a:solidFill>
+                <a:latin typeface="Consolas"/>
+              </a:defRPr>
+            </a:pPr>
+            <a:endParaRPr sz="1400" dirty="0"/>
+          </a:p>
+          <a:p>
+            <a:pPr>
+              <a:spcBef>
+                <a:spcPts val="200"/>
+              </a:spcBef>
+              <a:defRPr sz="1600">
+                <a:solidFill>
+                  <a:srgbClr val="ABB2BF"/>
+                </a:solidFill>
+                <a:latin typeface="Consolas"/>
+              </a:defRPr>
+            </a:pPr>
+            <a:r>
+              <a:rPr sz="1400" dirty="0"/>
+              <a:t># (after running the loop, collect errors in a list)</a:t>
+            </a:r>
+          </a:p>
+          <a:p>
+            <a:pPr>
+              <a:spcBef>
+                <a:spcPts val="200"/>
+              </a:spcBef>
+              <a:defRPr sz="1600">
+                <a:solidFill>
+                  <a:srgbClr val="ABB2BF"/>
+                </a:solidFill>
+                <a:latin typeface="Consolas"/>
+              </a:defRPr>
+            </a:pPr>
+            <a:r>
+              <a:rPr sz="1400" dirty="0" err="1"/>
+              <a:t>errors_x</a:t>
+            </a:r>
+            <a:r>
+              <a:rPr sz="1400" dirty="0"/>
+              <a:t> = []  # append ex each iteration</a:t>
+            </a:r>
+          </a:p>
+          <a:p>
+            <a:pPr>
+              <a:spcBef>
+                <a:spcPts val="200"/>
+              </a:spcBef>
+              <a:defRPr sz="1600">
+                <a:solidFill>
+                  <a:srgbClr val="ABB2BF"/>
+                </a:solidFill>
+                <a:latin typeface="Consolas"/>
+              </a:defRPr>
+            </a:pPr>
+            <a:r>
+              <a:rPr sz="1400" dirty="0" err="1"/>
+              <a:t>errors_y</a:t>
+            </a:r>
+            <a:r>
+              <a:rPr sz="1400" dirty="0"/>
+              <a:t> = []  # append </a:t>
+            </a:r>
+            <a:r>
+              <a:rPr sz="1400" dirty="0" err="1"/>
+              <a:t>ey</a:t>
+            </a:r>
+            <a:r>
+              <a:rPr sz="1400" dirty="0"/>
+              <a:t> each iteration</a:t>
+            </a:r>
+          </a:p>
+          <a:p>
+            <a:pPr>
+              <a:spcBef>
+                <a:spcPts val="200"/>
+              </a:spcBef>
+              <a:defRPr sz="1600">
+                <a:solidFill>
+                  <a:srgbClr val="ABB2BF"/>
+                </a:solidFill>
+                <a:latin typeface="Consolas"/>
+              </a:defRPr>
+            </a:pPr>
+            <a:endParaRPr sz="1400" dirty="0"/>
+          </a:p>
+          <a:p>
+            <a:pPr>
+              <a:spcBef>
+                <a:spcPts val="200"/>
+              </a:spcBef>
+              <a:defRPr sz="1600">
+                <a:solidFill>
+                  <a:srgbClr val="ABB2BF"/>
+                </a:solidFill>
+                <a:latin typeface="Consolas"/>
+              </a:defRPr>
+            </a:pPr>
+            <a:r>
+              <a:rPr sz="1400" dirty="0"/>
+              <a:t># ... run your loop, collecting errors ...</a:t>
+            </a:r>
+          </a:p>
+          <a:p>
+            <a:pPr>
+              <a:spcBef>
+                <a:spcPts val="200"/>
+              </a:spcBef>
+              <a:defRPr sz="1600">
+                <a:solidFill>
+                  <a:srgbClr val="ABB2BF"/>
+                </a:solidFill>
+                <a:latin typeface="Consolas"/>
+              </a:defRPr>
+            </a:pPr>
+            <a:endParaRPr sz="1400" dirty="0"/>
+          </a:p>
+          <a:p>
+            <a:pPr>
+              <a:spcBef>
+                <a:spcPts val="200"/>
+              </a:spcBef>
+              <a:defRPr sz="1600">
+                <a:solidFill>
+                  <a:srgbClr val="ABB2BF"/>
+                </a:solidFill>
+                <a:latin typeface="Consolas"/>
+              </a:defRPr>
+            </a:pPr>
+            <a:r>
+              <a:rPr sz="1400" dirty="0" err="1"/>
+              <a:t>plt.figure</a:t>
+            </a:r>
+            <a:r>
+              <a:rPr sz="1400" dirty="0"/>
+              <a:t>(</a:t>
+            </a:r>
+            <a:r>
+              <a:rPr sz="1400" dirty="0" err="1"/>
+              <a:t>figsize</a:t>
+            </a:r>
+            <a:r>
+              <a:rPr sz="1400" dirty="0"/>
+              <a:t>=(8, 4))</a:t>
+            </a:r>
+          </a:p>
+          <a:p>
+            <a:pPr>
+              <a:spcBef>
+                <a:spcPts val="200"/>
+              </a:spcBef>
+              <a:defRPr sz="1600">
+                <a:solidFill>
+                  <a:srgbClr val="ABB2BF"/>
+                </a:solidFill>
+                <a:latin typeface="Consolas"/>
+              </a:defRPr>
+            </a:pPr>
+            <a:r>
+              <a:rPr sz="1400" dirty="0" err="1"/>
+              <a:t>plt.plot</a:t>
+            </a:r>
+            <a:r>
+              <a:rPr sz="1400" dirty="0"/>
+              <a:t>(</a:t>
+            </a:r>
+            <a:r>
+              <a:rPr sz="1400" dirty="0" err="1"/>
+              <a:t>errors_x</a:t>
+            </a:r>
+            <a:r>
+              <a:rPr sz="1400" dirty="0"/>
+              <a:t>, label='Error X (</a:t>
+            </a:r>
+            <a:r>
+              <a:rPr sz="1400" dirty="0" err="1"/>
+              <a:t>px</a:t>
+            </a:r>
+            <a:r>
+              <a:rPr sz="1400" dirty="0"/>
+              <a:t>)')</a:t>
+            </a:r>
+          </a:p>
+          <a:p>
+            <a:pPr>
+              <a:spcBef>
+                <a:spcPts val="200"/>
+              </a:spcBef>
+              <a:defRPr sz="1600">
+                <a:solidFill>
+                  <a:srgbClr val="ABB2BF"/>
+                </a:solidFill>
+                <a:latin typeface="Consolas"/>
+              </a:defRPr>
+            </a:pPr>
+            <a:r>
+              <a:rPr sz="1400" dirty="0" err="1"/>
+              <a:t>plt.plot</a:t>
+            </a:r>
+            <a:r>
+              <a:rPr sz="1400" dirty="0"/>
+              <a:t>(</a:t>
+            </a:r>
+            <a:r>
+              <a:rPr sz="1400" dirty="0" err="1"/>
+              <a:t>errors_y</a:t>
+            </a:r>
+            <a:r>
+              <a:rPr sz="1400" dirty="0"/>
+              <a:t>, label='Error Y (</a:t>
+            </a:r>
+            <a:r>
+              <a:rPr sz="1400" dirty="0" err="1"/>
+              <a:t>px</a:t>
+            </a:r>
+            <a:r>
+              <a:rPr sz="1400" dirty="0"/>
+              <a:t>)')</a:t>
+            </a:r>
+          </a:p>
+          <a:p>
+            <a:pPr>
+              <a:spcBef>
+                <a:spcPts val="200"/>
+              </a:spcBef>
+              <a:defRPr sz="1600">
+                <a:solidFill>
+                  <a:srgbClr val="ABB2BF"/>
+                </a:solidFill>
+                <a:latin typeface="Consolas"/>
+              </a:defRPr>
+            </a:pPr>
+            <a:r>
+              <a:rPr sz="1400" dirty="0" err="1"/>
+              <a:t>plt.axhline</a:t>
+            </a:r>
+            <a:r>
+              <a:rPr sz="1400" dirty="0"/>
+              <a:t>(y=0, color='gray', </a:t>
+            </a:r>
+            <a:r>
+              <a:rPr sz="1400" dirty="0" err="1"/>
+              <a:t>linestyle</a:t>
+            </a:r>
+            <a:r>
+              <a:rPr sz="1400" dirty="0"/>
+              <a:t>='--')</a:t>
+            </a:r>
+          </a:p>
+          <a:p>
+            <a:pPr>
+              <a:spcBef>
+                <a:spcPts val="200"/>
+              </a:spcBef>
+              <a:defRPr sz="1600">
+                <a:solidFill>
+                  <a:srgbClr val="ABB2BF"/>
+                </a:solidFill>
+                <a:latin typeface="Consolas"/>
+              </a:defRPr>
+            </a:pPr>
+            <a:r>
+              <a:rPr sz="1400" dirty="0" err="1"/>
+              <a:t>plt.axhline</a:t>
+            </a:r>
+            <a:r>
+              <a:rPr sz="1400" dirty="0"/>
+              <a:t>(y=TOLERANCE, color='red', </a:t>
+            </a:r>
+            <a:r>
+              <a:rPr sz="1400" dirty="0" err="1"/>
+              <a:t>linestyle</a:t>
+            </a:r>
+            <a:r>
+              <a:rPr sz="1400" dirty="0"/>
+              <a:t>=':', alpha=0.5)</a:t>
+            </a:r>
+          </a:p>
+          <a:p>
+            <a:pPr>
+              <a:spcBef>
+                <a:spcPts val="200"/>
+              </a:spcBef>
+              <a:defRPr sz="1600">
+                <a:solidFill>
+                  <a:srgbClr val="ABB2BF"/>
+                </a:solidFill>
+                <a:latin typeface="Consolas"/>
+              </a:defRPr>
+            </a:pPr>
+            <a:r>
+              <a:rPr sz="1400" dirty="0" err="1"/>
+              <a:t>plt.axhline</a:t>
+            </a:r>
+            <a:r>
+              <a:rPr sz="1400" dirty="0"/>
+              <a:t>(y=-TOLERANCE, color='red', </a:t>
+            </a:r>
+            <a:r>
+              <a:rPr sz="1400" dirty="0" err="1"/>
+              <a:t>linestyle</a:t>
+            </a:r>
+            <a:r>
+              <a:rPr sz="1400" dirty="0"/>
+              <a:t>=':', alpha=0.5)</a:t>
+            </a:r>
+          </a:p>
+          <a:p>
+            <a:pPr>
+              <a:spcBef>
+                <a:spcPts val="200"/>
+              </a:spcBef>
+              <a:defRPr sz="1600">
+                <a:solidFill>
+                  <a:srgbClr val="ABB2BF"/>
+                </a:solidFill>
+                <a:latin typeface="Consolas"/>
+              </a:defRPr>
+            </a:pPr>
+            <a:r>
+              <a:rPr sz="1400" dirty="0" err="1"/>
+              <a:t>plt.xlabel</a:t>
+            </a:r>
+            <a:r>
+              <a:rPr sz="1400" dirty="0"/>
+              <a:t>('Iteration')</a:t>
+            </a:r>
+          </a:p>
+          <a:p>
+            <a:pPr>
+              <a:spcBef>
+                <a:spcPts val="200"/>
+              </a:spcBef>
+              <a:defRPr sz="1600">
+                <a:solidFill>
+                  <a:srgbClr val="ABB2BF"/>
+                </a:solidFill>
+                <a:latin typeface="Consolas"/>
+              </a:defRPr>
+            </a:pPr>
+            <a:r>
+              <a:rPr sz="1400" dirty="0" err="1"/>
+              <a:t>plt.ylabel</a:t>
+            </a:r>
+            <a:r>
+              <a:rPr sz="1400" dirty="0"/>
+              <a:t>('Error (pixels)')</a:t>
+            </a:r>
+          </a:p>
+          <a:p>
+            <a:pPr>
+              <a:spcBef>
+                <a:spcPts val="200"/>
+              </a:spcBef>
+              <a:defRPr sz="1600">
+                <a:solidFill>
+                  <a:srgbClr val="ABB2BF"/>
+                </a:solidFill>
+                <a:latin typeface="Consolas"/>
+              </a:defRPr>
+            </a:pPr>
+            <a:r>
+              <a:rPr sz="1400" dirty="0" err="1"/>
+              <a:t>plt.title</a:t>
+            </a:r>
+            <a:r>
+              <a:rPr sz="1400" dirty="0"/>
+              <a:t>('Beam Center Convergence')</a:t>
+            </a:r>
+          </a:p>
+          <a:p>
+            <a:pPr>
+              <a:spcBef>
+                <a:spcPts val="200"/>
+              </a:spcBef>
+              <a:defRPr sz="1600">
+                <a:solidFill>
+                  <a:srgbClr val="ABB2BF"/>
+                </a:solidFill>
+                <a:latin typeface="Consolas"/>
+              </a:defRPr>
+            </a:pPr>
+            <a:r>
+              <a:rPr sz="1400" dirty="0" err="1"/>
+              <a:t>plt.legend</a:t>
+            </a:r>
+            <a:r>
+              <a:rPr sz="1400" dirty="0"/>
+              <a:t>()</a:t>
+            </a:r>
+          </a:p>
+          <a:p>
+            <a:pPr>
+              <a:spcBef>
+                <a:spcPts val="200"/>
+              </a:spcBef>
+              <a:defRPr sz="1600">
+                <a:solidFill>
+                  <a:srgbClr val="ABB2BF"/>
+                </a:solidFill>
+                <a:latin typeface="Consolas"/>
+              </a:defRPr>
+            </a:pPr>
+            <a:r>
+              <a:rPr sz="1400" dirty="0" err="1"/>
+              <a:t>plt.grid</a:t>
+            </a:r>
+            <a:r>
+              <a:rPr sz="1400" dirty="0"/>
+              <a:t>(True, alpha=0.3)</a:t>
+            </a:r>
+          </a:p>
+          <a:p>
+            <a:pPr>
+              <a:spcBef>
+                <a:spcPts val="200"/>
+              </a:spcBef>
+              <a:defRPr sz="1600">
+                <a:solidFill>
+                  <a:srgbClr val="ABB2BF"/>
+                </a:solidFill>
+                <a:latin typeface="Consolas"/>
+              </a:defRPr>
+            </a:pPr>
+            <a:r>
+              <a:rPr sz="1400" dirty="0" err="1"/>
+              <a:t>plt.show</a:t>
+            </a:r>
+            <a:r>
+              <a:rPr sz="1400" dirty="0"/>
+              <a:t>()</a:t>
             </a:r>
           </a:p>
         </p:txBody>
@@ -12657,61 +13211,23 @@
       </p:grpSpPr>
       <p:sp>
         <p:nvSpPr>
-          <p:cNvPr id="2" name="TextBox 1"/>
-          <p:cNvSpPr txBox="1"/>
+          <p:cNvPr id="2" name="Rectangle 1"/>
+          <p:cNvSpPr/>
           <p:nvPr/>
         </p:nvSpPr>
         <p:spPr>
           <a:xfrm>
-            <a:off x="548640" y="274320"/>
-            <a:ext cx="10972800" cy="731520"/>
+            <a:off x="0" y="2926080"/>
+            <a:ext cx="12191695" cy="54864"/>
           </a:xfrm>
           <a:prstGeom prst="rect">
             <a:avLst/>
           </a:prstGeom>
-          <a:noFill/>
-        </p:spPr>
-        <p:txBody>
-          <a:bodyPr wrap="square">
-            <a:spAutoFit/>
-          </a:bodyPr>
-          <a:lstStyle/>
-          <a:p>
-            <a:pPr algn="l">
-              <a:defRPr sz="3200" b="1">
-                <a:solidFill>
-                  <a:srgbClr val="00B4D8"/>
-                </a:solidFill>
-                <a:latin typeface="Calibri"/>
-              </a:defRPr>
-            </a:pPr>
-            <a:r>
-              <a:t>Bonus – Plot convergence</a:t>
-            </a:r>
-          </a:p>
-        </p:txBody>
-      </p:sp>
-      <p:sp>
-        <p:nvSpPr>
-          <p:cNvPr id="3" name="Rounded Rectangle 2"/>
-          <p:cNvSpPr/>
-          <p:nvPr/>
-        </p:nvSpPr>
-        <p:spPr>
-          <a:xfrm>
-            <a:off x="548640" y="1188720"/>
-            <a:ext cx="11064240" cy="5120640"/>
-          </a:xfrm>
-          <a:prstGeom prst="roundRect">
-            <a:avLst/>
-          </a:prstGeom>
           <a:solidFill>
-            <a:srgbClr val="0D1117"/>
+            <a:srgbClr val="00B4D8"/>
           </a:solidFill>
-          <a:ln w="12700">
-            <a:solidFill>
-              <a:srgbClr val="334455"/>
-            </a:solidFill>
+          <a:ln>
+            <a:noFill/>
           </a:ln>
         </p:spPr>
         <p:style>
@@ -12733,20 +13249,20 @@
           <a:lstStyle/>
           <a:p>
             <a:pPr algn="ctr"/>
-            <a:endParaRPr sz="1100"/>
-          </a:p>
-        </p:txBody>
-      </p:sp>
-      <p:sp>
-        <p:nvSpPr>
-          <p:cNvPr id="4" name="TextBox 3"/>
+            <a:endParaRPr/>
+          </a:p>
+        </p:txBody>
+      </p:sp>
+      <p:sp>
+        <p:nvSpPr>
+          <p:cNvPr id="3" name="TextBox 2"/>
           <p:cNvSpPr txBox="1"/>
           <p:nvPr/>
         </p:nvSpPr>
         <p:spPr>
           <a:xfrm>
-            <a:off x="9601200" y="914400"/>
-            <a:ext cx="1828800" cy="320040"/>
+            <a:off x="731520" y="1828800"/>
+            <a:ext cx="10515600" cy="1097280"/>
           </a:xfrm>
           <a:prstGeom prst="rect">
             <a:avLst/>
@@ -12759,30 +13275,30 @@
           </a:bodyPr>
           <a:lstStyle/>
           <a:p>
-            <a:pPr algn="r">
-              <a:defRPr sz="1300" b="0">
-                <a:solidFill>
-                  <a:srgbClr val="48CAE4"/>
-                </a:solidFill>
-                <a:latin typeface="Calibri"/>
-              </a:defRPr>
-            </a:pPr>
-            <a:r>
-              <a:t>python</a:t>
-            </a:r>
-          </a:p>
-        </p:txBody>
-      </p:sp>
-      <p:sp>
-        <p:nvSpPr>
-          <p:cNvPr id="5" name="TextBox 4"/>
+            <a:pPr algn="ctr">
+              <a:defRPr sz="4000" b="1">
+                <a:solidFill>
+                  <a:srgbClr val="00B4D8"/>
+                </a:solidFill>
+                <a:latin typeface="Calibri"/>
+              </a:defRPr>
+            </a:pPr>
+            <a:r>
+              <a:t>Part 5 – Real Hardware!</a:t>
+            </a:r>
+          </a:p>
+        </p:txBody>
+      </p:sp>
+      <p:sp>
+        <p:nvSpPr>
+          <p:cNvPr id="4" name="TextBox 3"/>
           <p:cNvSpPr txBox="1"/>
           <p:nvPr/>
         </p:nvSpPr>
         <p:spPr>
           <a:xfrm>
-            <a:off x="822960" y="1371600"/>
-            <a:ext cx="10515600" cy="5042406"/>
+            <a:off x="1371600" y="3291840"/>
+            <a:ext cx="9144000" cy="914400"/>
           </a:xfrm>
           <a:prstGeom prst="rect">
             <a:avLst/>
@@ -12795,475 +13311,16 @@
           </a:bodyPr>
           <a:lstStyle/>
           <a:p>
-            <a:pPr>
-              <a:spcBef>
-                <a:spcPts val="200"/>
-              </a:spcBef>
-              <a:defRPr sz="1600">
-                <a:solidFill>
-                  <a:srgbClr val="ABB2BF"/>
-                </a:solidFill>
-                <a:latin typeface="Consolas"/>
-              </a:defRPr>
-            </a:pPr>
-            <a:r>
-              <a:rPr sz="1400" dirty="0"/>
-              <a:t>import </a:t>
-            </a:r>
-            <a:r>
-              <a:rPr sz="1400" dirty="0" err="1"/>
-              <a:t>matplotlib.pyplot</a:t>
-            </a:r>
-            <a:r>
-              <a:rPr sz="1400" dirty="0"/>
-              <a:t> as </a:t>
-            </a:r>
-            <a:r>
-              <a:rPr sz="1400" dirty="0" err="1"/>
-              <a:t>plt</a:t>
-            </a:r>
-            <a:endParaRPr sz="1400" dirty="0"/>
-          </a:p>
-          <a:p>
-            <a:pPr>
-              <a:spcBef>
-                <a:spcPts val="200"/>
-              </a:spcBef>
-              <a:defRPr sz="1600">
-                <a:solidFill>
-                  <a:srgbClr val="ABB2BF"/>
-                </a:solidFill>
-                <a:latin typeface="Consolas"/>
-              </a:defRPr>
-            </a:pPr>
-            <a:endParaRPr sz="1400" dirty="0"/>
-          </a:p>
-          <a:p>
-            <a:pPr>
-              <a:spcBef>
-                <a:spcPts val="200"/>
-              </a:spcBef>
-              <a:defRPr sz="1600">
-                <a:solidFill>
-                  <a:srgbClr val="ABB2BF"/>
-                </a:solidFill>
-                <a:latin typeface="Consolas"/>
-              </a:defRPr>
-            </a:pPr>
-            <a:r>
-              <a:rPr sz="1400" dirty="0"/>
-              <a:t># (after running the loop, collect errors in a list)</a:t>
-            </a:r>
-          </a:p>
-          <a:p>
-            <a:pPr>
-              <a:spcBef>
-                <a:spcPts val="200"/>
-              </a:spcBef>
-              <a:defRPr sz="1600">
-                <a:solidFill>
-                  <a:srgbClr val="ABB2BF"/>
-                </a:solidFill>
-                <a:latin typeface="Consolas"/>
-              </a:defRPr>
-            </a:pPr>
-            <a:r>
-              <a:rPr sz="1400" dirty="0" err="1"/>
-              <a:t>errors_x</a:t>
-            </a:r>
-            <a:r>
-              <a:rPr sz="1400" dirty="0"/>
-              <a:t> = []  # append ex each iteration</a:t>
-            </a:r>
-          </a:p>
-          <a:p>
-            <a:pPr>
-              <a:spcBef>
-                <a:spcPts val="200"/>
-              </a:spcBef>
-              <a:defRPr sz="1600">
-                <a:solidFill>
-                  <a:srgbClr val="ABB2BF"/>
-                </a:solidFill>
-                <a:latin typeface="Consolas"/>
-              </a:defRPr>
-            </a:pPr>
-            <a:r>
-              <a:rPr sz="1400" dirty="0" err="1"/>
-              <a:t>errors_y</a:t>
-            </a:r>
-            <a:r>
-              <a:rPr sz="1400" dirty="0"/>
-              <a:t> = []  # append </a:t>
-            </a:r>
-            <a:r>
-              <a:rPr sz="1400" dirty="0" err="1"/>
-              <a:t>ey</a:t>
-            </a:r>
-            <a:r>
-              <a:rPr sz="1400" dirty="0"/>
-              <a:t> each iteration</a:t>
-            </a:r>
-          </a:p>
-          <a:p>
-            <a:pPr>
-              <a:spcBef>
-                <a:spcPts val="200"/>
-              </a:spcBef>
-              <a:defRPr sz="1600">
-                <a:solidFill>
-                  <a:srgbClr val="ABB2BF"/>
-                </a:solidFill>
-                <a:latin typeface="Consolas"/>
-              </a:defRPr>
-            </a:pPr>
-            <a:endParaRPr sz="1400" dirty="0"/>
-          </a:p>
-          <a:p>
-            <a:pPr>
-              <a:spcBef>
-                <a:spcPts val="200"/>
-              </a:spcBef>
-              <a:defRPr sz="1600">
-                <a:solidFill>
-                  <a:srgbClr val="ABB2BF"/>
-                </a:solidFill>
-                <a:latin typeface="Consolas"/>
-              </a:defRPr>
-            </a:pPr>
-            <a:r>
-              <a:rPr sz="1400" dirty="0"/>
-              <a:t># ... run your loop, collecting errors ...</a:t>
-            </a:r>
-          </a:p>
-          <a:p>
-            <a:pPr>
-              <a:spcBef>
-                <a:spcPts val="200"/>
-              </a:spcBef>
-              <a:defRPr sz="1600">
-                <a:solidFill>
-                  <a:srgbClr val="ABB2BF"/>
-                </a:solidFill>
-                <a:latin typeface="Consolas"/>
-              </a:defRPr>
-            </a:pPr>
-            <a:endParaRPr sz="1400" dirty="0"/>
-          </a:p>
-          <a:p>
-            <a:pPr>
-              <a:spcBef>
-                <a:spcPts val="200"/>
-              </a:spcBef>
-              <a:defRPr sz="1600">
-                <a:solidFill>
-                  <a:srgbClr val="ABB2BF"/>
-                </a:solidFill>
-                <a:latin typeface="Consolas"/>
-              </a:defRPr>
-            </a:pPr>
-            <a:r>
-              <a:rPr sz="1400" dirty="0" err="1"/>
-              <a:t>plt.figure</a:t>
-            </a:r>
-            <a:r>
-              <a:rPr sz="1400" dirty="0"/>
-              <a:t>(</a:t>
-            </a:r>
-            <a:r>
-              <a:rPr sz="1400" dirty="0" err="1"/>
-              <a:t>figsize</a:t>
-            </a:r>
-            <a:r>
-              <a:rPr sz="1400" dirty="0"/>
-              <a:t>=(8, 4))</a:t>
-            </a:r>
-          </a:p>
-          <a:p>
-            <a:pPr>
-              <a:spcBef>
-                <a:spcPts val="200"/>
-              </a:spcBef>
-              <a:defRPr sz="1600">
-                <a:solidFill>
-                  <a:srgbClr val="ABB2BF"/>
-                </a:solidFill>
-                <a:latin typeface="Consolas"/>
-              </a:defRPr>
-            </a:pPr>
-            <a:r>
-              <a:rPr sz="1400" dirty="0" err="1"/>
-              <a:t>plt.plot</a:t>
-            </a:r>
-            <a:r>
-              <a:rPr sz="1400" dirty="0"/>
-              <a:t>(</a:t>
-            </a:r>
-            <a:r>
-              <a:rPr sz="1400" dirty="0" err="1"/>
-              <a:t>errors_x</a:t>
-            </a:r>
-            <a:r>
-              <a:rPr sz="1400" dirty="0"/>
-              <a:t>, label='Error X (</a:t>
-            </a:r>
-            <a:r>
-              <a:rPr sz="1400" dirty="0" err="1"/>
-              <a:t>px</a:t>
-            </a:r>
-            <a:r>
-              <a:rPr sz="1400" dirty="0"/>
-              <a:t>)')</a:t>
-            </a:r>
-          </a:p>
-          <a:p>
-            <a:pPr>
-              <a:spcBef>
-                <a:spcPts val="200"/>
-              </a:spcBef>
-              <a:defRPr sz="1600">
-                <a:solidFill>
-                  <a:srgbClr val="ABB2BF"/>
-                </a:solidFill>
-                <a:latin typeface="Consolas"/>
-              </a:defRPr>
-            </a:pPr>
-            <a:r>
-              <a:rPr sz="1400" dirty="0" err="1"/>
-              <a:t>plt.plot</a:t>
-            </a:r>
-            <a:r>
-              <a:rPr sz="1400" dirty="0"/>
-              <a:t>(</a:t>
-            </a:r>
-            <a:r>
-              <a:rPr sz="1400" dirty="0" err="1"/>
-              <a:t>errors_y</a:t>
-            </a:r>
-            <a:r>
-              <a:rPr sz="1400" dirty="0"/>
-              <a:t>, label='Error Y (</a:t>
-            </a:r>
-            <a:r>
-              <a:rPr sz="1400" dirty="0" err="1"/>
-              <a:t>px</a:t>
-            </a:r>
-            <a:r>
-              <a:rPr sz="1400" dirty="0"/>
-              <a:t>)')</a:t>
-            </a:r>
-          </a:p>
-          <a:p>
-            <a:pPr>
-              <a:spcBef>
-                <a:spcPts val="200"/>
-              </a:spcBef>
-              <a:defRPr sz="1600">
-                <a:solidFill>
-                  <a:srgbClr val="ABB2BF"/>
-                </a:solidFill>
-                <a:latin typeface="Consolas"/>
-              </a:defRPr>
-            </a:pPr>
-            <a:r>
-              <a:rPr sz="1400" dirty="0" err="1"/>
-              <a:t>plt.axhline</a:t>
-            </a:r>
-            <a:r>
-              <a:rPr sz="1400" dirty="0"/>
-              <a:t>(y=0, color='gray', </a:t>
-            </a:r>
-            <a:r>
-              <a:rPr sz="1400" dirty="0" err="1"/>
-              <a:t>linestyle</a:t>
-            </a:r>
-            <a:r>
-              <a:rPr sz="1400" dirty="0"/>
-              <a:t>='--')</a:t>
-            </a:r>
-          </a:p>
-          <a:p>
-            <a:pPr>
-              <a:spcBef>
-                <a:spcPts val="200"/>
-              </a:spcBef>
-              <a:defRPr sz="1600">
-                <a:solidFill>
-                  <a:srgbClr val="ABB2BF"/>
-                </a:solidFill>
-                <a:latin typeface="Consolas"/>
-              </a:defRPr>
-            </a:pPr>
-            <a:r>
-              <a:rPr sz="1400" dirty="0" err="1"/>
-              <a:t>plt.axhline</a:t>
-            </a:r>
-            <a:r>
-              <a:rPr sz="1400" dirty="0"/>
-              <a:t>(y=TOLERANCE, color='red', </a:t>
-            </a:r>
-            <a:r>
-              <a:rPr sz="1400" dirty="0" err="1"/>
-              <a:t>linestyle</a:t>
-            </a:r>
-            <a:r>
-              <a:rPr sz="1400" dirty="0"/>
-              <a:t>=':', alpha=0.5)</a:t>
-            </a:r>
-          </a:p>
-          <a:p>
-            <a:pPr>
-              <a:spcBef>
-                <a:spcPts val="200"/>
-              </a:spcBef>
-              <a:defRPr sz="1600">
-                <a:solidFill>
-                  <a:srgbClr val="ABB2BF"/>
-                </a:solidFill>
-                <a:latin typeface="Consolas"/>
-              </a:defRPr>
-            </a:pPr>
-            <a:r>
-              <a:rPr sz="1400" dirty="0" err="1"/>
-              <a:t>plt.axhline</a:t>
-            </a:r>
-            <a:r>
-              <a:rPr sz="1400" dirty="0"/>
-              <a:t>(y=-TOLERANCE, color='red', </a:t>
-            </a:r>
-            <a:r>
-              <a:rPr sz="1400" dirty="0" err="1"/>
-              <a:t>linestyle</a:t>
-            </a:r>
-            <a:r>
-              <a:rPr sz="1400" dirty="0"/>
-              <a:t>=':', alpha=0.5)</a:t>
-            </a:r>
-          </a:p>
-          <a:p>
-            <a:pPr>
-              <a:spcBef>
-                <a:spcPts val="200"/>
-              </a:spcBef>
-              <a:defRPr sz="1600">
-                <a:solidFill>
-                  <a:srgbClr val="ABB2BF"/>
-                </a:solidFill>
-                <a:latin typeface="Consolas"/>
-              </a:defRPr>
-            </a:pPr>
-            <a:r>
-              <a:rPr sz="1400" dirty="0" err="1"/>
-              <a:t>plt.xlabel</a:t>
-            </a:r>
-            <a:r>
-              <a:rPr sz="1400" dirty="0"/>
-              <a:t>('Iteration')</a:t>
-            </a:r>
-          </a:p>
-          <a:p>
-            <a:pPr>
-              <a:spcBef>
-                <a:spcPts val="200"/>
-              </a:spcBef>
-              <a:defRPr sz="1600">
-                <a:solidFill>
-                  <a:srgbClr val="ABB2BF"/>
-                </a:solidFill>
-                <a:latin typeface="Consolas"/>
-              </a:defRPr>
-            </a:pPr>
-            <a:r>
-              <a:rPr sz="1400" dirty="0" err="1"/>
-              <a:t>plt.ylabel</a:t>
-            </a:r>
-            <a:r>
-              <a:rPr sz="1400" dirty="0"/>
-              <a:t>('Error (pixels)')</a:t>
-            </a:r>
-          </a:p>
-          <a:p>
-            <a:pPr>
-              <a:spcBef>
-                <a:spcPts val="200"/>
-              </a:spcBef>
-              <a:defRPr sz="1600">
-                <a:solidFill>
-                  <a:srgbClr val="ABB2BF"/>
-                </a:solidFill>
-                <a:latin typeface="Consolas"/>
-              </a:defRPr>
-            </a:pPr>
-            <a:r>
-              <a:rPr sz="1400" dirty="0" err="1"/>
-              <a:t>plt.title</a:t>
-            </a:r>
-            <a:r>
-              <a:rPr sz="1400" dirty="0"/>
-              <a:t>('Beam Center Convergence')</a:t>
-            </a:r>
-          </a:p>
-          <a:p>
-            <a:pPr>
-              <a:spcBef>
-                <a:spcPts val="200"/>
-              </a:spcBef>
-              <a:defRPr sz="1600">
-                <a:solidFill>
-                  <a:srgbClr val="ABB2BF"/>
-                </a:solidFill>
-                <a:latin typeface="Consolas"/>
-              </a:defRPr>
-            </a:pPr>
-            <a:r>
-              <a:rPr sz="1400" dirty="0" err="1"/>
-              <a:t>plt.legend</a:t>
-            </a:r>
-            <a:r>
-              <a:rPr sz="1400" dirty="0"/>
-              <a:t>()</a:t>
-            </a:r>
-          </a:p>
-          <a:p>
-            <a:pPr>
-              <a:spcBef>
-                <a:spcPts val="200"/>
-              </a:spcBef>
-              <a:defRPr sz="1600">
-                <a:solidFill>
-                  <a:srgbClr val="ABB2BF"/>
-                </a:solidFill>
-                <a:latin typeface="Consolas"/>
-              </a:defRPr>
-            </a:pPr>
-            <a:r>
-              <a:rPr sz="1400" dirty="0" err="1"/>
-              <a:t>plt.grid</a:t>
-            </a:r>
-            <a:r>
-              <a:rPr sz="1400" dirty="0"/>
-              <a:t>(True, alpha=0.3)</a:t>
-            </a:r>
-          </a:p>
-          <a:p>
-            <a:pPr>
-              <a:spcBef>
-                <a:spcPts val="200"/>
-              </a:spcBef>
-              <a:defRPr sz="1600">
-                <a:solidFill>
-                  <a:srgbClr val="ABB2BF"/>
-                </a:solidFill>
-                <a:latin typeface="Consolas"/>
-              </a:defRPr>
-            </a:pPr>
-            <a:r>
-              <a:rPr sz="1400" dirty="0" err="1"/>
-              <a:t>plt.show</a:t>
-            </a:r>
-            <a:r>
-              <a:rPr sz="1400" dirty="0"/>
-              <a:t>()</a:t>
+            <a:pPr algn="ctr">
+              <a:defRPr sz="2200" b="0">
+                <a:solidFill>
+                  <a:srgbClr val="CCCCCC"/>
+                </a:solidFill>
+                <a:latin typeface="Calibri"/>
+              </a:defRPr>
+            </a:pPr>
+            <a:r>
+              <a:t>From simulation to reality  (≈ 30 min)</a:t>
             </a:r>
           </a:p>
         </p:txBody>
@@ -13279,14 +13336,6 @@
 <file path=ppt/slides/slide36.xml><?xml version="1.0" encoding="utf-8"?>
 <p:sld xmlns:a="http://schemas.openxmlformats.org/drawingml/2006/main" xmlns:r="http://schemas.openxmlformats.org/officeDocument/2006/relationships" xmlns:p="http://schemas.openxmlformats.org/presentationml/2006/main">
   <p:cSld>
-    <p:bg>
-      <p:bgPr>
-        <a:solidFill>
-          <a:srgbClr val="1B1B2F"/>
-        </a:solidFill>
-        <a:effectLst/>
-      </p:bgPr>
-    </p:bg>
     <p:spTree>
       <p:nvGrpSpPr>
         <p:cNvPr id="1" name=""/>
@@ -13301,123 +13350,12 @@
           <a:chExt cx="0" cy="0"/>
         </a:xfrm>
       </p:grpSpPr>
-      <p:sp>
-        <p:nvSpPr>
-          <p:cNvPr id="2" name="Rectangle 1"/>
-          <p:cNvSpPr/>
-          <p:nvPr/>
-        </p:nvSpPr>
-        <p:spPr>
-          <a:xfrm>
-            <a:off x="0" y="2926080"/>
-            <a:ext cx="12191695" cy="54864"/>
-          </a:xfrm>
-          <a:prstGeom prst="rect">
-            <a:avLst/>
-          </a:prstGeom>
-          <a:solidFill>
-            <a:srgbClr val="00B4D8"/>
-          </a:solidFill>
-          <a:ln>
-            <a:noFill/>
-          </a:ln>
-        </p:spPr>
-        <p:style>
-          <a:lnRef idx="1">
-            <a:schemeClr val="accent1"/>
-          </a:lnRef>
-          <a:fillRef idx="3">
-            <a:schemeClr val="accent1"/>
-          </a:fillRef>
-          <a:effectRef idx="2">
-            <a:schemeClr val="accent1"/>
-          </a:effectRef>
-          <a:fontRef idx="minor">
-            <a:schemeClr val="lt1"/>
-          </a:fontRef>
-        </p:style>
-        <p:txBody>
-          <a:bodyPr rtlCol="0" anchor="ctr"/>
-          <a:lstStyle/>
-          <a:p>
-            <a:pPr algn="ctr"/>
-            <a:endParaRPr/>
-          </a:p>
-        </p:txBody>
-      </p:sp>
-      <p:sp>
-        <p:nvSpPr>
-          <p:cNvPr id="3" name="TextBox 2"/>
-          <p:cNvSpPr txBox="1"/>
-          <p:nvPr/>
-        </p:nvSpPr>
-        <p:spPr>
-          <a:xfrm>
-            <a:off x="731520" y="1828800"/>
-            <a:ext cx="10515600" cy="1097280"/>
-          </a:xfrm>
-          <a:prstGeom prst="rect">
-            <a:avLst/>
-          </a:prstGeom>
-          <a:noFill/>
-        </p:spPr>
-        <p:txBody>
-          <a:bodyPr wrap="square">
-            <a:spAutoFit/>
-          </a:bodyPr>
-          <a:lstStyle/>
-          <a:p>
-            <a:pPr algn="ctr">
-              <a:defRPr sz="4000" b="1">
-                <a:solidFill>
-                  <a:srgbClr val="00B4D8"/>
-                </a:solidFill>
-                <a:latin typeface="Calibri"/>
-              </a:defRPr>
-            </a:pPr>
-            <a:r>
-              <a:t>Part 5 – Real Hardware!</a:t>
-            </a:r>
-          </a:p>
-        </p:txBody>
-      </p:sp>
-      <p:sp>
-        <p:nvSpPr>
-          <p:cNvPr id="4" name="TextBox 3"/>
-          <p:cNvSpPr txBox="1"/>
-          <p:nvPr/>
-        </p:nvSpPr>
-        <p:spPr>
-          <a:xfrm>
-            <a:off x="1371600" y="3291840"/>
-            <a:ext cx="9144000" cy="914400"/>
-          </a:xfrm>
-          <a:prstGeom prst="rect">
-            <a:avLst/>
-          </a:prstGeom>
-          <a:noFill/>
-        </p:spPr>
-        <p:txBody>
-          <a:bodyPr wrap="square">
-            <a:spAutoFit/>
-          </a:bodyPr>
-          <a:lstStyle/>
-          <a:p>
-            <a:pPr algn="ctr">
-              <a:defRPr sz="2200" b="0">
-                <a:solidFill>
-                  <a:srgbClr val="CCCCCC"/>
-                </a:solidFill>
-                <a:latin typeface="Calibri"/>
-              </a:defRPr>
-            </a:pPr>
-            <a:r>
-              <a:t>From simulation to reality  (≈ 30 min)</a:t>
-            </a:r>
-          </a:p>
-        </p:txBody>
-      </p:sp>
     </p:spTree>
+    <p:extLst>
+      <p:ext uri="{BB962C8B-B14F-4D97-AF65-F5344CB8AC3E}">
+        <p14:creationId xmlns:p14="http://schemas.microsoft.com/office/powerpoint/2010/main" val="226944059"/>
+      </p:ext>
+    </p:extLst>
   </p:cSld>
   <p:clrMapOvr>
     <a:masterClrMapping/>
@@ -15374,7 +15312,7 @@
         <p:spPr>
           <a:xfrm>
             <a:off x="731520" y="1371600"/>
-            <a:ext cx="10515600" cy="5029200"/>
+            <a:ext cx="10515600" cy="2195473"/>
           </a:xfrm>
           <a:prstGeom prst="rect">
             <a:avLst/>
@@ -15399,6 +15337,7 @@
               </a:defRPr>
             </a:pPr>
             <a:r>
+              <a:rPr dirty="0"/>
               <a:t>▸  EPICS = Experimental Physics and Industrial Control System</a:t>
             </a:r>
           </a:p>
@@ -15415,6 +15354,7 @@
               </a:defRPr>
             </a:pPr>
             <a:r>
+              <a:rPr dirty="0"/>
               <a:t>▸  Born at Los Alamos / Argonne in the 1990s – open source, community-driven</a:t>
             </a:r>
           </a:p>
@@ -15431,7 +15371,16 @@
               </a:defRPr>
             </a:pPr>
             <a:r>
-              <a:t>▸  Used at CERN, ESS, SLAC, DESY, INFN, …  hundreds of facilities</a:t>
+              <a:rPr dirty="0"/>
+              <a:t>▸  Used at </a:t>
+            </a:r>
+            <a:r>
+              <a:rPr lang="en-US" dirty="0"/>
+              <a:t>DLS</a:t>
+            </a:r>
+            <a:r>
+              <a:rPr dirty="0"/>
+              <a:t>, ESS, SLAC, DESY, INFN, …  hundreds of facilities</a:t>
             </a:r>
           </a:p>
           <a:p>
@@ -15447,6 +15396,7 @@
               </a:defRPr>
             </a:pPr>
             <a:r>
+              <a:rPr dirty="0"/>
               <a:t>▸  Core idea: everything is a Process Variable (PV)</a:t>
             </a:r>
           </a:p>
@@ -15463,6 +15413,7 @@
               </a:defRPr>
             </a:pPr>
             <a:r>
+              <a:rPr dirty="0"/>
               <a:t>▸  Network protocols: Channel Access (CA) and PV Access (PVA)</a:t>
             </a:r>
           </a:p>
@@ -16118,7 +16069,7 @@
         <p:spPr>
           <a:xfrm>
             <a:off x="731520" y="1371600"/>
-            <a:ext cx="10515600" cy="5029200"/>
+            <a:ext cx="10972800" cy="3380413"/>
           </a:xfrm>
           <a:prstGeom prst="rect">
             <a:avLst/>
@@ -16143,6 +16094,7 @@
               </a:defRPr>
             </a:pPr>
             <a:r>
+              <a:rPr dirty="0"/>
               <a:t>▸  Phoebus is a Java-based GUI for operating EPICS systems</a:t>
             </a:r>
           </a:p>
@@ -16159,6 +16111,7 @@
               </a:defRPr>
             </a:pPr>
             <a:r>
+              <a:rPr dirty="0"/>
               <a:t>▸  Built-in tools: PV probe, strip charts, alarm panels, OPI screens</a:t>
             </a:r>
           </a:p>
@@ -16175,6 +16128,7 @@
               </a:defRPr>
             </a:pPr>
             <a:r>
+              <a:rPr dirty="0"/>
               <a:t>▸  OPI screens (*.bob files) are custom control panels</a:t>
             </a:r>
           </a:p>
@@ -16191,6 +16145,7 @@
               </a:defRPr>
             </a:pPr>
             <a:r>
+              <a:rPr dirty="0"/>
               <a:t>▸  We pre-built screens for:</a:t>
             </a:r>
           </a:p>
@@ -16207,6 +16162,7 @@
               </a:defRPr>
             </a:pPr>
             <a:r>
+              <a:rPr dirty="0"/>
               <a:t>     ‣  Motor control panel – move, home, set limits</a:t>
             </a:r>
           </a:p>
@@ -16223,6 +16179,7 @@
               </a:defRPr>
             </a:pPr>
             <a:r>
+              <a:rPr dirty="0"/>
               <a:t>     ‣  Camera viewer – live image, overlays, statistics</a:t>
             </a:r>
           </a:p>
@@ -16239,6 +16196,7 @@
               </a:defRPr>
             </a:pPr>
             <a:r>
+              <a:rPr dirty="0"/>
               <a:t>     ‣  Launcher – one-click access to all screens</a:t>
             </a:r>
           </a:p>
@@ -16255,8 +16213,38 @@
               </a:defRPr>
             </a:pPr>
             <a:r>
-              <a:t>▸  You open Phoebus from the terminal:  phoebus -resource Launcher.bob</a:t>
-            </a:r>
+              <a:rPr dirty="0"/>
+              <a:t>▸  You open Phoebus from the terminal:  </a:t>
+            </a:r>
+            <a:r>
+              <a:rPr i="1" dirty="0" err="1"/>
+              <a:t>phoebus</a:t>
+            </a:r>
+            <a:r>
+              <a:rPr i="1" dirty="0"/>
+              <a:t> </a:t>
+            </a:r>
+            <a:r>
+              <a:rPr lang="en-US" i="1" dirty="0"/>
+              <a:t>-settings </a:t>
+            </a:r>
+            <a:r>
+              <a:rPr lang="en-US" i="1" dirty="0" err="1"/>
+              <a:t>settings.ini</a:t>
+            </a:r>
+            <a:r>
+              <a:rPr lang="en-US" i="1" dirty="0"/>
+              <a:t> </a:t>
+            </a:r>
+            <a:r>
+              <a:rPr i="1" dirty="0"/>
+              <a:t>-resource </a:t>
+            </a:r>
+            <a:r>
+              <a:rPr i="1" dirty="0" err="1"/>
+              <a:t>Launcher.bob</a:t>
+            </a:r>
+            <a:endParaRPr i="1" dirty="0"/>
           </a:p>
         </p:txBody>
       </p:sp>
